--- a/paper/EIGENNEXUS_MATGENQ_Value_Story.pptx
+++ b/paper/EIGENNEXUS_MATGENQ_Value_Story.pptx
@@ -14,9 +14,10 @@
     <p:sldId id="262" r:id="rId8"/>
     <p:sldId id="263" r:id="rId9"/>
     <p:sldId id="264" r:id="rId10"/>
+    <p:sldId id="265" r:id="rId11"/>
   </p:sldIdLst>
   <p:notesMasterIdLst>
-    <p:notesMasterId r:id="rId11"/>
+    <p:notesMasterId r:id="rId12"/>
   </p:notesMasterIdLst>
   <p:sldSz cx="12161520" cy="6858000"/>
   <p:notesSz cx="6858000" cy="12161520"/>
@@ -534,6 +535,94 @@
             <a:fld id="{F7021451-1387-4CA6-816F-3879F97B5CBC}" type="slidenum">
               <a:rPr lang="en-US"/>
               <a:t>1</a:t>
+            </a:fld>
+            <a:endParaRPr lang="en-US"/>
+          </a:p>
+        </p:txBody>
+      </p:sp>
+    </p:spTree>
+    <p:extLst>
+      <p:ext uri="{BB962C8B-B14F-4D97-AF65-F5344CB8AC3E}">
+        <p14:creationId xmlns:p14="http://schemas.microsoft.com/office/powerpoint/2010/main" val="1024086991"/>
+      </p:ext>
+    </p:extLst>
+  </p:cSld>
+  <p:clrMapOvr>
+    <a:masterClrMapping/>
+  </p:clrMapOvr>
+</p:notes>
+</file>
+
+<file path=ppt/notesSlides/notesSlide10.xml><?xml version="1.0" encoding="utf-8"?>
+<p:notes xmlns:a="http://schemas.openxmlformats.org/drawingml/2006/main" xmlns:r="http://schemas.openxmlformats.org/officeDocument/2006/relationships" xmlns:p="http://schemas.openxmlformats.org/presentationml/2006/main">
+  <p:cSld>
+    <p:spTree>
+      <p:nvGrpSpPr>
+        <p:cNvPr id="1" name=""/>
+        <p:cNvGrpSpPr/>
+        <p:nvPr/>
+      </p:nvGrpSpPr>
+      <p:grpSpPr>
+        <a:xfrm>
+          <a:off x="0" y="0"/>
+          <a:ext cx="0" cy="0"/>
+          <a:chOff x="0" y="0"/>
+          <a:chExt cx="0" cy="0"/>
+        </a:xfrm>
+      </p:grpSpPr>
+      <p:sp>
+        <p:nvSpPr>
+          <p:cNvPr id="2" name="Slide Image Placeholder 1"/>
+          <p:cNvSpPr>
+            <a:spLocks noGrp="1" noRot="1" noChangeAspect="1"/>
+          </p:cNvSpPr>
+          <p:nvPr>
+            <p:ph type="sldImg"/>
+          </p:nvPr>
+        </p:nvSpPr>
+        <p:spPr/>
+      </p:sp>
+      <p:sp>
+        <p:nvSpPr>
+          <p:cNvPr id="3" name="Notes Placeholder 2"/>
+          <p:cNvSpPr>
+            <a:spLocks noGrp="1"/>
+          </p:cNvSpPr>
+          <p:nvPr>
+            <p:ph type="body" idx="1"/>
+          </p:nvPr>
+        </p:nvSpPr>
+        <p:spPr/>
+        <p:txBody>
+          <a:bodyPr/>
+          <a:lstStyle/>
+          <a:p>
+            <a:r>
+              <a:rPr lang="en-US" dirty="0"/>
+              <a:t/>
+            </a:r>
+            <a:endParaRPr lang="en-US" dirty="0"/>
+          </a:p>
+        </p:txBody>
+      </p:sp>
+      <p:sp>
+        <p:nvSpPr>
+          <p:cNvPr id="4" name="Slide Number Placeholder 3"/>
+          <p:cNvSpPr>
+            <a:spLocks noGrp="1"/>
+          </p:cNvSpPr>
+          <p:nvPr>
+            <p:ph type="sldNum" sz="quarter" idx="10"/>
+          </p:nvPr>
+        </p:nvSpPr>
+        <p:spPr/>
+        <p:txBody>
+          <a:bodyPr/>
+          <a:lstStyle/>
+          <a:p>
+            <a:fld id="{F7021451-1387-4CA6-816F-3879F97B5CBC}" type="slidenum">
+              <a:rPr lang="en-US"/>
+              <a:t>10</a:t>
             </a:fld>
             <a:endParaRPr lang="en-US"/>
           </a:p>
@@ -2075,6 +2164,693 @@
 </p:sld>
 </file>
 
+<file path=ppt/slides/slide10.xml><?xml version="1.0" encoding="utf-8"?>
+<p:sld xmlns:a="http://schemas.openxmlformats.org/drawingml/2006/main" xmlns:r="http://schemas.openxmlformats.org/officeDocument/2006/relationships" xmlns:p="http://schemas.openxmlformats.org/presentationml/2006/main">
+  <p:cSld name="Slide 10">
+    <p:bg>
+      <p:bgPr>
+        <a:solidFill>
+          <a:srgbClr val="0B1220"/>
+        </a:solidFill>
+      </p:bgPr>
+    </p:bg>
+    <p:spTree>
+      <p:nvGrpSpPr>
+        <p:cNvPr id="1" name=""/>
+        <p:cNvGrpSpPr/>
+        <p:nvPr/>
+      </p:nvGrpSpPr>
+      <p:grpSpPr>
+        <a:xfrm>
+          <a:off x="0" y="0"/>
+          <a:ext cx="0" cy="0"/>
+          <a:chOff x="0" y="0"/>
+          <a:chExt cx="0" cy="0"/>
+        </a:xfrm>
+      </p:grpSpPr>
+      <p:sp>
+        <p:nvSpPr>
+          <p:cNvPr id="2" name="Text 0"/>
+          <p:cNvSpPr/>
+          <p:nvPr/>
+        </p:nvSpPr>
+        <p:spPr>
+          <a:xfrm>
+            <a:off x="685800" y="384048"/>
+            <a:ext cx="10789920" cy="274320"/>
+          </a:xfrm>
+          <a:prstGeom prst="rect">
+            <a:avLst/>
+          </a:prstGeom>
+          <a:noFill/>
+          <a:ln/>
+        </p:spPr>
+        <p:txBody>
+          <a:bodyPr wrap="square" lIns="0" tIns="0" rIns="0" bIns="0" rtlCol="0" anchor="ctr"/>
+          <a:lstStyle/>
+          <a:p>
+            <a:pPr indent="0" marL="0">
+              <a:buNone/>
+            </a:pPr>
+            <a:r>
+              <a:rPr lang="en-US" sz="1200" b="1" spc="300" kern="0" dirty="0">
+                <a:solidFill>
+                  <a:srgbClr val="4FD1E0"/>
+                </a:solidFill>
+                <a:latin typeface="Calibri" pitchFamily="34" charset="0"/>
+                <a:ea typeface="Calibri" pitchFamily="34" charset="-122"/>
+                <a:cs typeface="Calibri" pitchFamily="34" charset="-120"/>
+              </a:rPr>
+              <a:t>BOTTOM LINE</a:t>
+            </a:r>
+            <a:endParaRPr lang="en-US" sz="1200" dirty="0"/>
+          </a:p>
+        </p:txBody>
+      </p:sp>
+      <p:sp>
+        <p:nvSpPr>
+          <p:cNvPr id="3" name="Text 1"/>
+          <p:cNvSpPr/>
+          <p:nvPr/>
+        </p:nvSpPr>
+        <p:spPr>
+          <a:xfrm>
+            <a:off x="685800" y="749808"/>
+            <a:ext cx="10789920" cy="914400"/>
+          </a:xfrm>
+          <a:prstGeom prst="rect">
+            <a:avLst/>
+          </a:prstGeom>
+          <a:noFill/>
+          <a:ln/>
+        </p:spPr>
+        <p:txBody>
+          <a:bodyPr wrap="square" lIns="0" tIns="0" rIns="0" bIns="0" rtlCol="0" anchor="ctr"/>
+          <a:lstStyle/>
+          <a:p>
+            <a:pPr indent="0" marL="0">
+              <a:buNone/>
+            </a:pPr>
+            <a:r>
+              <a:rPr lang="en-US" sz="3100" b="1" dirty="0">
+                <a:solidFill>
+                  <a:srgbClr val="FFFFFF"/>
+                </a:solidFill>
+                <a:latin typeface="Cambria" pitchFamily="34" charset="0"/>
+                <a:ea typeface="Cambria" pitchFamily="34" charset="-122"/>
+                <a:cs typeface="Cambria" pitchFamily="34" charset="-120"/>
+              </a:rPr>
+              <a:t>Where MATGEN-Q sits in the pipeline</a:t>
+            </a:r>
+            <a:endParaRPr lang="en-US" sz="3100" dirty="0"/>
+          </a:p>
+        </p:txBody>
+      </p:sp>
+      <p:sp>
+        <p:nvSpPr>
+          <p:cNvPr id="4" name="Shape 2"/>
+          <p:cNvSpPr/>
+          <p:nvPr/>
+        </p:nvSpPr>
+        <p:spPr>
+          <a:xfrm>
+            <a:off x="685800" y="1874520"/>
+            <a:ext cx="2377440" cy="1143000"/>
+          </a:xfrm>
+          <a:prstGeom prst="roundRect">
+            <a:avLst>
+              <a:gd name="adj" fmla="val 6400"/>
+            </a:avLst>
+          </a:prstGeom>
+          <a:solidFill>
+            <a:srgbClr val="151E33"/>
+          </a:solidFill>
+          <a:ln/>
+          <a:effectLst>
+            <a:outerShdw sx="100000" sy="100000" kx="0" ky="0" algn="bl" rotWithShape="0" blurRad="127000" dist="38100" dir="5400000">
+              <a:srgbClr val="000000">
+                <a:alpha val="35000"/>
+              </a:srgbClr>
+            </a:outerShdw>
+          </a:effectLst>
+        </p:spPr>
+      </p:sp>
+      <p:sp>
+        <p:nvSpPr>
+          <p:cNvPr id="5" name="Text 3"/>
+          <p:cNvSpPr/>
+          <p:nvPr/>
+        </p:nvSpPr>
+        <p:spPr>
+          <a:xfrm>
+            <a:off x="822960" y="1874520"/>
+            <a:ext cx="2103120" cy="1143000"/>
+          </a:xfrm>
+          <a:prstGeom prst="rect">
+            <a:avLst/>
+          </a:prstGeom>
+          <a:noFill/>
+          <a:ln/>
+        </p:spPr>
+        <p:txBody>
+          <a:bodyPr wrap="square" lIns="0" tIns="0" rIns="0" bIns="0" rtlCol="0" anchor="ctr"/>
+          <a:lstStyle/>
+          <a:p>
+            <a:pPr algn="ctr" indent="0" marL="0">
+              <a:buNone/>
+            </a:pPr>
+            <a:r>
+              <a:rPr lang="en-US" sz="1350" dirty="0">
+                <a:solidFill>
+                  <a:srgbClr val="E8EDF7"/>
+                </a:solidFill>
+                <a:latin typeface="Calibri" pitchFamily="34" charset="0"/>
+                <a:ea typeface="Calibri" pitchFamily="34" charset="-122"/>
+                <a:cs typeface="Calibri" pitchFamily="34" charset="-120"/>
+              </a:rPr>
+              <a:t>AI proposes</a:t>
+            </a:r>
+            <a:endParaRPr lang="en-US" sz="1350" dirty="0"/>
+          </a:p>
+        </p:txBody>
+      </p:sp>
+      <p:sp>
+        <p:nvSpPr>
+          <p:cNvPr id="6" name="Text 4"/>
+          <p:cNvSpPr/>
+          <p:nvPr/>
+        </p:nvSpPr>
+        <p:spPr>
+          <a:xfrm>
+            <a:off x="3044952" y="1874520"/>
+            <a:ext cx="274320" cy="1143000"/>
+          </a:xfrm>
+          <a:prstGeom prst="rect">
+            <a:avLst/>
+          </a:prstGeom>
+          <a:noFill/>
+          <a:ln/>
+        </p:spPr>
+        <p:txBody>
+          <a:bodyPr wrap="square" lIns="0" tIns="0" rIns="0" bIns="0" rtlCol="0" anchor="ctr"/>
+          <a:lstStyle/>
+          <a:p>
+            <a:pPr algn="ctr" indent="0" marL="0">
+              <a:buNone/>
+            </a:pPr>
+            <a:r>
+              <a:rPr lang="en-US" sz="1700" dirty="0">
+                <a:solidFill>
+                  <a:srgbClr val="5D6B8A"/>
+                </a:solidFill>
+                <a:latin typeface="Calibri" pitchFamily="34" charset="0"/>
+                <a:ea typeface="Calibri" pitchFamily="34" charset="-122"/>
+                <a:cs typeface="Calibri" pitchFamily="34" charset="-120"/>
+              </a:rPr>
+              <a:t>→</a:t>
+            </a:r>
+            <a:endParaRPr lang="en-US" sz="1700" dirty="0"/>
+          </a:p>
+        </p:txBody>
+      </p:sp>
+      <p:sp>
+        <p:nvSpPr>
+          <p:cNvPr id="7" name="Shape 5"/>
+          <p:cNvSpPr/>
+          <p:nvPr/>
+        </p:nvSpPr>
+        <p:spPr>
+          <a:xfrm>
+            <a:off x="3264408" y="1874520"/>
+            <a:ext cx="2651760" cy="1143000"/>
+          </a:xfrm>
+          <a:prstGeom prst="roundRect">
+            <a:avLst>
+              <a:gd name="adj" fmla="val 6400"/>
+            </a:avLst>
+          </a:prstGeom>
+          <a:solidFill>
+            <a:srgbClr val="151E33"/>
+          </a:solidFill>
+          <a:ln/>
+          <a:effectLst>
+            <a:outerShdw sx="100000" sy="100000" kx="0" ky="0" algn="bl" rotWithShape="0" blurRad="127000" dist="38100" dir="5400000">
+              <a:srgbClr val="000000">
+                <a:alpha val="35000"/>
+              </a:srgbClr>
+            </a:outerShdw>
+          </a:effectLst>
+        </p:spPr>
+      </p:sp>
+      <p:sp>
+        <p:nvSpPr>
+          <p:cNvPr id="8" name="Text 6"/>
+          <p:cNvSpPr/>
+          <p:nvPr/>
+        </p:nvSpPr>
+        <p:spPr>
+          <a:xfrm>
+            <a:off x="3401568" y="1874520"/>
+            <a:ext cx="2377440" cy="1143000"/>
+          </a:xfrm>
+          <a:prstGeom prst="rect">
+            <a:avLst/>
+          </a:prstGeom>
+          <a:noFill/>
+          <a:ln/>
+        </p:spPr>
+        <p:txBody>
+          <a:bodyPr wrap="square" lIns="0" tIns="0" rIns="0" bIns="0" rtlCol="0" anchor="ctr"/>
+          <a:lstStyle/>
+          <a:p>
+            <a:pPr algn="ctr" indent="0" marL="0">
+              <a:buNone/>
+            </a:pPr>
+            <a:r>
+              <a:rPr lang="en-US" sz="1350" dirty="0">
+                <a:solidFill>
+                  <a:srgbClr val="E8EDF7"/>
+                </a:solidFill>
+                <a:latin typeface="Calibri" pitchFamily="34" charset="0"/>
+                <a:ea typeface="Calibri" pitchFamily="34" charset="-122"/>
+                <a:cs typeface="Calibri" pitchFamily="34" charset="-120"/>
+              </a:rPr>
+              <a:t>Classical screens</a:t>
+            </a:r>
+            <a:endParaRPr lang="en-US" sz="1350" dirty="0"/>
+          </a:p>
+        </p:txBody>
+      </p:sp>
+      <p:sp>
+        <p:nvSpPr>
+          <p:cNvPr id="9" name="Text 7"/>
+          <p:cNvSpPr/>
+          <p:nvPr/>
+        </p:nvSpPr>
+        <p:spPr>
+          <a:xfrm>
+            <a:off x="5897880" y="1874520"/>
+            <a:ext cx="274320" cy="1143000"/>
+          </a:xfrm>
+          <a:prstGeom prst="rect">
+            <a:avLst/>
+          </a:prstGeom>
+          <a:noFill/>
+          <a:ln/>
+        </p:spPr>
+        <p:txBody>
+          <a:bodyPr wrap="square" lIns="0" tIns="0" rIns="0" bIns="0" rtlCol="0" anchor="ctr"/>
+          <a:lstStyle/>
+          <a:p>
+            <a:pPr algn="ctr" indent="0" marL="0">
+              <a:buNone/>
+            </a:pPr>
+            <a:r>
+              <a:rPr lang="en-US" sz="1700" dirty="0">
+                <a:solidFill>
+                  <a:srgbClr val="5D6B8A"/>
+                </a:solidFill>
+                <a:latin typeface="Calibri" pitchFamily="34" charset="0"/>
+                <a:ea typeface="Calibri" pitchFamily="34" charset="-122"/>
+                <a:cs typeface="Calibri" pitchFamily="34" charset="-120"/>
+              </a:rPr>
+              <a:t>→</a:t>
+            </a:r>
+            <a:endParaRPr lang="en-US" sz="1700" dirty="0"/>
+          </a:p>
+        </p:txBody>
+      </p:sp>
+      <p:sp>
+        <p:nvSpPr>
+          <p:cNvPr id="10" name="Shape 8"/>
+          <p:cNvSpPr/>
+          <p:nvPr/>
+        </p:nvSpPr>
+        <p:spPr>
+          <a:xfrm>
+            <a:off x="6117336" y="1874520"/>
+            <a:ext cx="3566160" cy="1143000"/>
+          </a:xfrm>
+          <a:prstGeom prst="roundRect">
+            <a:avLst>
+              <a:gd name="adj" fmla="val 6400"/>
+            </a:avLst>
+          </a:prstGeom>
+          <a:solidFill>
+            <a:srgbClr val="1E3A52"/>
+          </a:solidFill>
+          <a:ln/>
+          <a:effectLst>
+            <a:outerShdw sx="100000" sy="100000" kx="0" ky="0" algn="bl" rotWithShape="0" blurRad="127000" dist="38100" dir="5400000">
+              <a:srgbClr val="000000">
+                <a:alpha val="35000"/>
+              </a:srgbClr>
+            </a:outerShdw>
+          </a:effectLst>
+        </p:spPr>
+      </p:sp>
+      <p:sp>
+        <p:nvSpPr>
+          <p:cNvPr id="11" name="Text 9"/>
+          <p:cNvSpPr/>
+          <p:nvPr/>
+        </p:nvSpPr>
+        <p:spPr>
+          <a:xfrm>
+            <a:off x="6254496" y="1874520"/>
+            <a:ext cx="3291840" cy="1143000"/>
+          </a:xfrm>
+          <a:prstGeom prst="rect">
+            <a:avLst/>
+          </a:prstGeom>
+          <a:noFill/>
+          <a:ln/>
+        </p:spPr>
+        <p:txBody>
+          <a:bodyPr wrap="square" lIns="0" tIns="0" rIns="0" bIns="0" rtlCol="0" anchor="ctr"/>
+          <a:lstStyle/>
+          <a:p>
+            <a:pPr algn="ctr" indent="0" marL="0">
+              <a:buNone/>
+            </a:pPr>
+            <a:r>
+              <a:rPr lang="en-US" sz="1500" b="1" dirty="0">
+                <a:solidFill>
+                  <a:srgbClr val="4FD1E0"/>
+                </a:solidFill>
+                <a:latin typeface="Calibri" pitchFamily="34" charset="0"/>
+                <a:ea typeface="Calibri" pitchFamily="34" charset="-122"/>
+                <a:cs typeface="Calibri" pitchFamily="34" charset="-120"/>
+              </a:rPr>
+              <a:t>MATGEN-Q trust gate</a:t>
+            </a:r>
+            <a:endParaRPr lang="en-US" sz="1500" dirty="0"/>
+          </a:p>
+        </p:txBody>
+      </p:sp>
+      <p:sp>
+        <p:nvSpPr>
+          <p:cNvPr id="12" name="Text 10"/>
+          <p:cNvSpPr/>
+          <p:nvPr/>
+        </p:nvSpPr>
+        <p:spPr>
+          <a:xfrm>
+            <a:off x="9665208" y="1874520"/>
+            <a:ext cx="274320" cy="1143000"/>
+          </a:xfrm>
+          <a:prstGeom prst="rect">
+            <a:avLst/>
+          </a:prstGeom>
+          <a:noFill/>
+          <a:ln/>
+        </p:spPr>
+        <p:txBody>
+          <a:bodyPr wrap="square" lIns="0" tIns="0" rIns="0" bIns="0" rtlCol="0" anchor="ctr"/>
+          <a:lstStyle/>
+          <a:p>
+            <a:pPr algn="ctr" indent="0" marL="0">
+              <a:buNone/>
+            </a:pPr>
+            <a:r>
+              <a:rPr lang="en-US" sz="1700" dirty="0">
+                <a:solidFill>
+                  <a:srgbClr val="5D6B8A"/>
+                </a:solidFill>
+                <a:latin typeface="Calibri" pitchFamily="34" charset="0"/>
+                <a:ea typeface="Calibri" pitchFamily="34" charset="-122"/>
+                <a:cs typeface="Calibri" pitchFamily="34" charset="-120"/>
+              </a:rPr>
+              <a:t>→</a:t>
+            </a:r>
+            <a:endParaRPr lang="en-US" sz="1700" dirty="0"/>
+          </a:p>
+        </p:txBody>
+      </p:sp>
+      <p:sp>
+        <p:nvSpPr>
+          <p:cNvPr id="13" name="Shape 11"/>
+          <p:cNvSpPr/>
+          <p:nvPr/>
+        </p:nvSpPr>
+        <p:spPr>
+          <a:xfrm>
+            <a:off x="9884664" y="1874520"/>
+            <a:ext cx="2194560" cy="1143000"/>
+          </a:xfrm>
+          <a:prstGeom prst="roundRect">
+            <a:avLst>
+              <a:gd name="adj" fmla="val 6400"/>
+            </a:avLst>
+          </a:prstGeom>
+          <a:solidFill>
+            <a:srgbClr val="151E33"/>
+          </a:solidFill>
+          <a:ln/>
+          <a:effectLst>
+            <a:outerShdw sx="100000" sy="100000" kx="0" ky="0" algn="bl" rotWithShape="0" blurRad="127000" dist="38100" dir="5400000">
+              <a:srgbClr val="000000">
+                <a:alpha val="35000"/>
+              </a:srgbClr>
+            </a:outerShdw>
+          </a:effectLst>
+        </p:spPr>
+      </p:sp>
+      <p:sp>
+        <p:nvSpPr>
+          <p:cNvPr id="14" name="Text 12"/>
+          <p:cNvSpPr/>
+          <p:nvPr/>
+        </p:nvSpPr>
+        <p:spPr>
+          <a:xfrm>
+            <a:off x="10021824" y="1874520"/>
+            <a:ext cx="1920240" cy="1143000"/>
+          </a:xfrm>
+          <a:prstGeom prst="rect">
+            <a:avLst/>
+          </a:prstGeom>
+          <a:noFill/>
+          <a:ln/>
+        </p:spPr>
+        <p:txBody>
+          <a:bodyPr wrap="square" lIns="0" tIns="0" rIns="0" bIns="0" rtlCol="0" anchor="ctr"/>
+          <a:lstStyle/>
+          <a:p>
+            <a:pPr algn="ctr" indent="0" marL="0">
+              <a:buNone/>
+            </a:pPr>
+            <a:r>
+              <a:rPr lang="en-US" sz="1350" dirty="0">
+                <a:solidFill>
+                  <a:srgbClr val="E8EDF7"/>
+                </a:solidFill>
+                <a:latin typeface="Calibri" pitchFamily="34" charset="0"/>
+                <a:ea typeface="Calibri" pitchFamily="34" charset="-122"/>
+                <a:cs typeface="Calibri" pitchFamily="34" charset="-120"/>
+              </a:rPr>
+              <a:t>Synthesize</a:t>
+            </a:r>
+            <a:endParaRPr lang="en-US" sz="1350" dirty="0"/>
+          </a:p>
+        </p:txBody>
+      </p:sp>
+      <p:sp>
+        <p:nvSpPr>
+          <p:cNvPr id="15" name="Text 13"/>
+          <p:cNvSpPr/>
+          <p:nvPr/>
+        </p:nvSpPr>
+        <p:spPr>
+          <a:xfrm>
+            <a:off x="685800" y="3154680"/>
+            <a:ext cx="10789920" cy="365760"/>
+          </a:xfrm>
+          <a:prstGeom prst="rect">
+            <a:avLst/>
+          </a:prstGeom>
+          <a:noFill/>
+          <a:ln/>
+        </p:spPr>
+        <p:txBody>
+          <a:bodyPr wrap="square" lIns="0" tIns="0" rIns="0" bIns="0" rtlCol="0" anchor="ctr"/>
+          <a:lstStyle/>
+          <a:p>
+            <a:pPr indent="0" marL="0">
+              <a:buNone/>
+            </a:pPr>
+            <a:r>
+              <a:rPr lang="en-US" sz="1350" i="1" dirty="0">
+                <a:solidFill>
+                  <a:srgbClr val="8B98B4"/>
+                </a:solidFill>
+                <a:latin typeface="Calibri" pitchFamily="34" charset="0"/>
+                <a:ea typeface="Calibri" pitchFamily="34" charset="-122"/>
+                <a:cs typeface="Calibri" pitchFamily="34" charset="-120"/>
+              </a:rPr>
+              <a:t>Applied only to the strongly-correlated candidates — the subset where the classical screen is unreliable.</a:t>
+            </a:r>
+            <a:endParaRPr lang="en-US" sz="1350" dirty="0"/>
+          </a:p>
+        </p:txBody>
+      </p:sp>
+      <p:sp>
+        <p:nvSpPr>
+          <p:cNvPr id="16" name="Shape 14"/>
+          <p:cNvSpPr/>
+          <p:nvPr/>
+        </p:nvSpPr>
+        <p:spPr>
+          <a:xfrm>
+            <a:off x="685800" y="3703320"/>
+            <a:ext cx="10789920" cy="1965960"/>
+          </a:xfrm>
+          <a:prstGeom prst="roundRect">
+            <a:avLst>
+              <a:gd name="adj" fmla="val 3721"/>
+            </a:avLst>
+          </a:prstGeom>
+          <a:solidFill>
+            <a:srgbClr val="151E33"/>
+          </a:solidFill>
+          <a:ln/>
+          <a:effectLst>
+            <a:outerShdw sx="100000" sy="100000" kx="0" ky="0" algn="bl" rotWithShape="0" blurRad="127000" dist="38100" dir="5400000">
+              <a:srgbClr val="000000">
+                <a:alpha val="35000"/>
+              </a:srgbClr>
+            </a:outerShdw>
+          </a:effectLst>
+        </p:spPr>
+      </p:sp>
+      <p:sp>
+        <p:nvSpPr>
+          <p:cNvPr id="17" name="Text 15"/>
+          <p:cNvSpPr/>
+          <p:nvPr/>
+        </p:nvSpPr>
+        <p:spPr>
+          <a:xfrm>
+            <a:off x="1051560" y="3977640"/>
+            <a:ext cx="10058400" cy="502920"/>
+          </a:xfrm>
+          <a:prstGeom prst="rect">
+            <a:avLst/>
+          </a:prstGeom>
+          <a:noFill/>
+          <a:ln/>
+        </p:spPr>
+        <p:txBody>
+          <a:bodyPr wrap="square" lIns="0" tIns="0" rIns="0" bIns="0" rtlCol="0" anchor="ctr"/>
+          <a:lstStyle/>
+          <a:p>
+            <a:pPr indent="0" marL="0">
+              <a:buNone/>
+            </a:pPr>
+            <a:r>
+              <a:rPr lang="en-US" sz="2700" b="1" dirty="0">
+                <a:solidFill>
+                  <a:srgbClr val="FFFFFF"/>
+                </a:solidFill>
+                <a:latin typeface="Cambria" pitchFamily="34" charset="0"/>
+                <a:ea typeface="Cambria" pitchFamily="34" charset="-122"/>
+                <a:cs typeface="Cambria" pitchFamily="34" charset="-120"/>
+              </a:rPr>
+              <a:t>You stop paying for confidently-wrong predictions.</a:t>
+            </a:r>
+            <a:endParaRPr lang="en-US" sz="2700" dirty="0"/>
+          </a:p>
+        </p:txBody>
+      </p:sp>
+      <p:sp>
+        <p:nvSpPr>
+          <p:cNvPr id="18" name="Text 16"/>
+          <p:cNvSpPr/>
+          <p:nvPr/>
+        </p:nvSpPr>
+        <p:spPr>
+          <a:xfrm>
+            <a:off x="1051560" y="4572000"/>
+            <a:ext cx="10058400" cy="1005840"/>
+          </a:xfrm>
+          <a:prstGeom prst="rect">
+            <a:avLst/>
+          </a:prstGeom>
+          <a:noFill/>
+          <a:ln/>
+        </p:spPr>
+        <p:txBody>
+          <a:bodyPr wrap="square" lIns="0" tIns="0" rIns="0" bIns="0" rtlCol="0" anchor="ctr"/>
+          <a:lstStyle/>
+          <a:p>
+            <a:pPr indent="0" marL="0">
+              <a:lnSpc>
+                <a:spcPts val="2100"/>
+              </a:lnSpc>
+              <a:buNone/>
+            </a:pPr>
+            <a:r>
+              <a:rPr lang="en-US" sz="1400" dirty="0">
+                <a:solidFill>
+                  <a:srgbClr val="8B98B4"/>
+                </a:solidFill>
+                <a:latin typeface="Calibri" pitchFamily="34" charset="0"/>
+                <a:ea typeface="Calibri" pitchFamily="34" charset="-122"/>
+                <a:cs typeface="Calibri" pitchFamily="34" charset="-120"/>
+              </a:rPr>
+              <a:t>The classical gold standard can be confidently wrong on exactly the chemistry that matters, with no warning. MATGEN-Q is variational and self-certifying — it never blindsides you, and it is systematically improvable to the exact answer. Executed to 40 qubits on real hardware, and re-runnable end-to-end in one command.</a:t>
+            </a:r>
+            <a:endParaRPr lang="en-US" sz="1400" dirty="0"/>
+          </a:p>
+        </p:txBody>
+      </p:sp>
+      <p:sp>
+        <p:nvSpPr>
+          <p:cNvPr id="19" name="Text 17"/>
+          <p:cNvSpPr/>
+          <p:nvPr/>
+        </p:nvSpPr>
+        <p:spPr>
+          <a:xfrm>
+            <a:off x="685800" y="6263640"/>
+            <a:ext cx="10789920" cy="320040"/>
+          </a:xfrm>
+          <a:prstGeom prst="rect">
+            <a:avLst/>
+          </a:prstGeom>
+          <a:noFill/>
+          <a:ln/>
+        </p:spPr>
+        <p:txBody>
+          <a:bodyPr wrap="square" lIns="0" tIns="0" rIns="0" bIns="0" rtlCol="0" anchor="ctr"/>
+          <a:lstStyle/>
+          <a:p>
+            <a:pPr indent="0" marL="0">
+              <a:buNone/>
+            </a:pPr>
+            <a:r>
+              <a:rPr lang="en-US" sz="1100" dirty="0">
+                <a:solidFill>
+                  <a:srgbClr val="5D6B8A"/>
+                </a:solidFill>
+                <a:latin typeface="Calibri" pitchFamily="34" charset="0"/>
+                <a:ea typeface="Calibri" pitchFamily="34" charset="-122"/>
+                <a:cs typeface="Calibri" pitchFamily="34" charset="-120"/>
+              </a:rPr>
+              <a:t>Team EIGENNEXUS  ·  MATGEN-Q  ·  GIC 2026 Phase 3</a:t>
+            </a:r>
+            <a:endParaRPr lang="en-US" sz="1100" dirty="0"/>
+          </a:p>
+        </p:txBody>
+      </p:sp>
+    </p:spTree>
+  </p:cSld>
+  <p:clrMapOvr>
+    <a:masterClrMapping/>
+  </p:clrMapOvr>
+</p:sld>
+</file>
+
 <file path=ppt/slides/slide2.xml><?xml version="1.0" encoding="utf-8"?>
 <p:sld xmlns:a="http://schemas.openxmlformats.org/drawingml/2006/main" xmlns:r="http://schemas.openxmlformats.org/officeDocument/2006/relationships" xmlns:p="http://schemas.openxmlformats.org/presentationml/2006/main">
   <p:cSld name="Slide 2">
@@ -4556,7 +5332,7 @@
                 <a:ea typeface="Calibri" pitchFamily="34" charset="-122"/>
                 <a:cs typeface="Calibri" pitchFamily="34" charset="-120"/>
               </a:rPr>
-              <a:t>THE SCIENTIFIC VALUE</a:t>
+              <a:t>THE RESULT WE ALMOST FILED AS A FAILURE</a:t>
             </a:r>
             <a:endParaRPr lang="en-US" sz="1200" dirty="0"/>
           </a:p>
@@ -4595,7 +5371,7 @@
                 <a:ea typeface="Cambria" pitchFamily="34" charset="-122"/>
                 <a:cs typeface="Cambria" pitchFamily="34" charset="-120"/>
               </a:rPr>
-              <a:t>Built so a skeptic can check every number</a:t>
+              <a:t>We caught a silent error in the reference</a:t>
             </a:r>
             <a:endParaRPr lang="en-US" sz="3300" dirty="0"/>
           </a:p>
@@ -4603,18 +5379,84 @@
       </p:sp>
       <p:sp>
         <p:nvSpPr>
-          <p:cNvPr id="4" name="Shape 2"/>
-          <p:cNvSpPr/>
-          <p:nvPr/>
-        </p:nvSpPr>
-        <p:spPr>
-          <a:xfrm>
-            <a:off x="685800" y="1783080"/>
-            <a:ext cx="10789920" cy="1005840"/>
+          <p:cNvPr id="4" name="Text 2"/>
+          <p:cNvSpPr/>
+          <p:nvPr/>
+        </p:nvSpPr>
+        <p:spPr>
+          <a:xfrm>
+            <a:off x="685800" y="1737360"/>
+            <a:ext cx="6446520" cy="1143000"/>
+          </a:xfrm>
+          <a:prstGeom prst="rect">
+            <a:avLst/>
+          </a:prstGeom>
+          <a:noFill/>
+          <a:ln/>
+        </p:spPr>
+        <p:txBody>
+          <a:bodyPr wrap="square" lIns="0" tIns="0" rIns="0" bIns="0" rtlCol="0" anchor="ctr"/>
+          <a:lstStyle/>
+          <a:p>
+            <a:pPr indent="0" marL="0">
+              <a:lnSpc>
+                <a:spcPts val="2300"/>
+              </a:lnSpc>
+              <a:buNone/>
+            </a:pPr>
+            <a:r>
+              <a:rPr lang="en-US" sz="1550" dirty="0">
+                <a:solidFill>
+                  <a:srgbClr val="E8EDF7"/>
+                </a:solidFill>
+                <a:latin typeface="Calibri" pitchFamily="34" charset="0"/>
+                <a:ea typeface="Calibri" pitchFamily="34" charset="-122"/>
+                <a:cs typeface="Calibri" pitchFamily="34" charset="-120"/>
+              </a:rPr>
+              <a:t>At 38 qubits our answer came in BELOW the trusted classical reference — on two independent systems. Both are variational upper bounds on the identical Hamiltonian, so the lower energy is strictly more accurate.</a:t>
+            </a:r>
+            <a:endParaRPr lang="en-US" sz="1550" dirty="0"/>
+          </a:p>
+        </p:txBody>
+      </p:sp>
+      <p:pic>
+        <p:nvPicPr>
+          <p:cNvPr id="5" name="Image 0" descr="/home/user/potomac_advancedmaterials/results/chi_ladder_correction.png">    </p:cNvPr>
+          <p:cNvPicPr>
+            <a:picLocks noChangeAspect="1"/>
+          </p:cNvPicPr>
+          <p:nvPr/>
+        </p:nvPicPr>
+        <p:blipFill>
+          <a:blip r:embed="rId1"/>
+          <a:stretch>
+            <a:fillRect/>
+          </a:stretch>
+        </p:blipFill>
+        <p:spPr>
+          <a:xfrm>
+            <a:off x="7269480" y="1691640"/>
+            <a:ext cx="4206240" cy="2432304"/>
+          </a:xfrm>
+          <a:prstGeom prst="rect">
+            <a:avLst/>
+          </a:prstGeom>
+        </p:spPr>
+      </p:pic>
+      <p:sp>
+        <p:nvSpPr>
+          <p:cNvPr id="6" name="Shape 3"/>
+          <p:cNvSpPr/>
+          <p:nvPr/>
+        </p:nvSpPr>
+        <p:spPr>
+          <a:xfrm>
+            <a:off x="685800" y="3017520"/>
+            <a:ext cx="6446520" cy="1234440"/>
           </a:xfrm>
           <a:prstGeom prst="roundRect">
             <a:avLst>
-              <a:gd name="adj" fmla="val 7273"/>
+              <a:gd name="adj" fmla="val 5926"/>
             </a:avLst>
           </a:prstGeom>
           <a:solidFill>
@@ -4632,14 +5474,14 @@
       </p:sp>
       <p:sp>
         <p:nvSpPr>
-          <p:cNvPr id="5" name="Text 3"/>
-          <p:cNvSpPr/>
-          <p:nvPr/>
-        </p:nvSpPr>
-        <p:spPr>
-          <a:xfrm>
-            <a:off x="1005840" y="1929384"/>
-            <a:ext cx="2651760" cy="365760"/>
+          <p:cNvPr id="7" name="Text 4"/>
+          <p:cNvSpPr/>
+          <p:nvPr/>
+        </p:nvSpPr>
+        <p:spPr>
+          <a:xfrm>
+            <a:off x="960120" y="3136392"/>
+            <a:ext cx="3017520" cy="365760"/>
           </a:xfrm>
           <a:prstGeom prst="rect">
             <a:avLst/>
@@ -4659,11 +5501,11 @@
                 <a:solidFill>
                   <a:srgbClr val="3FBF7F"/>
                 </a:solidFill>
-                <a:latin typeface="Cambria" pitchFamily="34" charset="0"/>
-                <a:ea typeface="Cambria" pitchFamily="34" charset="-122"/>
-                <a:cs typeface="Cambria" pitchFamily="34" charset="-120"/>
-              </a:rPr>
-              <a:t>Pre-registered</a:t>
+                <a:latin typeface="Calibri" pitchFamily="34" charset="0"/>
+                <a:ea typeface="Calibri" pitchFamily="34" charset="-122"/>
+                <a:cs typeface="Calibri" pitchFamily="34" charset="-120"/>
+              </a:rPr>
+              <a:t>−3.784 / −0.399 mHa</a:t>
             </a:r>
             <a:endParaRPr lang="en-US" sz="1700" dirty="0"/>
           </a:p>
@@ -4671,14 +5513,53 @@
       </p:sp>
       <p:sp>
         <p:nvSpPr>
-          <p:cNvPr id="6" name="Text 4"/>
-          <p:cNvSpPr/>
-          <p:nvPr/>
-        </p:nvSpPr>
-        <p:spPr>
-          <a:xfrm>
-            <a:off x="3749040" y="1911096"/>
-            <a:ext cx="7452360" cy="777240"/>
+          <p:cNvPr id="8" name="Text 5"/>
+          <p:cNvSpPr/>
+          <p:nvPr/>
+        </p:nvSpPr>
+        <p:spPr>
+          <a:xfrm>
+            <a:off x="4023360" y="3154680"/>
+            <a:ext cx="2926080" cy="320040"/>
+          </a:xfrm>
+          <a:prstGeom prst="rect">
+            <a:avLst/>
+          </a:prstGeom>
+          <a:noFill/>
+          <a:ln/>
+        </p:spPr>
+        <p:txBody>
+          <a:bodyPr wrap="square" lIns="0" tIns="0" rIns="0" bIns="0" rtlCol="0" anchor="ctr"/>
+          <a:lstStyle/>
+          <a:p>
+            <a:pPr indent="0" marL="0">
+              <a:buNone/>
+            </a:pPr>
+            <a:r>
+              <a:rPr lang="en-US" sz="1250" b="1" dirty="0">
+                <a:solidFill>
+                  <a:srgbClr val="FFFFFF"/>
+                </a:solidFill>
+                <a:latin typeface="Calibri" pitchFamily="34" charset="0"/>
+                <a:ea typeface="Calibri" pitchFamily="34" charset="-122"/>
+                <a:cs typeface="Calibri" pitchFamily="34" charset="-120"/>
+              </a:rPr>
+              <a:t>Two independent corrections</a:t>
+            </a:r>
+            <a:endParaRPr lang="en-US" sz="1250" dirty="0"/>
+          </a:p>
+        </p:txBody>
+      </p:sp>
+      <p:sp>
+        <p:nvSpPr>
+          <p:cNvPr id="9" name="Text 6"/>
+          <p:cNvSpPr/>
+          <p:nvPr/>
+        </p:nvSpPr>
+        <p:spPr>
+          <a:xfrm>
+            <a:off x="960120" y="3547872"/>
+            <a:ext cx="5943600" cy="640080"/>
           </a:xfrm>
           <a:prstGeom prst="rect">
             <a:avLst/>
@@ -4692,12 +5573,12 @@
           <a:p>
             <a:pPr indent="0" marL="0">
               <a:lnSpc>
-                <a:spcPts val="1800"/>
+                <a:spcPts val="1600"/>
               </a:lnSpc>
               <a:buNone/>
             </a:pPr>
             <a:r>
-              <a:rPr lang="en-US" sz="1300" dirty="0">
+              <a:rPr lang="en-US" sz="1150" dirty="0">
                 <a:solidFill>
                   <a:srgbClr val="8B98B4"/>
                 </a:solidFill>
@@ -4705,26 +5586,26 @@
                 <a:ea typeface="Calibri" pitchFamily="34" charset="-122"/>
                 <a:cs typeface="Calibri" pitchFamily="34" charset="-120"/>
               </a:rPr>
-              <a:t>Every judged claim's threshold was git-timestamped BEFORE the run. Outcomes reported as measured — passes, a resource-DNF, a non-convergence.</a:t>
-            </a:r>
-            <a:endParaRPr lang="en-US" sz="1300" dirty="0"/>
-          </a:p>
-        </p:txBody>
-      </p:sp>
-      <p:sp>
-        <p:nvSpPr>
-          <p:cNvPr id="7" name="Shape 5"/>
-          <p:cNvSpPr/>
-          <p:nvPr/>
-        </p:nvSpPr>
-        <p:spPr>
-          <a:xfrm>
-            <a:off x="685800" y="2898648"/>
-            <a:ext cx="10789920" cy="1005840"/>
+              <a:t>CrO and the real Sn₂O₂ EUV motif — both below their committed same-CAS DMRG(χ=400) reference.</a:t>
+            </a:r>
+            <a:endParaRPr lang="en-US" sz="1150" dirty="0"/>
+          </a:p>
+        </p:txBody>
+      </p:sp>
+      <p:sp>
+        <p:nvSpPr>
+          <p:cNvPr id="10" name="Shape 7"/>
+          <p:cNvSpPr/>
+          <p:nvPr/>
+        </p:nvSpPr>
+        <p:spPr>
+          <a:xfrm>
+            <a:off x="685800" y="4343400"/>
+            <a:ext cx="6446520" cy="1234440"/>
           </a:xfrm>
           <a:prstGeom prst="roundRect">
             <a:avLst>
-              <a:gd name="adj" fmla="val 7273"/>
+              <a:gd name="adj" fmla="val 5926"/>
             </a:avLst>
           </a:prstGeom>
           <a:solidFill>
@@ -4742,14 +5623,14 @@
       </p:sp>
       <p:sp>
         <p:nvSpPr>
-          <p:cNvPr id="8" name="Text 6"/>
-          <p:cNvSpPr/>
-          <p:nvPr/>
-        </p:nvSpPr>
-        <p:spPr>
-          <a:xfrm>
-            <a:off x="1005840" y="3044952"/>
-            <a:ext cx="2651760" cy="365760"/>
+          <p:cNvPr id="11" name="Text 8"/>
+          <p:cNvSpPr/>
+          <p:nvPr/>
+        </p:nvSpPr>
+        <p:spPr>
+          <a:xfrm>
+            <a:off x="960120" y="4462272"/>
+            <a:ext cx="3017520" cy="365760"/>
           </a:xfrm>
           <a:prstGeom prst="rect">
             <a:avLst/>
@@ -4769,11 +5650,11 @@
                 <a:solidFill>
                   <a:srgbClr val="4FD1E0"/>
                 </a:solidFill>
-                <a:latin typeface="Cambria" pitchFamily="34" charset="0"/>
-                <a:ea typeface="Cambria" pitchFamily="34" charset="-122"/>
-                <a:cs typeface="Cambria" pitchFamily="34" charset="-120"/>
-              </a:rPr>
-              <a:t>Re-runnable</a:t>
+                <a:latin typeface="Calibri" pitchFamily="34" charset="0"/>
+                <a:ea typeface="Calibri" pitchFamily="34" charset="-122"/>
+                <a:cs typeface="Calibri" pitchFamily="34" charset="-120"/>
+              </a:rPr>
+              <a:t>χ=400 → 800 → 1200</a:t>
             </a:r>
             <a:endParaRPr lang="en-US" sz="1700" dirty="0"/>
           </a:p>
@@ -4781,14 +5662,53 @@
       </p:sp>
       <p:sp>
         <p:nvSpPr>
-          <p:cNvPr id="9" name="Text 7"/>
-          <p:cNvSpPr/>
-          <p:nvPr/>
-        </p:nvSpPr>
-        <p:spPr>
-          <a:xfrm>
-            <a:off x="3749040" y="3026664"/>
-            <a:ext cx="7452360" cy="777240"/>
+          <p:cNvPr id="12" name="Text 9"/>
+          <p:cNvSpPr/>
+          <p:nvPr/>
+        </p:nvSpPr>
+        <p:spPr>
+          <a:xfrm>
+            <a:off x="4023360" y="4480560"/>
+            <a:ext cx="2926080" cy="320040"/>
+          </a:xfrm>
+          <a:prstGeom prst="rect">
+            <a:avLst/>
+          </a:prstGeom>
+          <a:noFill/>
+          <a:ln/>
+        </p:spPr>
+        <p:txBody>
+          <a:bodyPr wrap="square" lIns="0" tIns="0" rIns="0" bIns="0" rtlCol="0" anchor="ctr"/>
+          <a:lstStyle/>
+          <a:p>
+            <a:pPr indent="0" marL="0">
+              <a:buNone/>
+            </a:pPr>
+            <a:r>
+              <a:rPr lang="en-US" sz="1250" b="1" dirty="0">
+                <a:solidFill>
+                  <a:srgbClr val="FFFFFF"/>
+                </a:solidFill>
+                <a:latin typeface="Calibri" pitchFamily="34" charset="0"/>
+                <a:ea typeface="Calibri" pitchFamily="34" charset="-122"/>
+                <a:cs typeface="Calibri" pitchFamily="34" charset="-120"/>
+              </a:rPr>
+              <a:t>The mechanism, proven</a:t>
+            </a:r>
+            <a:endParaRPr lang="en-US" sz="1250" dirty="0"/>
+          </a:p>
+        </p:txBody>
+      </p:sp>
+      <p:sp>
+        <p:nvSpPr>
+          <p:cNvPr id="13" name="Text 10"/>
+          <p:cNvSpPr/>
+          <p:nvPr/>
+        </p:nvSpPr>
+        <p:spPr>
+          <a:xfrm>
+            <a:off x="960120" y="4873752"/>
+            <a:ext cx="5943600" cy="640080"/>
           </a:xfrm>
           <a:prstGeom prst="rect">
             <a:avLst/>
@@ -4802,12 +5722,12 @@
           <a:p>
             <a:pPr indent="0" marL="0">
               <a:lnSpc>
-                <a:spcPts val="1800"/>
+                <a:spcPts val="1600"/>
               </a:lnSpc>
               <a:buNone/>
             </a:pPr>
             <a:r>
-              <a:rPr lang="en-US" sz="1300" dirty="0">
+              <a:rPr lang="en-US" sz="1150" dirty="0">
                 <a:solidFill>
                   <a:srgbClr val="8B98B4"/>
                 </a:solidFill>
@@ -4815,32 +5735,37 @@
                 <a:ea typeface="Calibri" pitchFamily="34" charset="-122"/>
                 <a:cs typeface="Calibri" pitchFamily="34" charset="-120"/>
               </a:rPr>
-              <a:t>One command re-executes 17 headline scripts and audits 9 GPU/QPU artifacts: 26/26 PASS, no modification needed.</a:t>
-            </a:r>
-            <a:endParaRPr lang="en-US" sz="1300" dirty="0"/>
-          </a:p>
-        </p:txBody>
-      </p:sp>
-      <p:sp>
-        <p:nvSpPr>
-          <p:cNvPr id="10" name="Shape 8"/>
-          <p:cNvSpPr/>
-          <p:nvPr/>
-        </p:nvSpPr>
-        <p:spPr>
-          <a:xfrm>
-            <a:off x="685800" y="4014216"/>
-            <a:ext cx="10789920" cy="1005840"/>
+              <a:t>Escalating the classical bond dimension walks DMRG down toward our energy (+3.78 → +1.06 → +0.36 mHa) and never crosses it.</a:t>
+            </a:r>
+            <a:endParaRPr lang="en-US" sz="1150" dirty="0"/>
+          </a:p>
+        </p:txBody>
+      </p:sp>
+      <p:sp>
+        <p:nvSpPr>
+          <p:cNvPr id="14" name="Shape 11"/>
+          <p:cNvSpPr/>
+          <p:nvPr/>
+        </p:nvSpPr>
+        <p:spPr>
+          <a:xfrm>
+            <a:off x="685800" y="5669280"/>
+            <a:ext cx="10789920" cy="868680"/>
           </a:xfrm>
           <a:prstGeom prst="roundRect">
             <a:avLst>
-              <a:gd name="adj" fmla="val 7273"/>
+              <a:gd name="adj" fmla="val 8421"/>
             </a:avLst>
           </a:prstGeom>
           <a:solidFill>
-            <a:srgbClr val="151E33"/>
+            <a:srgbClr val="1B2540"/>
           </a:solidFill>
-          <a:ln/>
+          <a:ln w="12700">
+            <a:solidFill>
+              <a:srgbClr val="2A3654"/>
+            </a:solidFill>
+            <a:prstDash val="solid"/>
+          </a:ln>
           <a:effectLst>
             <a:outerShdw sx="100000" sy="100000" kx="0" ky="0" algn="bl" rotWithShape="0" blurRad="127000" dist="38100" dir="5400000">
               <a:srgbClr val="000000">
@@ -4852,53 +5777,14 @@
       </p:sp>
       <p:sp>
         <p:nvSpPr>
-          <p:cNvPr id="11" name="Text 9"/>
-          <p:cNvSpPr/>
-          <p:nvPr/>
-        </p:nvSpPr>
-        <p:spPr>
-          <a:xfrm>
-            <a:off x="1005840" y="4160520"/>
-            <a:ext cx="2651760" cy="365760"/>
-          </a:xfrm>
-          <a:prstGeom prst="rect">
-            <a:avLst/>
-          </a:prstGeom>
-          <a:noFill/>
-          <a:ln/>
-        </p:spPr>
-        <p:txBody>
-          <a:bodyPr wrap="square" lIns="0" tIns="0" rIns="0" bIns="0" rtlCol="0" anchor="ctr"/>
-          <a:lstStyle/>
-          <a:p>
-            <a:pPr indent="0" marL="0">
-              <a:buNone/>
-            </a:pPr>
-            <a:r>
-              <a:rPr lang="en-US" sz="1700" b="1" dirty="0">
-                <a:solidFill>
-                  <a:srgbClr val="E9B84A"/>
-                </a:solidFill>
-                <a:latin typeface="Cambria" pitchFamily="34" charset="0"/>
-                <a:ea typeface="Cambria" pitchFamily="34" charset="-122"/>
-                <a:cs typeface="Cambria" pitchFamily="34" charset="-120"/>
-              </a:rPr>
-              <a:t>Self-corrected</a:t>
-            </a:r>
-            <a:endParaRPr lang="en-US" sz="1700" dirty="0"/>
-          </a:p>
-        </p:txBody>
-      </p:sp>
-      <p:sp>
-        <p:nvSpPr>
-          <p:cNvPr id="12" name="Text 10"/>
-          <p:cNvSpPr/>
-          <p:nvPr/>
-        </p:nvSpPr>
-        <p:spPr>
-          <a:xfrm>
-            <a:off x="3749040" y="4142232"/>
-            <a:ext cx="7452360" cy="777240"/>
+          <p:cNvPr id="15" name="Text 12"/>
+          <p:cNvSpPr/>
+          <p:nvPr/>
+        </p:nvSpPr>
+        <p:spPr>
+          <a:xfrm>
+            <a:off x="1005840" y="5669280"/>
+            <a:ext cx="10149840" cy="868680"/>
           </a:xfrm>
           <a:prstGeom prst="rect">
             <a:avLst/>
@@ -4912,161 +5798,29 @@
           <a:p>
             <a:pPr indent="0" marL="0">
               <a:lnSpc>
-                <a:spcPts val="1800"/>
+                <a:spcPts val="1700"/>
               </a:lnSpc>
               <a:buNone/>
             </a:pPr>
             <a:r>
-              <a:rPr lang="en-US" sz="1300" dirty="0">
-                <a:solidFill>
-                  <a:srgbClr val="8B98B4"/>
-                </a:solidFill>
-                <a:latin typeface="Calibri" pitchFamily="34" charset="0"/>
-                <a:ea typeface="Calibri" pitchFamily="34" charset="-122"/>
-                <a:cs typeface="Calibri" pitchFamily="34" charset="-120"/>
-              </a:rPr>
-              <a:t>Two claims we tested and WITHDREW: an active-space-fragile candidate ranking, and a DFT sign-flip that proved to be an SCF artifact.</a:t>
-            </a:r>
-            <a:endParaRPr lang="en-US" sz="1300" dirty="0"/>
-          </a:p>
-        </p:txBody>
-      </p:sp>
-      <p:sp>
-        <p:nvSpPr>
-          <p:cNvPr id="13" name="Shape 11"/>
-          <p:cNvSpPr/>
-          <p:nvPr/>
-        </p:nvSpPr>
-        <p:spPr>
-          <a:xfrm>
-            <a:off x="685800" y="5129784"/>
-            <a:ext cx="10789920" cy="1005840"/>
-          </a:xfrm>
-          <a:prstGeom prst="roundRect">
-            <a:avLst>
-              <a:gd name="adj" fmla="val 7273"/>
-            </a:avLst>
-          </a:prstGeom>
-          <a:solidFill>
-            <a:srgbClr val="151E33"/>
-          </a:solidFill>
-          <a:ln/>
-          <a:effectLst>
-            <a:outerShdw sx="100000" sy="100000" kx="0" ky="0" algn="bl" rotWithShape="0" blurRad="127000" dist="38100" dir="5400000">
-              <a:srgbClr val="000000">
-                <a:alpha val="35000"/>
-              </a:srgbClr>
-            </a:outerShdw>
-          </a:effectLst>
-        </p:spPr>
-      </p:sp>
-      <p:sp>
-        <p:nvSpPr>
-          <p:cNvPr id="14" name="Text 12"/>
-          <p:cNvSpPr/>
-          <p:nvPr/>
-        </p:nvSpPr>
-        <p:spPr>
-          <a:xfrm>
-            <a:off x="1005840" y="5276088"/>
-            <a:ext cx="2651760" cy="365760"/>
-          </a:xfrm>
-          <a:prstGeom prst="rect">
-            <a:avLst/>
-          </a:prstGeom>
-          <a:noFill/>
-          <a:ln/>
-        </p:spPr>
-        <p:txBody>
-          <a:bodyPr wrap="square" lIns="0" tIns="0" rIns="0" bIns="0" rtlCol="0" anchor="ctr"/>
-          <a:lstStyle/>
-          <a:p>
-            <a:pPr indent="0" marL="0">
-              <a:buNone/>
-            </a:pPr>
-            <a:r>
-              <a:rPr lang="en-US" sz="1700" b="1" dirty="0">
-                <a:solidFill>
-                  <a:srgbClr val="9A8CFF"/>
-                </a:solidFill>
-                <a:latin typeface="Cambria" pitchFamily="34" charset="0"/>
-                <a:ea typeface="Cambria" pitchFamily="34" charset="-122"/>
-                <a:cs typeface="Cambria" pitchFamily="34" charset="-120"/>
-              </a:rPr>
-              <a:t>Reference-correcting</a:t>
-            </a:r>
-            <a:endParaRPr lang="en-US" sz="1700" dirty="0"/>
-          </a:p>
-        </p:txBody>
-      </p:sp>
-      <p:sp>
-        <p:nvSpPr>
-          <p:cNvPr id="15" name="Text 13"/>
-          <p:cNvSpPr/>
-          <p:nvPr/>
-        </p:nvSpPr>
-        <p:spPr>
-          <a:xfrm>
-            <a:off x="3749040" y="5257800"/>
-            <a:ext cx="7452360" cy="777240"/>
-          </a:xfrm>
-          <a:prstGeom prst="rect">
-            <a:avLst/>
-          </a:prstGeom>
-          <a:noFill/>
-          <a:ln/>
-        </p:spPr>
-        <p:txBody>
-          <a:bodyPr wrap="square" lIns="0" tIns="0" rIns="0" bIns="0" rtlCol="0" anchor="ctr"/>
-          <a:lstStyle/>
-          <a:p>
+              <a:rPr lang="en-US" sz="1250" b="1" dirty="0">
+                <a:solidFill>
+                  <a:srgbClr val="3FBF7F"/>
+                </a:solidFill>
+                <a:latin typeface="Calibri" pitchFamily="34" charset="0"/>
+                <a:ea typeface="Calibri" pitchFamily="34" charset="-122"/>
+                <a:cs typeface="Calibri" pitchFamily="34" charset="-120"/>
+              </a:rPr>
+              <a:t>Why it matters:  </a:t>
+            </a:r>
             <a:pPr indent="0" marL="0">
               <a:lnSpc>
-                <a:spcPts val="1800"/>
+                <a:spcPts val="1700"/>
               </a:lnSpc>
               <a:buNone/>
             </a:pPr>
             <a:r>
-              <a:rPr lang="en-US" sz="1300" dirty="0">
-                <a:solidFill>
-                  <a:srgbClr val="8B98B4"/>
-                </a:solidFill>
-                <a:latin typeface="Calibri" pitchFamily="34" charset="0"/>
-                <a:ea typeface="Calibri" pitchFamily="34" charset="-122"/>
-                <a:cs typeface="Calibri" pitchFamily="34" charset="-120"/>
-              </a:rPr>
-              <a:t>At 38q our solver drops BELOW the classical DMRG reference — and χ=800/1200 confirm it is the reference that was truncated, not us.</a:t>
-            </a:r>
-            <a:endParaRPr lang="en-US" sz="1300" dirty="0"/>
-          </a:p>
-        </p:txBody>
-      </p:sp>
-      <p:sp>
-        <p:nvSpPr>
-          <p:cNvPr id="16" name="Text 14"/>
-          <p:cNvSpPr/>
-          <p:nvPr/>
-        </p:nvSpPr>
-        <p:spPr>
-          <a:xfrm>
-            <a:off x="685800" y="6263640"/>
-            <a:ext cx="10789920" cy="365760"/>
-          </a:xfrm>
-          <a:prstGeom prst="rect">
-            <a:avLst/>
-          </a:prstGeom>
-          <a:noFill/>
-          <a:ln/>
-        </p:spPr>
-        <p:txBody>
-          <a:bodyPr wrap="square" lIns="0" tIns="0" rIns="0" bIns="0" rtlCol="0" anchor="ctr"/>
-          <a:lstStyle/>
-          <a:p>
-            <a:pPr indent="0" marL="0">
-              <a:buNone/>
-            </a:pPr>
-            <a:r>
-              <a:rPr lang="en-US" sz="1500" i="1" dirty="0">
+              <a:rPr lang="en-US" sz="1250" dirty="0">
                 <a:solidFill>
                   <a:srgbClr val="E8EDF7"/>
                 </a:solidFill>
@@ -5074,9 +5828,51 @@
                 <a:ea typeface="Calibri" pitchFamily="34" charset="-122"/>
                 <a:cs typeface="Calibri" pitchFamily="34" charset="-120"/>
               </a:rPr>
-              <a:t>We publish the negatives. That is why the positives should be believed.</a:t>
-            </a:r>
-            <a:endParaRPr lang="en-US" sz="1500" dirty="0"/>
+              <a:t>DMRG gives you no signal that your bond dimension is big enough — you stop when it looks converged. An independent variational method coming in lower is proof you hadn't. Useful today, with no quantum-advantage claim.</a:t>
+            </a:r>
+            <a:endParaRPr lang="en-US" sz="1250" dirty="0"/>
+          </a:p>
+        </p:txBody>
+      </p:sp>
+      <p:sp>
+        <p:nvSpPr>
+          <p:cNvPr id="16" name="Text 13"/>
+          <p:cNvSpPr/>
+          <p:nvPr/>
+        </p:nvSpPr>
+        <p:spPr>
+          <a:xfrm>
+            <a:off x="7269480" y="4224528"/>
+            <a:ext cx="4206240" cy="1325880"/>
+          </a:xfrm>
+          <a:prstGeom prst="rect">
+            <a:avLst/>
+          </a:prstGeom>
+          <a:noFill/>
+          <a:ln/>
+        </p:spPr>
+        <p:txBody>
+          <a:bodyPr wrap="square" lIns="0" tIns="0" rIns="0" bIns="0" rtlCol="0" anchor="ctr"/>
+          <a:lstStyle/>
+          <a:p>
+            <a:pPr indent="0" marL="0">
+              <a:lnSpc>
+                <a:spcPts val="1400"/>
+              </a:lnSpc>
+              <a:buNone/>
+            </a:pPr>
+            <a:r>
+              <a:rPr lang="en-US" sz="1000" dirty="0">
+                <a:solidFill>
+                  <a:srgbClr val="5D6B8A"/>
+                </a:solidFill>
+                <a:latin typeface="Calibri" pitchFamily="34" charset="0"/>
+                <a:ea typeface="Calibri" pitchFamily="34" charset="-122"/>
+                <a:cs typeface="Calibri" pitchFamily="34" charset="-120"/>
+              </a:rPr>
+              <a:t>Honest limits: not cheaper (19.1 h vs ~15 min to escalate χ classically) — the value is the trigger, not the compute. n = 2: a pattern worth investigating, not a measured rate. Reported as the pre-registered P4 criterion failing as-measured, because P4 assumed DMRG(χ=400) was truth.</a:t>
+            </a:r>
+            <a:endParaRPr lang="en-US" sz="1000" dirty="0"/>
           </a:p>
         </p:txBody>
       </p:sp>
@@ -5139,13 +5935,13 @@
             <a:r>
               <a:rPr lang="en-US" sz="1200" b="1" spc="300" kern="0" dirty="0">
                 <a:solidFill>
-                  <a:srgbClr val="4FD1E0"/>
-                </a:solidFill>
-                <a:latin typeface="Calibri" pitchFamily="34" charset="0"/>
-                <a:ea typeface="Calibri" pitchFamily="34" charset="-122"/>
-                <a:cs typeface="Calibri" pitchFamily="34" charset="-120"/>
-              </a:rPr>
-              <a:t>EXECUTED — EVERY NUMBER TRACES TO A COMMITTED FILE</a:t>
+                  <a:srgbClr val="3FBF7F"/>
+                </a:solidFill>
+                <a:latin typeface="Calibri" pitchFamily="34" charset="0"/>
+                <a:ea typeface="Calibri" pitchFamily="34" charset="-122"/>
+                <a:cs typeface="Calibri" pitchFamily="34" charset="-120"/>
+              </a:rPr>
+              <a:t>THE SCIENTIFIC VALUE</a:t>
             </a:r>
             <a:endParaRPr lang="en-US" sz="1200" dirty="0"/>
           </a:p>
@@ -5184,7 +5980,7 @@
                 <a:ea typeface="Cambria" pitchFamily="34" charset="-122"/>
                 <a:cs typeface="Cambria" pitchFamily="34" charset="-120"/>
               </a:rPr>
-              <a:t>What actually ran</a:t>
+              <a:t>Built so a skeptic can check every number</a:t>
             </a:r>
             <a:endParaRPr lang="en-US" sz="3300" dirty="0"/>
           </a:p>
@@ -5199,11 +5995,11 @@
         <p:spPr>
           <a:xfrm>
             <a:off x="685800" y="1783080"/>
-            <a:ext cx="3502152" cy="2011680"/>
+            <a:ext cx="10789920" cy="1005840"/>
           </a:xfrm>
           <a:prstGeom prst="roundRect">
             <a:avLst>
-              <a:gd name="adj" fmla="val 3636"/>
+              <a:gd name="adj" fmla="val 7273"/>
             </a:avLst>
           </a:prstGeom>
           <a:solidFill>
@@ -5227,34 +6023,34 @@
         </p:nvSpPr>
         <p:spPr>
           <a:xfrm>
-            <a:off x="923544" y="1929384"/>
-            <a:ext cx="3063240" cy="411480"/>
-          </a:xfrm>
-          <a:prstGeom prst="rect">
-            <a:avLst/>
-          </a:prstGeom>
-          <a:noFill/>
-          <a:ln/>
-        </p:spPr>
-        <p:txBody>
-          <a:bodyPr wrap="square" lIns="0" tIns="0" rIns="0" bIns="0" rtlCol="0" anchor="ctr"/>
-          <a:lstStyle/>
-          <a:p>
-            <a:pPr indent="0" marL="0">
-              <a:buNone/>
-            </a:pPr>
-            <a:r>
-              <a:rPr lang="en-US" sz="2000" b="1" dirty="0">
-                <a:solidFill>
-                  <a:srgbClr val="4FD1E0"/>
-                </a:solidFill>
-                <a:latin typeface="Calibri" pitchFamily="34" charset="0"/>
-                <a:ea typeface="Calibri" pitchFamily="34" charset="-122"/>
-                <a:cs typeface="Calibri" pitchFamily="34" charset="-120"/>
-              </a:rPr>
-              <a:t>+1.226 mHa</a:t>
-            </a:r>
-            <a:endParaRPr lang="en-US" sz="2000" dirty="0"/>
+            <a:off x="1005840" y="1929384"/>
+            <a:ext cx="2651760" cy="365760"/>
+          </a:xfrm>
+          <a:prstGeom prst="rect">
+            <a:avLst/>
+          </a:prstGeom>
+          <a:noFill/>
+          <a:ln/>
+        </p:spPr>
+        <p:txBody>
+          <a:bodyPr wrap="square" lIns="0" tIns="0" rIns="0" bIns="0" rtlCol="0" anchor="ctr"/>
+          <a:lstStyle/>
+          <a:p>
+            <a:pPr indent="0" marL="0">
+              <a:buNone/>
+            </a:pPr>
+            <a:r>
+              <a:rPr lang="en-US" sz="1700" b="1" dirty="0">
+                <a:solidFill>
+                  <a:srgbClr val="3FBF7F"/>
+                </a:solidFill>
+                <a:latin typeface="Cambria" pitchFamily="34" charset="0"/>
+                <a:ea typeface="Cambria" pitchFamily="34" charset="-122"/>
+                <a:cs typeface="Cambria" pitchFamily="34" charset="-120"/>
+              </a:rPr>
+              <a:t>Pre-registered</a:t>
+            </a:r>
+            <a:endParaRPr lang="en-US" sz="1700" dirty="0"/>
           </a:p>
         </p:txBody>
       </p:sp>
@@ -5266,32 +6062,35 @@
         </p:nvSpPr>
         <p:spPr>
           <a:xfrm>
-            <a:off x="923544" y="2350008"/>
-            <a:ext cx="3063240" cy="274320"/>
-          </a:xfrm>
-          <a:prstGeom prst="rect">
-            <a:avLst/>
-          </a:prstGeom>
-          <a:noFill/>
-          <a:ln/>
-        </p:spPr>
-        <p:txBody>
-          <a:bodyPr wrap="square" lIns="0" tIns="0" rIns="0" bIns="0" rtlCol="0" anchor="ctr"/>
-          <a:lstStyle/>
-          <a:p>
-            <a:pPr indent="0" marL="0">
-              <a:buNone/>
-            </a:pPr>
-            <a:r>
-              <a:rPr lang="en-US" sz="1300" b="1" dirty="0">
-                <a:solidFill>
-                  <a:srgbClr val="FFFFFF"/>
-                </a:solidFill>
-                <a:latin typeface="Calibri" pitchFamily="34" charset="0"/>
-                <a:ea typeface="Calibri" pitchFamily="34" charset="-122"/>
-                <a:cs typeface="Calibri" pitchFamily="34" charset="-120"/>
-              </a:rPr>
-              <a:t>40q flagship on GPU</a:t>
+            <a:off x="3749040" y="1911096"/>
+            <a:ext cx="7452360" cy="777240"/>
+          </a:xfrm>
+          <a:prstGeom prst="rect">
+            <a:avLst/>
+          </a:prstGeom>
+          <a:noFill/>
+          <a:ln/>
+        </p:spPr>
+        <p:txBody>
+          <a:bodyPr wrap="square" lIns="0" tIns="0" rIns="0" bIns="0" rtlCol="0" anchor="ctr"/>
+          <a:lstStyle/>
+          <a:p>
+            <a:pPr indent="0" marL="0">
+              <a:lnSpc>
+                <a:spcPts val="1800"/>
+              </a:lnSpc>
+              <a:buNone/>
+            </a:pPr>
+            <a:r>
+              <a:rPr lang="en-US" sz="1300" dirty="0">
+                <a:solidFill>
+                  <a:srgbClr val="8B98B4"/>
+                </a:solidFill>
+                <a:latin typeface="Calibri" pitchFamily="34" charset="0"/>
+                <a:ea typeface="Calibri" pitchFamily="34" charset="-122"/>
+                <a:cs typeface="Calibri" pitchFamily="34" charset="-120"/>
+              </a:rPr>
+              <a:t>Every judged claim's threshold was git-timestamped BEFORE the run. Outcomes reported as measured — passes, a resource-DNF, a non-convergence.</a:t>
             </a:r>
             <a:endParaRPr lang="en-US" sz="1300" dirty="0"/>
           </a:p>
@@ -5299,60 +6098,18 @@
       </p:sp>
       <p:sp>
         <p:nvSpPr>
-          <p:cNvPr id="7" name="Text 5"/>
-          <p:cNvSpPr/>
-          <p:nvPr/>
-        </p:nvSpPr>
-        <p:spPr>
-          <a:xfrm>
-            <a:off x="923544" y="2660904"/>
-            <a:ext cx="3063240" cy="1005840"/>
-          </a:xfrm>
-          <a:prstGeom prst="rect">
-            <a:avLst/>
-          </a:prstGeom>
-          <a:noFill/>
-          <a:ln/>
-        </p:spPr>
-        <p:txBody>
-          <a:bodyPr wrap="square" lIns="0" tIns="0" rIns="0" bIns="0" rtlCol="0" anchor="ctr"/>
-          <a:lstStyle/>
-          <a:p>
-            <a:pPr indent="0" marL="0">
-              <a:lnSpc>
-                <a:spcPts val="1600"/>
-              </a:lnSpc>
-              <a:buNone/>
-            </a:pPr>
-            <a:r>
-              <a:rPr lang="en-US" sz="1150" dirty="0">
-                <a:solidFill>
-                  <a:srgbClr val="8B98B4"/>
-                </a:solidFill>
-                <a:latin typeface="Calibri" pitchFamily="34" charset="0"/>
-                <a:ea typeface="Calibri" pitchFamily="34" charset="-122"/>
-                <a:cs typeface="Calibri" pitchFamily="34" charset="-120"/>
-              </a:rPr>
-              <a:t>Chemically accurate vs its frozen DMRG(χ=400) reference at 450,257 determinants — pre-registered criterion met.</a:t>
-            </a:r>
-            <a:endParaRPr lang="en-US" sz="1150" dirty="0"/>
-          </a:p>
-        </p:txBody>
-      </p:sp>
-      <p:sp>
-        <p:nvSpPr>
-          <p:cNvPr id="8" name="Shape 6"/>
-          <p:cNvSpPr/>
-          <p:nvPr/>
-        </p:nvSpPr>
-        <p:spPr>
-          <a:xfrm>
-            <a:off x="4343400" y="1783080"/>
-            <a:ext cx="3502152" cy="2011680"/>
+          <p:cNvPr id="7" name="Shape 5"/>
+          <p:cNvSpPr/>
+          <p:nvPr/>
+        </p:nvSpPr>
+        <p:spPr>
+          <a:xfrm>
+            <a:off x="685800" y="2898648"/>
+            <a:ext cx="10789920" cy="1005840"/>
           </a:xfrm>
           <a:prstGeom prst="roundRect">
             <a:avLst>
-              <a:gd name="adj" fmla="val 3636"/>
+              <a:gd name="adj" fmla="val 7273"/>
             </a:avLst>
           </a:prstGeom>
           <a:solidFill>
@@ -5370,77 +6127,80 @@
       </p:sp>
       <p:sp>
         <p:nvSpPr>
+          <p:cNvPr id="8" name="Text 6"/>
+          <p:cNvSpPr/>
+          <p:nvPr/>
+        </p:nvSpPr>
+        <p:spPr>
+          <a:xfrm>
+            <a:off x="1005840" y="3044952"/>
+            <a:ext cx="2651760" cy="365760"/>
+          </a:xfrm>
+          <a:prstGeom prst="rect">
+            <a:avLst/>
+          </a:prstGeom>
+          <a:noFill/>
+          <a:ln/>
+        </p:spPr>
+        <p:txBody>
+          <a:bodyPr wrap="square" lIns="0" tIns="0" rIns="0" bIns="0" rtlCol="0" anchor="ctr"/>
+          <a:lstStyle/>
+          <a:p>
+            <a:pPr indent="0" marL="0">
+              <a:buNone/>
+            </a:pPr>
+            <a:r>
+              <a:rPr lang="en-US" sz="1700" b="1" dirty="0">
+                <a:solidFill>
+                  <a:srgbClr val="4FD1E0"/>
+                </a:solidFill>
+                <a:latin typeface="Cambria" pitchFamily="34" charset="0"/>
+                <a:ea typeface="Cambria" pitchFamily="34" charset="-122"/>
+                <a:cs typeface="Cambria" pitchFamily="34" charset="-120"/>
+              </a:rPr>
+              <a:t>Re-runnable</a:t>
+            </a:r>
+            <a:endParaRPr lang="en-US" sz="1700" dirty="0"/>
+          </a:p>
+        </p:txBody>
+      </p:sp>
+      <p:sp>
+        <p:nvSpPr>
           <p:cNvPr id="9" name="Text 7"/>
           <p:cNvSpPr/>
           <p:nvPr/>
         </p:nvSpPr>
         <p:spPr>
           <a:xfrm>
-            <a:off x="4581144" y="1929384"/>
-            <a:ext cx="3063240" cy="411480"/>
-          </a:xfrm>
-          <a:prstGeom prst="rect">
-            <a:avLst/>
-          </a:prstGeom>
-          <a:noFill/>
-          <a:ln/>
-        </p:spPr>
-        <p:txBody>
-          <a:bodyPr wrap="square" lIns="0" tIns="0" rIns="0" bIns="0" rtlCol="0" anchor="ctr"/>
-          <a:lstStyle/>
-          <a:p>
-            <a:pPr indent="0" marL="0">
-              <a:buNone/>
-            </a:pPr>
-            <a:r>
-              <a:rPr lang="en-US" sz="2000" b="1" dirty="0">
-                <a:solidFill>
-                  <a:srgbClr val="3FBF7F"/>
-                </a:solidFill>
-                <a:latin typeface="Calibri" pitchFamily="34" charset="0"/>
-                <a:ea typeface="Calibri" pitchFamily="34" charset="-122"/>
-                <a:cs typeface="Calibri" pitchFamily="34" charset="-120"/>
-              </a:rPr>
-              <a:t>+1.59 mHa</a:t>
-            </a:r>
-            <a:endParaRPr lang="en-US" sz="2000" dirty="0"/>
-          </a:p>
-        </p:txBody>
-      </p:sp>
-      <p:sp>
-        <p:nvSpPr>
-          <p:cNvPr id="10" name="Text 8"/>
-          <p:cNvSpPr/>
-          <p:nvPr/>
-        </p:nvSpPr>
-        <p:spPr>
-          <a:xfrm>
-            <a:off x="4581144" y="2350008"/>
-            <a:ext cx="3063240" cy="274320"/>
-          </a:xfrm>
-          <a:prstGeom prst="rect">
-            <a:avLst/>
-          </a:prstGeom>
-          <a:noFill/>
-          <a:ln/>
-        </p:spPr>
-        <p:txBody>
-          <a:bodyPr wrap="square" lIns="0" tIns="0" rIns="0" bIns="0" rtlCol="0" anchor="ctr"/>
-          <a:lstStyle/>
-          <a:p>
-            <a:pPr indent="0" marL="0">
-              <a:buNone/>
-            </a:pPr>
-            <a:r>
-              <a:rPr lang="en-US" sz="1300" b="1" dirty="0">
-                <a:solidFill>
-                  <a:srgbClr val="FFFFFF"/>
-                </a:solidFill>
-                <a:latin typeface="Calibri" pitchFamily="34" charset="0"/>
-                <a:ea typeface="Calibri" pitchFamily="34" charset="-122"/>
-                <a:cs typeface="Calibri" pitchFamily="34" charset="-120"/>
-              </a:rPr>
-              <a:t>40q absolute anchor</a:t>
+            <a:off x="3749040" y="3026664"/>
+            <a:ext cx="7452360" cy="777240"/>
+          </a:xfrm>
+          <a:prstGeom prst="rect">
+            <a:avLst/>
+          </a:prstGeom>
+          <a:noFill/>
+          <a:ln/>
+        </p:spPr>
+        <p:txBody>
+          <a:bodyPr wrap="square" lIns="0" tIns="0" rIns="0" bIns="0" rtlCol="0" anchor="ctr"/>
+          <a:lstStyle/>
+          <a:p>
+            <a:pPr indent="0" marL="0">
+              <a:lnSpc>
+                <a:spcPts val="1800"/>
+              </a:lnSpc>
+              <a:buNone/>
+            </a:pPr>
+            <a:r>
+              <a:rPr lang="en-US" sz="1300" dirty="0">
+                <a:solidFill>
+                  <a:srgbClr val="8B98B4"/>
+                </a:solidFill>
+                <a:latin typeface="Calibri" pitchFamily="34" charset="0"/>
+                <a:ea typeface="Calibri" pitchFamily="34" charset="-122"/>
+                <a:cs typeface="Calibri" pitchFamily="34" charset="-120"/>
+              </a:rPr>
+              <a:t>One command re-executes 17 headline scripts and audits 9 GPU/QPU artifacts: 26/26 PASS, no modification needed.</a:t>
             </a:r>
             <a:endParaRPr lang="en-US" sz="1300" dirty="0"/>
           </a:p>
@@ -5448,60 +6208,18 @@
       </p:sp>
       <p:sp>
         <p:nvSpPr>
-          <p:cNvPr id="11" name="Text 9"/>
-          <p:cNvSpPr/>
-          <p:nvPr/>
-        </p:nvSpPr>
-        <p:spPr>
-          <a:xfrm>
-            <a:off x="4581144" y="2660904"/>
-            <a:ext cx="3063240" cy="1005840"/>
-          </a:xfrm>
-          <a:prstGeom prst="rect">
-            <a:avLst/>
-          </a:prstGeom>
-          <a:noFill/>
-          <a:ln/>
-        </p:spPr>
-        <p:txBody>
-          <a:bodyPr wrap="square" lIns="0" tIns="0" rIns="0" bIns="0" rtlCol="0" anchor="ctr"/>
-          <a:lstStyle/>
-          <a:p>
-            <a:pPr indent="0" marL="0">
-              <a:lnSpc>
-                <a:spcPts val="1600"/>
-              </a:lnSpc>
-              <a:buNone/>
-            </a:pPr>
-            <a:r>
-              <a:rPr lang="en-US" sz="1150" dirty="0">
-                <a:solidFill>
-                  <a:srgbClr val="8B98B4"/>
-                </a:solidFill>
-                <a:latin typeface="Calibri" pitchFamily="34" charset="0"/>
-                <a:ea typeface="Calibri" pitchFamily="34" charset="-122"/>
-                <a:cs typeface="Calibri" pitchFamily="34" charset="-120"/>
-              </a:rPr>
-              <a:t>Independent DMRG extrapolation to the near-exact limit; robust to ±0.05 mHa under a leave-one-out jackknife.</a:t>
-            </a:r>
-            <a:endParaRPr lang="en-US" sz="1150" dirty="0"/>
-          </a:p>
-        </p:txBody>
-      </p:sp>
-      <p:sp>
-        <p:nvSpPr>
-          <p:cNvPr id="12" name="Shape 10"/>
-          <p:cNvSpPr/>
-          <p:nvPr/>
-        </p:nvSpPr>
-        <p:spPr>
-          <a:xfrm>
-            <a:off x="8001000" y="1783080"/>
-            <a:ext cx="3502152" cy="2011680"/>
+          <p:cNvPr id="10" name="Shape 8"/>
+          <p:cNvSpPr/>
+          <p:nvPr/>
+        </p:nvSpPr>
+        <p:spPr>
+          <a:xfrm>
+            <a:off x="685800" y="4014216"/>
+            <a:ext cx="10789920" cy="1005840"/>
           </a:xfrm>
           <a:prstGeom prst="roundRect">
             <a:avLst>
-              <a:gd name="adj" fmla="val 3636"/>
+              <a:gd name="adj" fmla="val 7273"/>
             </a:avLst>
           </a:prstGeom>
           <a:solidFill>
@@ -5519,77 +6237,80 @@
       </p:sp>
       <p:sp>
         <p:nvSpPr>
-          <p:cNvPr id="13" name="Text 11"/>
-          <p:cNvSpPr/>
-          <p:nvPr/>
-        </p:nvSpPr>
-        <p:spPr>
-          <a:xfrm>
-            <a:off x="8238744" y="1929384"/>
-            <a:ext cx="3063240" cy="411480"/>
-          </a:xfrm>
-          <a:prstGeom prst="rect">
-            <a:avLst/>
-          </a:prstGeom>
-          <a:noFill/>
-          <a:ln/>
-        </p:spPr>
-        <p:txBody>
-          <a:bodyPr wrap="square" lIns="0" tIns="0" rIns="0" bIns="0" rtlCol="0" anchor="ctr"/>
-          <a:lstStyle/>
-          <a:p>
-            <a:pPr indent="0" marL="0">
-              <a:buNone/>
-            </a:pPr>
-            <a:r>
-              <a:rPr lang="en-US" sz="2000" b="1" dirty="0">
-                <a:solidFill>
-                  <a:srgbClr val="9A8CFF"/>
-                </a:solidFill>
-                <a:latin typeface="Calibri" pitchFamily="34" charset="0"/>
-                <a:ea typeface="Calibri" pitchFamily="34" charset="-122"/>
-                <a:cs typeface="Calibri" pitchFamily="34" charset="-120"/>
-              </a:rPr>
-              <a:t>−3.784 / −0.399</a:t>
-            </a:r>
-            <a:endParaRPr lang="en-US" sz="2000" dirty="0"/>
-          </a:p>
-        </p:txBody>
-      </p:sp>
-      <p:sp>
-        <p:nvSpPr>
-          <p:cNvPr id="14" name="Text 12"/>
-          <p:cNvSpPr/>
-          <p:nvPr/>
-        </p:nvSpPr>
-        <p:spPr>
-          <a:xfrm>
-            <a:off x="8238744" y="2350008"/>
-            <a:ext cx="3063240" cy="274320"/>
-          </a:xfrm>
-          <a:prstGeom prst="rect">
-            <a:avLst/>
-          </a:prstGeom>
-          <a:noFill/>
-          <a:ln/>
-        </p:spPr>
-        <p:txBody>
-          <a:bodyPr wrap="square" lIns="0" tIns="0" rIns="0" bIns="0" rtlCol="0" anchor="ctr"/>
-          <a:lstStyle/>
-          <a:p>
-            <a:pPr indent="0" marL="0">
-              <a:buNone/>
-            </a:pPr>
-            <a:r>
-              <a:rPr lang="en-US" sz="1300" b="1" dirty="0">
-                <a:solidFill>
-                  <a:srgbClr val="FFFFFF"/>
-                </a:solidFill>
-                <a:latin typeface="Calibri" pitchFamily="34" charset="0"/>
-                <a:ea typeface="Calibri" pitchFamily="34" charset="-122"/>
-                <a:cs typeface="Calibri" pitchFamily="34" charset="-120"/>
-              </a:rPr>
-              <a:t>38q reference corrections</a:t>
+          <p:cNvPr id="11" name="Text 9"/>
+          <p:cNvSpPr/>
+          <p:nvPr/>
+        </p:nvSpPr>
+        <p:spPr>
+          <a:xfrm>
+            <a:off x="1005840" y="4160520"/>
+            <a:ext cx="2651760" cy="365760"/>
+          </a:xfrm>
+          <a:prstGeom prst="rect">
+            <a:avLst/>
+          </a:prstGeom>
+          <a:noFill/>
+          <a:ln/>
+        </p:spPr>
+        <p:txBody>
+          <a:bodyPr wrap="square" lIns="0" tIns="0" rIns="0" bIns="0" rtlCol="0" anchor="ctr"/>
+          <a:lstStyle/>
+          <a:p>
+            <a:pPr indent="0" marL="0">
+              <a:buNone/>
+            </a:pPr>
+            <a:r>
+              <a:rPr lang="en-US" sz="1700" b="1" dirty="0">
+                <a:solidFill>
+                  <a:srgbClr val="E9B84A"/>
+                </a:solidFill>
+                <a:latin typeface="Cambria" pitchFamily="34" charset="0"/>
+                <a:ea typeface="Cambria" pitchFamily="34" charset="-122"/>
+                <a:cs typeface="Cambria" pitchFamily="34" charset="-120"/>
+              </a:rPr>
+              <a:t>Self-corrected</a:t>
+            </a:r>
+            <a:endParaRPr lang="en-US" sz="1700" dirty="0"/>
+          </a:p>
+        </p:txBody>
+      </p:sp>
+      <p:sp>
+        <p:nvSpPr>
+          <p:cNvPr id="12" name="Text 10"/>
+          <p:cNvSpPr/>
+          <p:nvPr/>
+        </p:nvSpPr>
+        <p:spPr>
+          <a:xfrm>
+            <a:off x="3749040" y="4142232"/>
+            <a:ext cx="7452360" cy="777240"/>
+          </a:xfrm>
+          <a:prstGeom prst="rect">
+            <a:avLst/>
+          </a:prstGeom>
+          <a:noFill/>
+          <a:ln/>
+        </p:spPr>
+        <p:txBody>
+          <a:bodyPr wrap="square" lIns="0" tIns="0" rIns="0" bIns="0" rtlCol="0" anchor="ctr"/>
+          <a:lstStyle/>
+          <a:p>
+            <a:pPr indent="0" marL="0">
+              <a:lnSpc>
+                <a:spcPts val="1800"/>
+              </a:lnSpc>
+              <a:buNone/>
+            </a:pPr>
+            <a:r>
+              <a:rPr lang="en-US" sz="1300" dirty="0">
+                <a:solidFill>
+                  <a:srgbClr val="8B98B4"/>
+                </a:solidFill>
+                <a:latin typeface="Calibri" pitchFamily="34" charset="0"/>
+                <a:ea typeface="Calibri" pitchFamily="34" charset="-122"/>
+                <a:cs typeface="Calibri" pitchFamily="34" charset="-120"/>
+              </a:rPr>
+              <a:t>Two claims we tested and WITHDREW: an active-space-fragile candidate ranking, and a DFT sign-flip that proved to be an SCF artifact.</a:t>
             </a:r>
             <a:endParaRPr lang="en-US" sz="1300" dirty="0"/>
           </a:p>
@@ -5597,60 +6318,18 @@
       </p:sp>
       <p:sp>
         <p:nvSpPr>
-          <p:cNvPr id="15" name="Text 13"/>
-          <p:cNvSpPr/>
-          <p:nvPr/>
-        </p:nvSpPr>
-        <p:spPr>
-          <a:xfrm>
-            <a:off x="8238744" y="2660904"/>
-            <a:ext cx="3063240" cy="1005840"/>
-          </a:xfrm>
-          <a:prstGeom prst="rect">
-            <a:avLst/>
-          </a:prstGeom>
-          <a:noFill/>
-          <a:ln/>
-        </p:spPr>
-        <p:txBody>
-          <a:bodyPr wrap="square" lIns="0" tIns="0" rIns="0" bIns="0" rtlCol="0" anchor="ctr"/>
-          <a:lstStyle/>
-          <a:p>
-            <a:pPr indent="0" marL="0">
-              <a:lnSpc>
-                <a:spcPts val="1600"/>
-              </a:lnSpc>
-              <a:buNone/>
-            </a:pPr>
-            <a:r>
-              <a:rPr lang="en-US" sz="1150" dirty="0">
-                <a:solidFill>
-                  <a:srgbClr val="8B98B4"/>
-                </a:solidFill>
-                <a:latin typeface="Calibri" pitchFamily="34" charset="0"/>
-                <a:ea typeface="Calibri" pitchFamily="34" charset="-122"/>
-                <a:cs typeface="Calibri" pitchFamily="34" charset="-120"/>
-              </a:rPr>
-              <a:t>CrO and the real Sn₂O₂ EUV motif land below their same-CAS DMRG references — mechanism confirmed at three χ.</a:t>
-            </a:r>
-            <a:endParaRPr lang="en-US" sz="1150" dirty="0"/>
-          </a:p>
-        </p:txBody>
-      </p:sp>
-      <p:sp>
-        <p:nvSpPr>
-          <p:cNvPr id="16" name="Shape 14"/>
-          <p:cNvSpPr/>
-          <p:nvPr/>
-        </p:nvSpPr>
-        <p:spPr>
-          <a:xfrm>
-            <a:off x="685800" y="3977640"/>
-            <a:ext cx="3502152" cy="2011680"/>
+          <p:cNvPr id="13" name="Shape 11"/>
+          <p:cNvSpPr/>
+          <p:nvPr/>
+        </p:nvSpPr>
+        <p:spPr>
+          <a:xfrm>
+            <a:off x="685800" y="5129784"/>
+            <a:ext cx="10789920" cy="1005840"/>
           </a:xfrm>
           <a:prstGeom prst="roundRect">
             <a:avLst>
-              <a:gd name="adj" fmla="val 3636"/>
+              <a:gd name="adj" fmla="val 7273"/>
             </a:avLst>
           </a:prstGeom>
           <a:solidFill>
@@ -5668,77 +6347,80 @@
       </p:sp>
       <p:sp>
         <p:nvSpPr>
-          <p:cNvPr id="17" name="Text 15"/>
-          <p:cNvSpPr/>
-          <p:nvPr/>
-        </p:nvSpPr>
-        <p:spPr>
-          <a:xfrm>
-            <a:off x="923544" y="4123944"/>
-            <a:ext cx="3063240" cy="411480"/>
-          </a:xfrm>
-          <a:prstGeom prst="rect">
-            <a:avLst/>
-          </a:prstGeom>
-          <a:noFill/>
-          <a:ln/>
-        </p:spPr>
-        <p:txBody>
-          <a:bodyPr wrap="square" lIns="0" tIns="0" rIns="0" bIns="0" rtlCol="0" anchor="ctr"/>
-          <a:lstStyle/>
-          <a:p>
-            <a:pPr indent="0" marL="0">
-              <a:buNone/>
-            </a:pPr>
-            <a:r>
-              <a:rPr lang="en-US" sz="2000" b="1" dirty="0">
-                <a:solidFill>
-                  <a:srgbClr val="3FBF7F"/>
-                </a:solidFill>
-                <a:latin typeface="Calibri" pitchFamily="34" charset="0"/>
-                <a:ea typeface="Calibri" pitchFamily="34" charset="-122"/>
-                <a:cs typeface="Calibri" pitchFamily="34" charset="-120"/>
-              </a:rPr>
-              <a:t>0.038 / 0.197 mHa</a:t>
-            </a:r>
-            <a:endParaRPr lang="en-US" sz="2000" dirty="0"/>
-          </a:p>
-        </p:txBody>
-      </p:sp>
-      <p:sp>
-        <p:nvSpPr>
-          <p:cNvPr id="18" name="Text 16"/>
-          <p:cNvSpPr/>
-          <p:nvPr/>
-        </p:nvSpPr>
-        <p:spPr>
-          <a:xfrm>
-            <a:off x="923544" y="4544568"/>
-            <a:ext cx="3063240" cy="274320"/>
-          </a:xfrm>
-          <a:prstGeom prst="rect">
-            <a:avLst/>
-          </a:prstGeom>
-          <a:noFill/>
-          <a:ln/>
-        </p:spPr>
-        <p:txBody>
-          <a:bodyPr wrap="square" lIns="0" tIns="0" rIns="0" bIns="0" rtlCol="0" anchor="ctr"/>
-          <a:lstStyle/>
-          <a:p>
-            <a:pPr indent="0" marL="0">
-              <a:buNone/>
-            </a:pPr>
-            <a:r>
-              <a:rPr lang="en-US" sz="1300" b="1" dirty="0">
-                <a:solidFill>
-                  <a:srgbClr val="FFFFFF"/>
-                </a:solidFill>
-                <a:latin typeface="Calibri" pitchFamily="34" charset="0"/>
-                <a:ea typeface="Calibri" pitchFamily="34" charset="-122"/>
-                <a:cs typeface="Calibri" pitchFamily="34" charset="-120"/>
-              </a:rPr>
-              <a:t>Open-shell oxides (20q)</a:t>
+          <p:cNvPr id="14" name="Text 12"/>
+          <p:cNvSpPr/>
+          <p:nvPr/>
+        </p:nvSpPr>
+        <p:spPr>
+          <a:xfrm>
+            <a:off x="1005840" y="5276088"/>
+            <a:ext cx="2651760" cy="365760"/>
+          </a:xfrm>
+          <a:prstGeom prst="rect">
+            <a:avLst/>
+          </a:prstGeom>
+          <a:noFill/>
+          <a:ln/>
+        </p:spPr>
+        <p:txBody>
+          <a:bodyPr wrap="square" lIns="0" tIns="0" rIns="0" bIns="0" rtlCol="0" anchor="ctr"/>
+          <a:lstStyle/>
+          <a:p>
+            <a:pPr indent="0" marL="0">
+              <a:buNone/>
+            </a:pPr>
+            <a:r>
+              <a:rPr lang="en-US" sz="1700" b="1" dirty="0">
+                <a:solidFill>
+                  <a:srgbClr val="9A8CFF"/>
+                </a:solidFill>
+                <a:latin typeface="Cambria" pitchFamily="34" charset="0"/>
+                <a:ea typeface="Cambria" pitchFamily="34" charset="-122"/>
+                <a:cs typeface="Cambria" pitchFamily="34" charset="-120"/>
+              </a:rPr>
+              <a:t>Reference-correcting</a:t>
+            </a:r>
+            <a:endParaRPr lang="en-US" sz="1700" dirty="0"/>
+          </a:p>
+        </p:txBody>
+      </p:sp>
+      <p:sp>
+        <p:nvSpPr>
+          <p:cNvPr id="15" name="Text 13"/>
+          <p:cNvSpPr/>
+          <p:nvPr/>
+        </p:nvSpPr>
+        <p:spPr>
+          <a:xfrm>
+            <a:off x="3749040" y="5257800"/>
+            <a:ext cx="7452360" cy="777240"/>
+          </a:xfrm>
+          <a:prstGeom prst="rect">
+            <a:avLst/>
+          </a:prstGeom>
+          <a:noFill/>
+          <a:ln/>
+        </p:spPr>
+        <p:txBody>
+          <a:bodyPr wrap="square" lIns="0" tIns="0" rIns="0" bIns="0" rtlCol="0" anchor="ctr"/>
+          <a:lstStyle/>
+          <a:p>
+            <a:pPr indent="0" marL="0">
+              <a:lnSpc>
+                <a:spcPts val="1800"/>
+              </a:lnSpc>
+              <a:buNone/>
+            </a:pPr>
+            <a:r>
+              <a:rPr lang="en-US" sz="1300" dirty="0">
+                <a:solidFill>
+                  <a:srgbClr val="8B98B4"/>
+                </a:solidFill>
+                <a:latin typeface="Calibri" pitchFamily="34" charset="0"/>
+                <a:ea typeface="Calibri" pitchFamily="34" charset="-122"/>
+                <a:cs typeface="Calibri" pitchFamily="34" charset="-120"/>
+              </a:rPr>
+              <a:t>At 38q our solver drops BELOW the classical DMRG reference — and χ=800/1200 confirm it is the reference that was truncated, not us.</a:t>
             </a:r>
             <a:endParaRPr lang="en-US" sz="1300" dirty="0"/>
           </a:p>
@@ -5746,380 +6428,40 @@
       </p:sp>
       <p:sp>
         <p:nvSpPr>
-          <p:cNvPr id="19" name="Text 17"/>
-          <p:cNvSpPr/>
-          <p:nvPr/>
-        </p:nvSpPr>
-        <p:spPr>
-          <a:xfrm>
-            <a:off x="923544" y="4855464"/>
-            <a:ext cx="3063240" cy="1005840"/>
-          </a:xfrm>
-          <a:prstGeom prst="rect">
-            <a:avLst/>
-          </a:prstGeom>
-          <a:noFill/>
-          <a:ln/>
-        </p:spPr>
-        <p:txBody>
-          <a:bodyPr wrap="square" lIns="0" tIns="0" rIns="0" bIns="0" rtlCol="0" anchor="ctr"/>
-          <a:lstStyle/>
-          <a:p>
-            <a:pPr indent="0" marL="0">
-              <a:lnSpc>
-                <a:spcPts val="1600"/>
-              </a:lnSpc>
-              <a:buNone/>
-            </a:pPr>
-            <a:r>
-              <a:rPr lang="en-US" sz="1150" dirty="0">
-                <a:solidFill>
-                  <a:srgbClr val="8B98B4"/>
-                </a:solidFill>
-                <a:latin typeface="Calibri" pitchFamily="34" charset="0"/>
-                <a:ea typeface="Calibri" pitchFamily="34" charset="-122"/>
-                <a:cs typeface="Calibri" pitchFamily="34" charset="-120"/>
-              </a:rPr>
-              <a:t>CrO ⁵Π and NiO ³Σ⁻ to chemical accuracy against exact diagonalization.</a:t>
-            </a:r>
-            <a:endParaRPr lang="en-US" sz="1150" dirty="0"/>
-          </a:p>
-        </p:txBody>
-      </p:sp>
-      <p:sp>
-        <p:nvSpPr>
-          <p:cNvPr id="20" name="Shape 18"/>
-          <p:cNvSpPr/>
-          <p:nvPr/>
-        </p:nvSpPr>
-        <p:spPr>
-          <a:xfrm>
-            <a:off x="4343400" y="3977640"/>
-            <a:ext cx="3502152" cy="2011680"/>
-          </a:xfrm>
-          <a:prstGeom prst="roundRect">
-            <a:avLst>
-              <a:gd name="adj" fmla="val 3636"/>
-            </a:avLst>
-          </a:prstGeom>
-          <a:solidFill>
-            <a:srgbClr val="151E33"/>
-          </a:solidFill>
-          <a:ln/>
-          <a:effectLst>
-            <a:outerShdw sx="100000" sy="100000" kx="0" ky="0" algn="bl" rotWithShape="0" blurRad="127000" dist="38100" dir="5400000">
-              <a:srgbClr val="000000">
-                <a:alpha val="35000"/>
-              </a:srgbClr>
-            </a:outerShdw>
-          </a:effectLst>
-        </p:spPr>
-      </p:sp>
-      <p:sp>
-        <p:nvSpPr>
-          <p:cNvPr id="21" name="Text 19"/>
-          <p:cNvSpPr/>
-          <p:nvPr/>
-        </p:nvSpPr>
-        <p:spPr>
-          <a:xfrm>
-            <a:off x="4581144" y="4123944"/>
-            <a:ext cx="3063240" cy="411480"/>
-          </a:xfrm>
-          <a:prstGeom prst="rect">
-            <a:avLst/>
-          </a:prstGeom>
-          <a:noFill/>
-          <a:ln/>
-        </p:spPr>
-        <p:txBody>
-          <a:bodyPr wrap="square" lIns="0" tIns="0" rIns="0" bIns="0" rtlCol="0" anchor="ctr"/>
-          <a:lstStyle/>
-          <a:p>
-            <a:pPr indent="0" marL="0">
-              <a:buNone/>
-            </a:pPr>
-            <a:r>
-              <a:rPr lang="en-US" sz="2000" b="1" dirty="0">
-                <a:solidFill>
-                  <a:srgbClr val="4FD1E0"/>
-                </a:solidFill>
-                <a:latin typeface="Calibri" pitchFamily="34" charset="0"/>
-                <a:ea typeface="Calibri" pitchFamily="34" charset="-122"/>
-                <a:cs typeface="Calibri" pitchFamily="34" charset="-120"/>
-              </a:rPr>
-              <a:t>real QPU</a:t>
-            </a:r>
-            <a:endParaRPr lang="en-US" sz="2000" dirty="0"/>
-          </a:p>
-        </p:txBody>
-      </p:sp>
-      <p:sp>
-        <p:nvSpPr>
-          <p:cNvPr id="22" name="Text 20"/>
-          <p:cNvSpPr/>
-          <p:nvPr/>
-        </p:nvSpPr>
-        <p:spPr>
-          <a:xfrm>
-            <a:off x="4581144" y="4544568"/>
-            <a:ext cx="3063240" cy="274320"/>
-          </a:xfrm>
-          <a:prstGeom prst="rect">
-            <a:avLst/>
-          </a:prstGeom>
-          <a:noFill/>
-          <a:ln/>
-        </p:spPr>
-        <p:txBody>
-          <a:bodyPr wrap="square" lIns="0" tIns="0" rIns="0" bIns="0" rtlCol="0" anchor="ctr"/>
-          <a:lstStyle/>
-          <a:p>
-            <a:pPr indent="0" marL="0">
-              <a:buNone/>
-            </a:pPr>
-            <a:r>
-              <a:rPr lang="en-US" sz="1300" b="1" dirty="0">
-                <a:solidFill>
-                  <a:srgbClr val="FFFFFF"/>
-                </a:solidFill>
-                <a:latin typeface="Calibri" pitchFamily="34" charset="0"/>
-                <a:ea typeface="Calibri" pitchFamily="34" charset="-122"/>
-                <a:cs typeface="Calibri" pitchFamily="34" charset="-120"/>
-              </a:rPr>
-              <a:t>Trapped-ion silicon</a:t>
-            </a:r>
-            <a:endParaRPr lang="en-US" sz="1300" dirty="0"/>
-          </a:p>
-        </p:txBody>
-      </p:sp>
-      <p:sp>
-        <p:nvSpPr>
-          <p:cNvPr id="23" name="Text 21"/>
-          <p:cNvSpPr/>
-          <p:nvPr/>
-        </p:nvSpPr>
-        <p:spPr>
-          <a:xfrm>
-            <a:off x="4581144" y="4855464"/>
-            <a:ext cx="3063240" cy="1005840"/>
-          </a:xfrm>
-          <a:prstGeom prst="rect">
-            <a:avLst/>
-          </a:prstGeom>
-          <a:noFill/>
-          <a:ln/>
-        </p:spPr>
-        <p:txBody>
-          <a:bodyPr wrap="square" lIns="0" tIns="0" rIns="0" bIns="0" rtlCol="0" anchor="ctr"/>
-          <a:lstStyle/>
-          <a:p>
-            <a:pPr indent="0" marL="0">
-              <a:lnSpc>
-                <a:spcPts val="1600"/>
-              </a:lnSpc>
-              <a:buNone/>
-            </a:pPr>
-            <a:r>
-              <a:rPr lang="en-US" sz="1150" dirty="0">
-                <a:solidFill>
-                  <a:srgbClr val="8B98B4"/>
-                </a:solidFill>
-                <a:latin typeface="Calibri" pitchFamily="34" charset="0"/>
-                <a:ea typeface="Calibri" pitchFamily="34" charset="-122"/>
-                <a:cs typeface="Calibri" pitchFamily="34" charset="-120"/>
-              </a:rPr>
-              <a:t>AQT ibex-q1 decoded; device-sampled determinants seed a QSCI growth that recovers exact FCI.</a:t>
-            </a:r>
-            <a:endParaRPr lang="en-US" sz="1150" dirty="0"/>
-          </a:p>
-        </p:txBody>
-      </p:sp>
-      <p:sp>
-        <p:nvSpPr>
-          <p:cNvPr id="24" name="Shape 22"/>
-          <p:cNvSpPr/>
-          <p:nvPr/>
-        </p:nvSpPr>
-        <p:spPr>
-          <a:xfrm>
-            <a:off x="8001000" y="3977640"/>
-            <a:ext cx="3502152" cy="2011680"/>
-          </a:xfrm>
-          <a:prstGeom prst="roundRect">
-            <a:avLst>
-              <a:gd name="adj" fmla="val 3636"/>
-            </a:avLst>
-          </a:prstGeom>
-          <a:solidFill>
-            <a:srgbClr val="151E33"/>
-          </a:solidFill>
-          <a:ln/>
-          <a:effectLst>
-            <a:outerShdw sx="100000" sy="100000" kx="0" ky="0" algn="bl" rotWithShape="0" blurRad="127000" dist="38100" dir="5400000">
-              <a:srgbClr val="000000">
-                <a:alpha val="35000"/>
-              </a:srgbClr>
-            </a:outerShdw>
-          </a:effectLst>
-        </p:spPr>
-      </p:sp>
-      <p:sp>
-        <p:nvSpPr>
-          <p:cNvPr id="25" name="Text 23"/>
-          <p:cNvSpPr/>
-          <p:nvPr/>
-        </p:nvSpPr>
-        <p:spPr>
-          <a:xfrm>
-            <a:off x="8238744" y="4123944"/>
-            <a:ext cx="3063240" cy="411480"/>
-          </a:xfrm>
-          <a:prstGeom prst="rect">
-            <a:avLst/>
-          </a:prstGeom>
-          <a:noFill/>
-          <a:ln/>
-        </p:spPr>
-        <p:txBody>
-          <a:bodyPr wrap="square" lIns="0" tIns="0" rIns="0" bIns="0" rtlCol="0" anchor="ctr"/>
-          <a:lstStyle/>
-          <a:p>
-            <a:pPr indent="0" marL="0">
-              <a:buNone/>
-            </a:pPr>
-            <a:r>
-              <a:rPr lang="en-US" sz="2000" b="1" dirty="0">
-                <a:solidFill>
-                  <a:srgbClr val="E9B84A"/>
-                </a:solidFill>
-                <a:latin typeface="Calibri" pitchFamily="34" charset="0"/>
-                <a:ea typeface="Calibri" pitchFamily="34" charset="-122"/>
-                <a:cs typeface="Calibri" pitchFamily="34" charset="-120"/>
-              </a:rPr>
-              <a:t>16 TB → 195 MB</a:t>
-            </a:r>
-            <a:endParaRPr lang="en-US" sz="2000" dirty="0"/>
-          </a:p>
-        </p:txBody>
-      </p:sp>
-      <p:sp>
-        <p:nvSpPr>
-          <p:cNvPr id="26" name="Text 24"/>
-          <p:cNvSpPr/>
-          <p:nvPr/>
-        </p:nvSpPr>
-        <p:spPr>
-          <a:xfrm>
-            <a:off x="8238744" y="4544568"/>
-            <a:ext cx="3063240" cy="274320"/>
-          </a:xfrm>
-          <a:prstGeom prst="rect">
-            <a:avLst/>
-          </a:prstGeom>
-          <a:noFill/>
-          <a:ln/>
-        </p:spPr>
-        <p:txBody>
-          <a:bodyPr wrap="square" lIns="0" tIns="0" rIns="0" bIns="0" rtlCol="0" anchor="ctr"/>
-          <a:lstStyle/>
-          <a:p>
-            <a:pPr indent="0" marL="0">
-              <a:buNone/>
-            </a:pPr>
-            <a:r>
-              <a:rPr lang="en-US" sz="1300" b="1" dirty="0">
-                <a:solidFill>
-                  <a:srgbClr val="FFFFFF"/>
-                </a:solidFill>
-                <a:latin typeface="Calibri" pitchFamily="34" charset="0"/>
-                <a:ea typeface="Calibri" pitchFamily="34" charset="-122"/>
-                <a:cs typeface="Calibri" pitchFamily="34" charset="-120"/>
-              </a:rPr>
-              <a:t>The memory wall removed</a:t>
-            </a:r>
-            <a:endParaRPr lang="en-US" sz="1300" dirty="0"/>
-          </a:p>
-        </p:txBody>
-      </p:sp>
-      <p:sp>
-        <p:nvSpPr>
-          <p:cNvPr id="27" name="Text 25"/>
-          <p:cNvSpPr/>
-          <p:nvPr/>
-        </p:nvSpPr>
-        <p:spPr>
-          <a:xfrm>
-            <a:off x="8238744" y="4855464"/>
-            <a:ext cx="3063240" cy="1005840"/>
-          </a:xfrm>
-          <a:prstGeom prst="rect">
-            <a:avLst/>
-          </a:prstGeom>
-          <a:noFill/>
-          <a:ln/>
-        </p:spPr>
-        <p:txBody>
-          <a:bodyPr wrap="square" lIns="0" tIns="0" rIns="0" bIns="0" rtlCol="0" anchor="ctr"/>
-          <a:lstStyle/>
-          <a:p>
-            <a:pPr indent="0" marL="0">
-              <a:lnSpc>
-                <a:spcPts val="1600"/>
-              </a:lnSpc>
-              <a:buNone/>
-            </a:pPr>
-            <a:r>
-              <a:rPr lang="en-US" sz="1150" dirty="0">
-                <a:solidFill>
-                  <a:srgbClr val="8B98B4"/>
-                </a:solidFill>
-                <a:latin typeface="Calibri" pitchFamily="34" charset="0"/>
-                <a:ea typeface="Calibri" pitchFamily="34" charset="-122"/>
-                <a:cs typeface="Calibri" pitchFamily="34" charset="-120"/>
-              </a:rPr>
-              <a:t>Tensor-network representation at the measured bond dimension — what makes 40 qubits fit on one GPU.</a:t>
-            </a:r>
-            <a:endParaRPr lang="en-US" sz="1150" dirty="0"/>
-          </a:p>
-        </p:txBody>
-      </p:sp>
-      <p:sp>
-        <p:nvSpPr>
-          <p:cNvPr id="28" name="Text 26"/>
-          <p:cNvSpPr/>
-          <p:nvPr/>
-        </p:nvSpPr>
-        <p:spPr>
-          <a:xfrm>
-            <a:off x="685800" y="6327648"/>
-            <a:ext cx="10789920" cy="320040"/>
-          </a:xfrm>
-          <a:prstGeom prst="rect">
-            <a:avLst/>
-          </a:prstGeom>
-          <a:noFill/>
-          <a:ln/>
-        </p:spPr>
-        <p:txBody>
-          <a:bodyPr wrap="square" lIns="0" tIns="0" rIns="0" bIns="0" rtlCol="0" anchor="ctr"/>
-          <a:lstStyle/>
-          <a:p>
-            <a:pPr indent="0" marL="0">
-              <a:buNone/>
-            </a:pPr>
-            <a:r>
-              <a:rPr lang="en-US" sz="1050" dirty="0">
-                <a:solidFill>
-                  <a:srgbClr val="5D6B8A"/>
-                </a:solidFill>
-                <a:latin typeface="Calibri" pitchFamily="34" charset="0"/>
-                <a:ea typeface="Calibri" pitchFamily="34" charset="-122"/>
-                <a:cs typeface="Calibri" pitchFamily="34" charset="-120"/>
-              </a:rPr>
-              <a:t>Full traceability: docs/claims_ledger.md maps every number → script → evidence file → status.</a:t>
-            </a:r>
-            <a:endParaRPr lang="en-US" sz="1050" dirty="0"/>
+          <p:cNvPr id="16" name="Text 14"/>
+          <p:cNvSpPr/>
+          <p:nvPr/>
+        </p:nvSpPr>
+        <p:spPr>
+          <a:xfrm>
+            <a:off x="685800" y="6263640"/>
+            <a:ext cx="10789920" cy="365760"/>
+          </a:xfrm>
+          <a:prstGeom prst="rect">
+            <a:avLst/>
+          </a:prstGeom>
+          <a:noFill/>
+          <a:ln/>
+        </p:spPr>
+        <p:txBody>
+          <a:bodyPr wrap="square" lIns="0" tIns="0" rIns="0" bIns="0" rtlCol="0" anchor="ctr"/>
+          <a:lstStyle/>
+          <a:p>
+            <a:pPr indent="0" marL="0">
+              <a:buNone/>
+            </a:pPr>
+            <a:r>
+              <a:rPr lang="en-US" sz="1500" i="1" dirty="0">
+                <a:solidFill>
+                  <a:srgbClr val="E8EDF7"/>
+                </a:solidFill>
+                <a:latin typeface="Calibri" pitchFamily="34" charset="0"/>
+                <a:ea typeface="Calibri" pitchFamily="34" charset="-122"/>
+                <a:cs typeface="Calibri" pitchFamily="34" charset="-120"/>
+              </a:rPr>
+              <a:t>We publish the negatives. That is why the positives should be believed.</a:t>
+            </a:r>
+            <a:endParaRPr lang="en-US" sz="1500" dirty="0"/>
           </a:p>
         </p:txBody>
       </p:sp>
@@ -6182,13 +6524,13 @@
             <a:r>
               <a:rPr lang="en-US" sz="1200" b="1" spc="300" kern="0" dirty="0">
                 <a:solidFill>
-                  <a:srgbClr val="E9B84A"/>
-                </a:solidFill>
-                <a:latin typeface="Calibri" pitchFamily="34" charset="0"/>
-                <a:ea typeface="Calibri" pitchFamily="34" charset="-122"/>
-                <a:cs typeface="Calibri" pitchFamily="34" charset="-120"/>
-              </a:rPr>
-              <a:t>HONEST LIMITS — NON-NEGOTIABLE</a:t>
+                  <a:srgbClr val="4FD1E0"/>
+                </a:solidFill>
+                <a:latin typeface="Calibri" pitchFamily="34" charset="0"/>
+                <a:ea typeface="Calibri" pitchFamily="34" charset="-122"/>
+                <a:cs typeface="Calibri" pitchFamily="34" charset="-120"/>
+              </a:rPr>
+              <a:t>EXECUTED — EVERY NUMBER TRACES TO A COMMITTED FILE</a:t>
             </a:r>
             <a:endParaRPr lang="en-US" sz="1200" dirty="0"/>
           </a:p>
@@ -6227,7 +6569,7 @@
                 <a:ea typeface="Cambria" pitchFamily="34" charset="-122"/>
                 <a:cs typeface="Cambria" pitchFamily="34" charset="-120"/>
               </a:rPr>
-              <a:t>What we do not claim</a:t>
+              <a:t>What actually ran</a:t>
             </a:r>
             <a:endParaRPr lang="en-US" sz="3300" dirty="0"/>
           </a:p>
@@ -6242,22 +6584,17 @@
         <p:spPr>
           <a:xfrm>
             <a:off x="685800" y="1783080"/>
-            <a:ext cx="10789920" cy="841248"/>
+            <a:ext cx="3502152" cy="2011680"/>
           </a:xfrm>
           <a:prstGeom prst="roundRect">
             <a:avLst>
-              <a:gd name="adj" fmla="val 8696"/>
+              <a:gd name="adj" fmla="val 3636"/>
             </a:avLst>
           </a:prstGeom>
           <a:solidFill>
-            <a:srgbClr val="1B2540"/>
+            <a:srgbClr val="151E33"/>
           </a:solidFill>
-          <a:ln w="12700">
-            <a:solidFill>
-              <a:srgbClr val="2A3654"/>
-            </a:solidFill>
-            <a:prstDash val="solid"/>
-          </a:ln>
+          <a:ln/>
           <a:effectLst>
             <a:outerShdw sx="100000" sy="100000" kx="0" ky="0" algn="bl" rotWithShape="0" blurRad="127000" dist="38100" dir="5400000">
               <a:srgbClr val="000000">
@@ -6275,34 +6612,34 @@
         </p:nvSpPr>
         <p:spPr>
           <a:xfrm>
-            <a:off x="960120" y="1892808"/>
-            <a:ext cx="365760" cy="548640"/>
-          </a:xfrm>
-          <a:prstGeom prst="rect">
-            <a:avLst/>
-          </a:prstGeom>
-          <a:noFill/>
-          <a:ln/>
-        </p:spPr>
-        <p:txBody>
-          <a:bodyPr wrap="square" lIns="0" tIns="0" rIns="0" bIns="0" rtlCol="0" anchor="ctr"/>
-          <a:lstStyle/>
-          <a:p>
-            <a:pPr indent="0" marL="0">
-              <a:buNone/>
-            </a:pPr>
-            <a:r>
-              <a:rPr lang="en-US" sz="1600" dirty="0">
-                <a:solidFill>
-                  <a:srgbClr val="E9B84A"/>
-                </a:solidFill>
-                <a:latin typeface="Calibri" pitchFamily="34" charset="0"/>
-                <a:ea typeface="Calibri" pitchFamily="34" charset="-122"/>
-                <a:cs typeface="Calibri" pitchFamily="34" charset="-120"/>
-              </a:rPr>
-              <a:t>⚑</a:t>
-            </a:r>
-            <a:endParaRPr lang="en-US" sz="1600" dirty="0"/>
+            <a:off x="923544" y="1929384"/>
+            <a:ext cx="3063240" cy="411480"/>
+          </a:xfrm>
+          <a:prstGeom prst="rect">
+            <a:avLst/>
+          </a:prstGeom>
+          <a:noFill/>
+          <a:ln/>
+        </p:spPr>
+        <p:txBody>
+          <a:bodyPr wrap="square" lIns="0" tIns="0" rIns="0" bIns="0" rtlCol="0" anchor="ctr"/>
+          <a:lstStyle/>
+          <a:p>
+            <a:pPr indent="0" marL="0">
+              <a:buNone/>
+            </a:pPr>
+            <a:r>
+              <a:rPr lang="en-US" sz="2000" b="1" dirty="0">
+                <a:solidFill>
+                  <a:srgbClr val="4FD1E0"/>
+                </a:solidFill>
+                <a:latin typeface="Calibri" pitchFamily="34" charset="0"/>
+                <a:ea typeface="Calibri" pitchFamily="34" charset="-122"/>
+                <a:cs typeface="Calibri" pitchFamily="34" charset="-120"/>
+              </a:rPr>
+              <a:t>+1.226 mHa</a:t>
+            </a:r>
+            <a:endParaRPr lang="en-US" sz="2000" dirty="0"/>
           </a:p>
         </p:txBody>
       </p:sp>
@@ -6314,8 +6651,47 @@
         </p:nvSpPr>
         <p:spPr>
           <a:xfrm>
-            <a:off x="1417320" y="1856232"/>
-            <a:ext cx="9784080" cy="713232"/>
+            <a:off x="923544" y="2350008"/>
+            <a:ext cx="3063240" cy="274320"/>
+          </a:xfrm>
+          <a:prstGeom prst="rect">
+            <a:avLst/>
+          </a:prstGeom>
+          <a:noFill/>
+          <a:ln/>
+        </p:spPr>
+        <p:txBody>
+          <a:bodyPr wrap="square" lIns="0" tIns="0" rIns="0" bIns="0" rtlCol="0" anchor="ctr"/>
+          <a:lstStyle/>
+          <a:p>
+            <a:pPr indent="0" marL="0">
+              <a:buNone/>
+            </a:pPr>
+            <a:r>
+              <a:rPr lang="en-US" sz="1300" b="1" dirty="0">
+                <a:solidFill>
+                  <a:srgbClr val="FFFFFF"/>
+                </a:solidFill>
+                <a:latin typeface="Calibri" pitchFamily="34" charset="0"/>
+                <a:ea typeface="Calibri" pitchFamily="34" charset="-122"/>
+                <a:cs typeface="Calibri" pitchFamily="34" charset="-120"/>
+              </a:rPr>
+              <a:t>40q flagship on GPU</a:t>
+            </a:r>
+            <a:endParaRPr lang="en-US" sz="1300" dirty="0"/>
+          </a:p>
+        </p:txBody>
+      </p:sp>
+      <p:sp>
+        <p:nvSpPr>
+          <p:cNvPr id="7" name="Text 5"/>
+          <p:cNvSpPr/>
+          <p:nvPr/>
+        </p:nvSpPr>
+        <p:spPr>
+          <a:xfrm>
+            <a:off x="923544" y="2660904"/>
+            <a:ext cx="3063240" cy="1005840"/>
           </a:xfrm>
           <a:prstGeom prst="rect">
             <a:avLst/>
@@ -6329,50 +6705,45 @@
           <a:p>
             <a:pPr indent="0" marL="0">
               <a:lnSpc>
-                <a:spcPts val="1800"/>
+                <a:spcPts val="1600"/>
               </a:lnSpc>
               <a:buNone/>
             </a:pPr>
             <a:r>
-              <a:rPr lang="en-US" sz="1300" dirty="0">
-                <a:solidFill>
-                  <a:srgbClr val="E8EDF7"/>
-                </a:solidFill>
-                <a:latin typeface="Calibri" pitchFamily="34" charset="0"/>
-                <a:ea typeface="Calibri" pitchFamily="34" charset="-122"/>
-                <a:cs typeface="Calibri" pitchFamily="34" charset="-120"/>
-              </a:rPr>
-              <a:t>No quantum ADVANTAGE at these sizes. At ≤40 qubits classical methods still solve these instances. The value is trust and correctness, not speed — the advantage regime is beyond, which the 40q run targets.</a:t>
-            </a:r>
-            <a:endParaRPr lang="en-US" sz="1300" dirty="0"/>
-          </a:p>
-        </p:txBody>
-      </p:sp>
-      <p:sp>
-        <p:nvSpPr>
-          <p:cNvPr id="7" name="Shape 5"/>
-          <p:cNvSpPr/>
-          <p:nvPr/>
-        </p:nvSpPr>
-        <p:spPr>
-          <a:xfrm>
-            <a:off x="685800" y="2697480"/>
-            <a:ext cx="10789920" cy="841248"/>
+              <a:rPr lang="en-US" sz="1150" dirty="0">
+                <a:solidFill>
+                  <a:srgbClr val="8B98B4"/>
+                </a:solidFill>
+                <a:latin typeface="Calibri" pitchFamily="34" charset="0"/>
+                <a:ea typeface="Calibri" pitchFamily="34" charset="-122"/>
+                <a:cs typeface="Calibri" pitchFamily="34" charset="-120"/>
+              </a:rPr>
+              <a:t>Chemically accurate vs its frozen DMRG(χ=400) reference at 450,257 determinants — pre-registered criterion met.</a:t>
+            </a:r>
+            <a:endParaRPr lang="en-US" sz="1150" dirty="0"/>
+          </a:p>
+        </p:txBody>
+      </p:sp>
+      <p:sp>
+        <p:nvSpPr>
+          <p:cNvPr id="8" name="Shape 6"/>
+          <p:cNvSpPr/>
+          <p:nvPr/>
+        </p:nvSpPr>
+        <p:spPr>
+          <a:xfrm>
+            <a:off x="4343400" y="1783080"/>
+            <a:ext cx="3502152" cy="2011680"/>
           </a:xfrm>
           <a:prstGeom prst="roundRect">
             <a:avLst>
-              <a:gd name="adj" fmla="val 8696"/>
+              <a:gd name="adj" fmla="val 3636"/>
             </a:avLst>
           </a:prstGeom>
           <a:solidFill>
-            <a:srgbClr val="1B2540"/>
+            <a:srgbClr val="151E33"/>
           </a:solidFill>
-          <a:ln w="12700">
-            <a:solidFill>
-              <a:srgbClr val="2A3654"/>
-            </a:solidFill>
-            <a:prstDash val="solid"/>
-          </a:ln>
+          <a:ln/>
           <a:effectLst>
             <a:outerShdw sx="100000" sy="100000" kx="0" ky="0" algn="bl" rotWithShape="0" blurRad="127000" dist="38100" dir="5400000">
               <a:srgbClr val="000000">
@@ -6384,53 +6755,92 @@
       </p:sp>
       <p:sp>
         <p:nvSpPr>
-          <p:cNvPr id="8" name="Text 6"/>
-          <p:cNvSpPr/>
-          <p:nvPr/>
-        </p:nvSpPr>
-        <p:spPr>
-          <a:xfrm>
-            <a:off x="960120" y="2807208"/>
-            <a:ext cx="365760" cy="548640"/>
-          </a:xfrm>
-          <a:prstGeom prst="rect">
-            <a:avLst/>
-          </a:prstGeom>
-          <a:noFill/>
-          <a:ln/>
-        </p:spPr>
-        <p:txBody>
-          <a:bodyPr wrap="square" lIns="0" tIns="0" rIns="0" bIns="0" rtlCol="0" anchor="ctr"/>
-          <a:lstStyle/>
-          <a:p>
-            <a:pPr indent="0" marL="0">
-              <a:buNone/>
-            </a:pPr>
-            <a:r>
-              <a:rPr lang="en-US" sz="1600" dirty="0">
-                <a:solidFill>
-                  <a:srgbClr val="E9B84A"/>
-                </a:solidFill>
-                <a:latin typeface="Calibri" pitchFamily="34" charset="0"/>
-                <a:ea typeface="Calibri" pitchFamily="34" charset="-122"/>
-                <a:cs typeface="Calibri" pitchFamily="34" charset="-120"/>
-              </a:rPr>
-              <a:t>⚑</a:t>
-            </a:r>
-            <a:endParaRPr lang="en-US" sz="1600" dirty="0"/>
-          </a:p>
-        </p:txBody>
-      </p:sp>
-      <p:sp>
-        <p:nvSpPr>
           <p:cNvPr id="9" name="Text 7"/>
           <p:cNvSpPr/>
           <p:nvPr/>
         </p:nvSpPr>
         <p:spPr>
           <a:xfrm>
-            <a:off x="1417320" y="2770632"/>
-            <a:ext cx="9784080" cy="713232"/>
+            <a:off x="4581144" y="1929384"/>
+            <a:ext cx="3063240" cy="411480"/>
+          </a:xfrm>
+          <a:prstGeom prst="rect">
+            <a:avLst/>
+          </a:prstGeom>
+          <a:noFill/>
+          <a:ln/>
+        </p:spPr>
+        <p:txBody>
+          <a:bodyPr wrap="square" lIns="0" tIns="0" rIns="0" bIns="0" rtlCol="0" anchor="ctr"/>
+          <a:lstStyle/>
+          <a:p>
+            <a:pPr indent="0" marL="0">
+              <a:buNone/>
+            </a:pPr>
+            <a:r>
+              <a:rPr lang="en-US" sz="2000" b="1" dirty="0">
+                <a:solidFill>
+                  <a:srgbClr val="3FBF7F"/>
+                </a:solidFill>
+                <a:latin typeface="Calibri" pitchFamily="34" charset="0"/>
+                <a:ea typeface="Calibri" pitchFamily="34" charset="-122"/>
+                <a:cs typeface="Calibri" pitchFamily="34" charset="-120"/>
+              </a:rPr>
+              <a:t>+1.59 mHa</a:t>
+            </a:r>
+            <a:endParaRPr lang="en-US" sz="2000" dirty="0"/>
+          </a:p>
+        </p:txBody>
+      </p:sp>
+      <p:sp>
+        <p:nvSpPr>
+          <p:cNvPr id="10" name="Text 8"/>
+          <p:cNvSpPr/>
+          <p:nvPr/>
+        </p:nvSpPr>
+        <p:spPr>
+          <a:xfrm>
+            <a:off x="4581144" y="2350008"/>
+            <a:ext cx="3063240" cy="274320"/>
+          </a:xfrm>
+          <a:prstGeom prst="rect">
+            <a:avLst/>
+          </a:prstGeom>
+          <a:noFill/>
+          <a:ln/>
+        </p:spPr>
+        <p:txBody>
+          <a:bodyPr wrap="square" lIns="0" tIns="0" rIns="0" bIns="0" rtlCol="0" anchor="ctr"/>
+          <a:lstStyle/>
+          <a:p>
+            <a:pPr indent="0" marL="0">
+              <a:buNone/>
+            </a:pPr>
+            <a:r>
+              <a:rPr lang="en-US" sz="1300" b="1" dirty="0">
+                <a:solidFill>
+                  <a:srgbClr val="FFFFFF"/>
+                </a:solidFill>
+                <a:latin typeface="Calibri" pitchFamily="34" charset="0"/>
+                <a:ea typeface="Calibri" pitchFamily="34" charset="-122"/>
+                <a:cs typeface="Calibri" pitchFamily="34" charset="-120"/>
+              </a:rPr>
+              <a:t>40q absolute anchor</a:t>
+            </a:r>
+            <a:endParaRPr lang="en-US" sz="1300" dirty="0"/>
+          </a:p>
+        </p:txBody>
+      </p:sp>
+      <p:sp>
+        <p:nvSpPr>
+          <p:cNvPr id="11" name="Text 9"/>
+          <p:cNvSpPr/>
+          <p:nvPr/>
+        </p:nvSpPr>
+        <p:spPr>
+          <a:xfrm>
+            <a:off x="4581144" y="2660904"/>
+            <a:ext cx="3063240" cy="1005840"/>
           </a:xfrm>
           <a:prstGeom prst="rect">
             <a:avLst/>
@@ -6444,50 +6854,45 @@
           <a:p>
             <a:pPr indent="0" marL="0">
               <a:lnSpc>
-                <a:spcPts val="1800"/>
+                <a:spcPts val="1600"/>
               </a:lnSpc>
               <a:buNone/>
             </a:pPr>
             <a:r>
-              <a:rPr lang="en-US" sz="1300" dirty="0">
-                <a:solidFill>
-                  <a:srgbClr val="E8EDF7"/>
-                </a:solidFill>
-                <a:latin typeface="Calibri" pitchFamily="34" charset="0"/>
-                <a:ea typeface="Calibri" pitchFamily="34" charset="-122"/>
-                <a:cs typeface="Calibri" pitchFamily="34" charset="-120"/>
-              </a:rPr>
-              <a:t>The value case is a framework, not a Mitsubishi ROI. The mechanism is measured here; the dollar inputs are placeholders for your pipeline's own numbers.</a:t>
-            </a:r>
-            <a:endParaRPr lang="en-US" sz="1300" dirty="0"/>
-          </a:p>
-        </p:txBody>
-      </p:sp>
-      <p:sp>
-        <p:nvSpPr>
-          <p:cNvPr id="10" name="Shape 8"/>
-          <p:cNvSpPr/>
-          <p:nvPr/>
-        </p:nvSpPr>
-        <p:spPr>
-          <a:xfrm>
-            <a:off x="685800" y="3611880"/>
-            <a:ext cx="10789920" cy="841248"/>
+              <a:rPr lang="en-US" sz="1150" dirty="0">
+                <a:solidFill>
+                  <a:srgbClr val="8B98B4"/>
+                </a:solidFill>
+                <a:latin typeface="Calibri" pitchFamily="34" charset="0"/>
+                <a:ea typeface="Calibri" pitchFamily="34" charset="-122"/>
+                <a:cs typeface="Calibri" pitchFamily="34" charset="-120"/>
+              </a:rPr>
+              <a:t>Independent DMRG extrapolation to the near-exact limit; robust to ±0.05 mHa under a leave-one-out jackknife.</a:t>
+            </a:r>
+            <a:endParaRPr lang="en-US" sz="1150" dirty="0"/>
+          </a:p>
+        </p:txBody>
+      </p:sp>
+      <p:sp>
+        <p:nvSpPr>
+          <p:cNvPr id="12" name="Shape 10"/>
+          <p:cNvSpPr/>
+          <p:nvPr/>
+        </p:nvSpPr>
+        <p:spPr>
+          <a:xfrm>
+            <a:off x="8001000" y="1783080"/>
+            <a:ext cx="3502152" cy="2011680"/>
           </a:xfrm>
           <a:prstGeom prst="roundRect">
             <a:avLst>
-              <a:gd name="adj" fmla="val 8696"/>
+              <a:gd name="adj" fmla="val 3636"/>
             </a:avLst>
           </a:prstGeom>
           <a:solidFill>
-            <a:srgbClr val="1B2540"/>
+            <a:srgbClr val="151E33"/>
           </a:solidFill>
-          <a:ln w="12700">
-            <a:solidFill>
-              <a:srgbClr val="2A3654"/>
-            </a:solidFill>
-            <a:prstDash val="solid"/>
-          </a:ln>
+          <a:ln/>
           <a:effectLst>
             <a:outerShdw sx="100000" sy="100000" kx="0" ky="0" algn="bl" rotWithShape="0" blurRad="127000" dist="38100" dir="5400000">
               <a:srgbClr val="000000">
@@ -6499,53 +6904,92 @@
       </p:sp>
       <p:sp>
         <p:nvSpPr>
-          <p:cNvPr id="11" name="Text 9"/>
-          <p:cNvSpPr/>
-          <p:nvPr/>
-        </p:nvSpPr>
-        <p:spPr>
-          <a:xfrm>
-            <a:off x="960120" y="3721608"/>
-            <a:ext cx="365760" cy="548640"/>
-          </a:xfrm>
-          <a:prstGeom prst="rect">
-            <a:avLst/>
-          </a:prstGeom>
-          <a:noFill/>
-          <a:ln/>
-        </p:spPr>
-        <p:txBody>
-          <a:bodyPr wrap="square" lIns="0" tIns="0" rIns="0" bIns="0" rtlCol="0" anchor="ctr"/>
-          <a:lstStyle/>
-          <a:p>
-            <a:pPr indent="0" marL="0">
-              <a:buNone/>
-            </a:pPr>
-            <a:r>
-              <a:rPr lang="en-US" sz="1600" dirty="0">
-                <a:solidFill>
-                  <a:srgbClr val="E9B84A"/>
-                </a:solidFill>
-                <a:latin typeface="Calibri" pitchFamily="34" charset="0"/>
-                <a:ea typeface="Calibri" pitchFamily="34" charset="-122"/>
-                <a:cs typeface="Calibri" pitchFamily="34" charset="-120"/>
-              </a:rPr>
-              <a:t>⚑</a:t>
-            </a:r>
-            <a:endParaRPr lang="en-US" sz="1600" dirty="0"/>
-          </a:p>
-        </p:txBody>
-      </p:sp>
-      <p:sp>
-        <p:nvSpPr>
-          <p:cNvPr id="12" name="Text 10"/>
-          <p:cNvSpPr/>
-          <p:nvPr/>
-        </p:nvSpPr>
-        <p:spPr>
-          <a:xfrm>
-            <a:off x="1417320" y="3685032"/>
-            <a:ext cx="9784080" cy="713232"/>
+          <p:cNvPr id="13" name="Text 11"/>
+          <p:cNvSpPr/>
+          <p:nvPr/>
+        </p:nvSpPr>
+        <p:spPr>
+          <a:xfrm>
+            <a:off x="8238744" y="1929384"/>
+            <a:ext cx="3063240" cy="411480"/>
+          </a:xfrm>
+          <a:prstGeom prst="rect">
+            <a:avLst/>
+          </a:prstGeom>
+          <a:noFill/>
+          <a:ln/>
+        </p:spPr>
+        <p:txBody>
+          <a:bodyPr wrap="square" lIns="0" tIns="0" rIns="0" bIns="0" rtlCol="0" anchor="ctr"/>
+          <a:lstStyle/>
+          <a:p>
+            <a:pPr indent="0" marL="0">
+              <a:buNone/>
+            </a:pPr>
+            <a:r>
+              <a:rPr lang="en-US" sz="2000" b="1" dirty="0">
+                <a:solidFill>
+                  <a:srgbClr val="9A8CFF"/>
+                </a:solidFill>
+                <a:latin typeface="Calibri" pitchFamily="34" charset="0"/>
+                <a:ea typeface="Calibri" pitchFamily="34" charset="-122"/>
+                <a:cs typeface="Calibri" pitchFamily="34" charset="-120"/>
+              </a:rPr>
+              <a:t>−3.784 / −0.399</a:t>
+            </a:r>
+            <a:endParaRPr lang="en-US" sz="2000" dirty="0"/>
+          </a:p>
+        </p:txBody>
+      </p:sp>
+      <p:sp>
+        <p:nvSpPr>
+          <p:cNvPr id="14" name="Text 12"/>
+          <p:cNvSpPr/>
+          <p:nvPr/>
+        </p:nvSpPr>
+        <p:spPr>
+          <a:xfrm>
+            <a:off x="8238744" y="2350008"/>
+            <a:ext cx="3063240" cy="274320"/>
+          </a:xfrm>
+          <a:prstGeom prst="rect">
+            <a:avLst/>
+          </a:prstGeom>
+          <a:noFill/>
+          <a:ln/>
+        </p:spPr>
+        <p:txBody>
+          <a:bodyPr wrap="square" lIns="0" tIns="0" rIns="0" bIns="0" rtlCol="0" anchor="ctr"/>
+          <a:lstStyle/>
+          <a:p>
+            <a:pPr indent="0" marL="0">
+              <a:buNone/>
+            </a:pPr>
+            <a:r>
+              <a:rPr lang="en-US" sz="1300" b="1" dirty="0">
+                <a:solidFill>
+                  <a:srgbClr val="FFFFFF"/>
+                </a:solidFill>
+                <a:latin typeface="Calibri" pitchFamily="34" charset="0"/>
+                <a:ea typeface="Calibri" pitchFamily="34" charset="-122"/>
+                <a:cs typeface="Calibri" pitchFamily="34" charset="-120"/>
+              </a:rPr>
+              <a:t>38q reference corrections</a:t>
+            </a:r>
+            <a:endParaRPr lang="en-US" sz="1300" dirty="0"/>
+          </a:p>
+        </p:txBody>
+      </p:sp>
+      <p:sp>
+        <p:nvSpPr>
+          <p:cNvPr id="15" name="Text 13"/>
+          <p:cNvSpPr/>
+          <p:nvPr/>
+        </p:nvSpPr>
+        <p:spPr>
+          <a:xfrm>
+            <a:off x="8238744" y="2660904"/>
+            <a:ext cx="3063240" cy="1005840"/>
           </a:xfrm>
           <a:prstGeom prst="rect">
             <a:avLst/>
@@ -6559,50 +7003,45 @@
           <a:p>
             <a:pPr indent="0" marL="0">
               <a:lnSpc>
-                <a:spcPts val="1800"/>
+                <a:spcPts val="1600"/>
               </a:lnSpc>
               <a:buNone/>
             </a:pPr>
             <a:r>
-              <a:rPr lang="en-US" sz="1300" dirty="0">
-                <a:solidFill>
-                  <a:srgbClr val="E8EDF7"/>
-                </a:solidFill>
-                <a:latin typeface="Calibri" pitchFamily="34" charset="0"/>
-                <a:ea typeface="Calibri" pitchFamily="34" charset="-122"/>
-                <a:cs typeface="Calibri" pitchFamily="34" charset="-120"/>
-              </a:rPr>
-              <a:t>Large-ladder results beyond 20q use a determinant-space proxy for the measurement step — validated against real circuit-sampled shots at 12 / 16 / 20 qubits.</a:t>
-            </a:r>
-            <a:endParaRPr lang="en-US" sz="1300" dirty="0"/>
-          </a:p>
-        </p:txBody>
-      </p:sp>
-      <p:sp>
-        <p:nvSpPr>
-          <p:cNvPr id="13" name="Shape 11"/>
-          <p:cNvSpPr/>
-          <p:nvPr/>
-        </p:nvSpPr>
-        <p:spPr>
-          <a:xfrm>
-            <a:off x="685800" y="4526280"/>
-            <a:ext cx="10789920" cy="841248"/>
+              <a:rPr lang="en-US" sz="1150" dirty="0">
+                <a:solidFill>
+                  <a:srgbClr val="8B98B4"/>
+                </a:solidFill>
+                <a:latin typeface="Calibri" pitchFamily="34" charset="0"/>
+                <a:ea typeface="Calibri" pitchFamily="34" charset="-122"/>
+                <a:cs typeface="Calibri" pitchFamily="34" charset="-120"/>
+              </a:rPr>
+              <a:t>CrO and the real Sn₂O₂ EUV motif land below their same-CAS DMRG references — mechanism confirmed at three χ.</a:t>
+            </a:r>
+            <a:endParaRPr lang="en-US" sz="1150" dirty="0"/>
+          </a:p>
+        </p:txBody>
+      </p:sp>
+      <p:sp>
+        <p:nvSpPr>
+          <p:cNvPr id="16" name="Shape 14"/>
+          <p:cNvSpPr/>
+          <p:nvPr/>
+        </p:nvSpPr>
+        <p:spPr>
+          <a:xfrm>
+            <a:off x="685800" y="3977640"/>
+            <a:ext cx="3502152" cy="2011680"/>
           </a:xfrm>
           <a:prstGeom prst="roundRect">
             <a:avLst>
-              <a:gd name="adj" fmla="val 8696"/>
+              <a:gd name="adj" fmla="val 3636"/>
             </a:avLst>
           </a:prstGeom>
           <a:solidFill>
-            <a:srgbClr val="1B2540"/>
+            <a:srgbClr val="151E33"/>
           </a:solidFill>
-          <a:ln w="12700">
-            <a:solidFill>
-              <a:srgbClr val="2A3654"/>
-            </a:solidFill>
-            <a:prstDash val="solid"/>
-          </a:ln>
+          <a:ln/>
           <a:effectLst>
             <a:outerShdw sx="100000" sy="100000" kx="0" ky="0" algn="bl" rotWithShape="0" blurRad="127000" dist="38100" dir="5400000">
               <a:srgbClr val="000000">
@@ -6614,53 +7053,92 @@
       </p:sp>
       <p:sp>
         <p:nvSpPr>
-          <p:cNvPr id="14" name="Text 12"/>
-          <p:cNvSpPr/>
-          <p:nvPr/>
-        </p:nvSpPr>
-        <p:spPr>
-          <a:xfrm>
-            <a:off x="960120" y="4636008"/>
-            <a:ext cx="365760" cy="548640"/>
-          </a:xfrm>
-          <a:prstGeom prst="rect">
-            <a:avLst/>
-          </a:prstGeom>
-          <a:noFill/>
-          <a:ln/>
-        </p:spPr>
-        <p:txBody>
-          <a:bodyPr wrap="square" lIns="0" tIns="0" rIns="0" bIns="0" rtlCol="0" anchor="ctr"/>
-          <a:lstStyle/>
-          <a:p>
-            <a:pPr indent="0" marL="0">
-              <a:buNone/>
-            </a:pPr>
-            <a:r>
-              <a:rPr lang="en-US" sz="1600" dirty="0">
-                <a:solidFill>
-                  <a:srgbClr val="E9B84A"/>
-                </a:solidFill>
-                <a:latin typeface="Calibri" pitchFamily="34" charset="0"/>
-                <a:ea typeface="Calibri" pitchFamily="34" charset="-122"/>
-                <a:cs typeface="Calibri" pitchFamily="34" charset="-120"/>
-              </a:rPr>
-              <a:t>⚑</a:t>
-            </a:r>
-            <a:endParaRPr lang="en-US" sz="1600" dirty="0"/>
-          </a:p>
-        </p:txBody>
-      </p:sp>
-      <p:sp>
-        <p:nvSpPr>
-          <p:cNvPr id="15" name="Text 13"/>
-          <p:cNvSpPr/>
-          <p:nvPr/>
-        </p:nvSpPr>
-        <p:spPr>
-          <a:xfrm>
-            <a:off x="1417320" y="4599432"/>
-            <a:ext cx="9784080" cy="713232"/>
+          <p:cNvPr id="17" name="Text 15"/>
+          <p:cNvSpPr/>
+          <p:nvPr/>
+        </p:nvSpPr>
+        <p:spPr>
+          <a:xfrm>
+            <a:off x="923544" y="4123944"/>
+            <a:ext cx="3063240" cy="411480"/>
+          </a:xfrm>
+          <a:prstGeom prst="rect">
+            <a:avLst/>
+          </a:prstGeom>
+          <a:noFill/>
+          <a:ln/>
+        </p:spPr>
+        <p:txBody>
+          <a:bodyPr wrap="square" lIns="0" tIns="0" rIns="0" bIns="0" rtlCol="0" anchor="ctr"/>
+          <a:lstStyle/>
+          <a:p>
+            <a:pPr indent="0" marL="0">
+              <a:buNone/>
+            </a:pPr>
+            <a:r>
+              <a:rPr lang="en-US" sz="2000" b="1" dirty="0">
+                <a:solidFill>
+                  <a:srgbClr val="3FBF7F"/>
+                </a:solidFill>
+                <a:latin typeface="Calibri" pitchFamily="34" charset="0"/>
+                <a:ea typeface="Calibri" pitchFamily="34" charset="-122"/>
+                <a:cs typeface="Calibri" pitchFamily="34" charset="-120"/>
+              </a:rPr>
+              <a:t>0.038 / 0.197 mHa</a:t>
+            </a:r>
+            <a:endParaRPr lang="en-US" sz="2000" dirty="0"/>
+          </a:p>
+        </p:txBody>
+      </p:sp>
+      <p:sp>
+        <p:nvSpPr>
+          <p:cNvPr id="18" name="Text 16"/>
+          <p:cNvSpPr/>
+          <p:nvPr/>
+        </p:nvSpPr>
+        <p:spPr>
+          <a:xfrm>
+            <a:off x="923544" y="4544568"/>
+            <a:ext cx="3063240" cy="274320"/>
+          </a:xfrm>
+          <a:prstGeom prst="rect">
+            <a:avLst/>
+          </a:prstGeom>
+          <a:noFill/>
+          <a:ln/>
+        </p:spPr>
+        <p:txBody>
+          <a:bodyPr wrap="square" lIns="0" tIns="0" rIns="0" bIns="0" rtlCol="0" anchor="ctr"/>
+          <a:lstStyle/>
+          <a:p>
+            <a:pPr indent="0" marL="0">
+              <a:buNone/>
+            </a:pPr>
+            <a:r>
+              <a:rPr lang="en-US" sz="1300" b="1" dirty="0">
+                <a:solidFill>
+                  <a:srgbClr val="FFFFFF"/>
+                </a:solidFill>
+                <a:latin typeface="Calibri" pitchFamily="34" charset="0"/>
+                <a:ea typeface="Calibri" pitchFamily="34" charset="-122"/>
+                <a:cs typeface="Calibri" pitchFamily="34" charset="-120"/>
+              </a:rPr>
+              <a:t>Open-shell oxides (20q)</a:t>
+            </a:r>
+            <a:endParaRPr lang="en-US" sz="1300" dirty="0"/>
+          </a:p>
+        </p:txBody>
+      </p:sp>
+      <p:sp>
+        <p:nvSpPr>
+          <p:cNvPr id="19" name="Text 17"/>
+          <p:cNvSpPr/>
+          <p:nvPr/>
+        </p:nvSpPr>
+        <p:spPr>
+          <a:xfrm>
+            <a:off x="923544" y="4855464"/>
+            <a:ext cx="3063240" cy="1005840"/>
           </a:xfrm>
           <a:prstGeom prst="rect">
             <a:avLst/>
@@ -6674,50 +7152,45 @@
           <a:p>
             <a:pPr indent="0" marL="0">
               <a:lnSpc>
-                <a:spcPts val="1800"/>
+                <a:spcPts val="1600"/>
               </a:lnSpc>
               <a:buNone/>
             </a:pPr>
             <a:r>
-              <a:rPr lang="en-US" sz="1300" dirty="0">
-                <a:solidFill>
-                  <a:srgbClr val="E8EDF7"/>
-                </a:solidFill>
-                <a:latin typeface="Calibri" pitchFamily="34" charset="0"/>
-                <a:ea typeface="Calibri" pitchFamily="34" charset="-122"/>
-                <a:cs typeface="Calibri" pitchFamily="34" charset="-120"/>
-              </a:rPr>
-              <a:t>The 40q absolute result sits AT the chemical-accuracy threshold, not comfortably inside it. The full 40q tensor-network growth run remains owed.</a:t>
-            </a:r>
-            <a:endParaRPr lang="en-US" sz="1300" dirty="0"/>
-          </a:p>
-        </p:txBody>
-      </p:sp>
-      <p:sp>
-        <p:nvSpPr>
-          <p:cNvPr id="16" name="Shape 14"/>
-          <p:cNvSpPr/>
-          <p:nvPr/>
-        </p:nvSpPr>
-        <p:spPr>
-          <a:xfrm>
-            <a:off x="685800" y="5440680"/>
-            <a:ext cx="10789920" cy="841248"/>
+              <a:rPr lang="en-US" sz="1150" dirty="0">
+                <a:solidFill>
+                  <a:srgbClr val="8B98B4"/>
+                </a:solidFill>
+                <a:latin typeface="Calibri" pitchFamily="34" charset="0"/>
+                <a:ea typeface="Calibri" pitchFamily="34" charset="-122"/>
+                <a:cs typeface="Calibri" pitchFamily="34" charset="-120"/>
+              </a:rPr>
+              <a:t>CrO ⁵Π and NiO ³Σ⁻ to chemical accuracy against exact diagonalization.</a:t>
+            </a:r>
+            <a:endParaRPr lang="en-US" sz="1150" dirty="0"/>
+          </a:p>
+        </p:txBody>
+      </p:sp>
+      <p:sp>
+        <p:nvSpPr>
+          <p:cNvPr id="20" name="Shape 18"/>
+          <p:cNvSpPr/>
+          <p:nvPr/>
+        </p:nvSpPr>
+        <p:spPr>
+          <a:xfrm>
+            <a:off x="4343400" y="3977640"/>
+            <a:ext cx="3502152" cy="2011680"/>
           </a:xfrm>
           <a:prstGeom prst="roundRect">
             <a:avLst>
-              <a:gd name="adj" fmla="val 8696"/>
+              <a:gd name="adj" fmla="val 3636"/>
             </a:avLst>
           </a:prstGeom>
           <a:solidFill>
-            <a:srgbClr val="1B2540"/>
+            <a:srgbClr val="151E33"/>
           </a:solidFill>
-          <a:ln w="12700">
-            <a:solidFill>
-              <a:srgbClr val="2A3654"/>
-            </a:solidFill>
-            <a:prstDash val="solid"/>
-          </a:ln>
+          <a:ln/>
           <a:effectLst>
             <a:outerShdw sx="100000" sy="100000" kx="0" ky="0" algn="bl" rotWithShape="0" blurRad="127000" dist="38100" dir="5400000">
               <a:srgbClr val="000000">
@@ -6729,30 +7202,179 @@
       </p:sp>
       <p:sp>
         <p:nvSpPr>
-          <p:cNvPr id="17" name="Text 15"/>
-          <p:cNvSpPr/>
-          <p:nvPr/>
-        </p:nvSpPr>
-        <p:spPr>
-          <a:xfrm>
-            <a:off x="960120" y="5550408"/>
-            <a:ext cx="365760" cy="548640"/>
-          </a:xfrm>
-          <a:prstGeom prst="rect">
-            <a:avLst/>
-          </a:prstGeom>
-          <a:noFill/>
-          <a:ln/>
-        </p:spPr>
-        <p:txBody>
-          <a:bodyPr wrap="square" lIns="0" tIns="0" rIns="0" bIns="0" rtlCol="0" anchor="ctr"/>
-          <a:lstStyle/>
-          <a:p>
-            <a:pPr indent="0" marL="0">
-              <a:buNone/>
-            </a:pPr>
-            <a:r>
-              <a:rPr lang="en-US" sz="1600" dirty="0">
+          <p:cNvPr id="21" name="Text 19"/>
+          <p:cNvSpPr/>
+          <p:nvPr/>
+        </p:nvSpPr>
+        <p:spPr>
+          <a:xfrm>
+            <a:off x="4581144" y="4123944"/>
+            <a:ext cx="3063240" cy="411480"/>
+          </a:xfrm>
+          <a:prstGeom prst="rect">
+            <a:avLst/>
+          </a:prstGeom>
+          <a:noFill/>
+          <a:ln/>
+        </p:spPr>
+        <p:txBody>
+          <a:bodyPr wrap="square" lIns="0" tIns="0" rIns="0" bIns="0" rtlCol="0" anchor="ctr"/>
+          <a:lstStyle/>
+          <a:p>
+            <a:pPr indent="0" marL="0">
+              <a:buNone/>
+            </a:pPr>
+            <a:r>
+              <a:rPr lang="en-US" sz="2000" b="1" dirty="0">
+                <a:solidFill>
+                  <a:srgbClr val="4FD1E0"/>
+                </a:solidFill>
+                <a:latin typeface="Calibri" pitchFamily="34" charset="0"/>
+                <a:ea typeface="Calibri" pitchFamily="34" charset="-122"/>
+                <a:cs typeface="Calibri" pitchFamily="34" charset="-120"/>
+              </a:rPr>
+              <a:t>real QPU</a:t>
+            </a:r>
+            <a:endParaRPr lang="en-US" sz="2000" dirty="0"/>
+          </a:p>
+        </p:txBody>
+      </p:sp>
+      <p:sp>
+        <p:nvSpPr>
+          <p:cNvPr id="22" name="Text 20"/>
+          <p:cNvSpPr/>
+          <p:nvPr/>
+        </p:nvSpPr>
+        <p:spPr>
+          <a:xfrm>
+            <a:off x="4581144" y="4544568"/>
+            <a:ext cx="3063240" cy="274320"/>
+          </a:xfrm>
+          <a:prstGeom prst="rect">
+            <a:avLst/>
+          </a:prstGeom>
+          <a:noFill/>
+          <a:ln/>
+        </p:spPr>
+        <p:txBody>
+          <a:bodyPr wrap="square" lIns="0" tIns="0" rIns="0" bIns="0" rtlCol="0" anchor="ctr"/>
+          <a:lstStyle/>
+          <a:p>
+            <a:pPr indent="0" marL="0">
+              <a:buNone/>
+            </a:pPr>
+            <a:r>
+              <a:rPr lang="en-US" sz="1300" b="1" dirty="0">
+                <a:solidFill>
+                  <a:srgbClr val="FFFFFF"/>
+                </a:solidFill>
+                <a:latin typeface="Calibri" pitchFamily="34" charset="0"/>
+                <a:ea typeface="Calibri" pitchFamily="34" charset="-122"/>
+                <a:cs typeface="Calibri" pitchFamily="34" charset="-120"/>
+              </a:rPr>
+              <a:t>Trapped-ion silicon</a:t>
+            </a:r>
+            <a:endParaRPr lang="en-US" sz="1300" dirty="0"/>
+          </a:p>
+        </p:txBody>
+      </p:sp>
+      <p:sp>
+        <p:nvSpPr>
+          <p:cNvPr id="23" name="Text 21"/>
+          <p:cNvSpPr/>
+          <p:nvPr/>
+        </p:nvSpPr>
+        <p:spPr>
+          <a:xfrm>
+            <a:off x="4581144" y="4855464"/>
+            <a:ext cx="3063240" cy="1005840"/>
+          </a:xfrm>
+          <a:prstGeom prst="rect">
+            <a:avLst/>
+          </a:prstGeom>
+          <a:noFill/>
+          <a:ln/>
+        </p:spPr>
+        <p:txBody>
+          <a:bodyPr wrap="square" lIns="0" tIns="0" rIns="0" bIns="0" rtlCol="0" anchor="ctr"/>
+          <a:lstStyle/>
+          <a:p>
+            <a:pPr indent="0" marL="0">
+              <a:lnSpc>
+                <a:spcPts val="1600"/>
+              </a:lnSpc>
+              <a:buNone/>
+            </a:pPr>
+            <a:r>
+              <a:rPr lang="en-US" sz="1150" dirty="0">
+                <a:solidFill>
+                  <a:srgbClr val="8B98B4"/>
+                </a:solidFill>
+                <a:latin typeface="Calibri" pitchFamily="34" charset="0"/>
+                <a:ea typeface="Calibri" pitchFamily="34" charset="-122"/>
+                <a:cs typeface="Calibri" pitchFamily="34" charset="-120"/>
+              </a:rPr>
+              <a:t>AQT ibex-q1 decoded; device-sampled determinants seed a QSCI growth that recovers exact FCI.</a:t>
+            </a:r>
+            <a:endParaRPr lang="en-US" sz="1150" dirty="0"/>
+          </a:p>
+        </p:txBody>
+      </p:sp>
+      <p:sp>
+        <p:nvSpPr>
+          <p:cNvPr id="24" name="Shape 22"/>
+          <p:cNvSpPr/>
+          <p:nvPr/>
+        </p:nvSpPr>
+        <p:spPr>
+          <a:xfrm>
+            <a:off x="8001000" y="3977640"/>
+            <a:ext cx="3502152" cy="2011680"/>
+          </a:xfrm>
+          <a:prstGeom prst="roundRect">
+            <a:avLst>
+              <a:gd name="adj" fmla="val 3636"/>
+            </a:avLst>
+          </a:prstGeom>
+          <a:solidFill>
+            <a:srgbClr val="151E33"/>
+          </a:solidFill>
+          <a:ln/>
+          <a:effectLst>
+            <a:outerShdw sx="100000" sy="100000" kx="0" ky="0" algn="bl" rotWithShape="0" blurRad="127000" dist="38100" dir="5400000">
+              <a:srgbClr val="000000">
+                <a:alpha val="35000"/>
+              </a:srgbClr>
+            </a:outerShdw>
+          </a:effectLst>
+        </p:spPr>
+      </p:sp>
+      <p:sp>
+        <p:nvSpPr>
+          <p:cNvPr id="25" name="Text 23"/>
+          <p:cNvSpPr/>
+          <p:nvPr/>
+        </p:nvSpPr>
+        <p:spPr>
+          <a:xfrm>
+            <a:off x="8238744" y="4123944"/>
+            <a:ext cx="3063240" cy="411480"/>
+          </a:xfrm>
+          <a:prstGeom prst="rect">
+            <a:avLst/>
+          </a:prstGeom>
+          <a:noFill/>
+          <a:ln/>
+        </p:spPr>
+        <p:txBody>
+          <a:bodyPr wrap="square" lIns="0" tIns="0" rIns="0" bIns="0" rtlCol="0" anchor="ctr"/>
+          <a:lstStyle/>
+          <a:p>
+            <a:pPr indent="0" marL="0">
+              <a:buNone/>
+            </a:pPr>
+            <a:r>
+              <a:rPr lang="en-US" sz="2000" b="1" dirty="0">
                 <a:solidFill>
                   <a:srgbClr val="E9B84A"/>
                 </a:solidFill>
@@ -6760,22 +7382,61 @@
                 <a:ea typeface="Calibri" pitchFamily="34" charset="-122"/>
                 <a:cs typeface="Calibri" pitchFamily="34" charset="-120"/>
               </a:rPr>
-              <a:t>⚑</a:t>
-            </a:r>
-            <a:endParaRPr lang="en-US" sz="1600" dirty="0"/>
-          </a:p>
-        </p:txBody>
-      </p:sp>
-      <p:sp>
-        <p:nvSpPr>
-          <p:cNvPr id="18" name="Text 16"/>
-          <p:cNvSpPr/>
-          <p:nvPr/>
-        </p:nvSpPr>
-        <p:spPr>
-          <a:xfrm>
-            <a:off x="1417320" y="5513832"/>
-            <a:ext cx="9784080" cy="713232"/>
+              <a:t>16 TB → 195 MB</a:t>
+            </a:r>
+            <a:endParaRPr lang="en-US" sz="2000" dirty="0"/>
+          </a:p>
+        </p:txBody>
+      </p:sp>
+      <p:sp>
+        <p:nvSpPr>
+          <p:cNvPr id="26" name="Text 24"/>
+          <p:cNvSpPr/>
+          <p:nvPr/>
+        </p:nvSpPr>
+        <p:spPr>
+          <a:xfrm>
+            <a:off x="8238744" y="4544568"/>
+            <a:ext cx="3063240" cy="274320"/>
+          </a:xfrm>
+          <a:prstGeom prst="rect">
+            <a:avLst/>
+          </a:prstGeom>
+          <a:noFill/>
+          <a:ln/>
+        </p:spPr>
+        <p:txBody>
+          <a:bodyPr wrap="square" lIns="0" tIns="0" rIns="0" bIns="0" rtlCol="0" anchor="ctr"/>
+          <a:lstStyle/>
+          <a:p>
+            <a:pPr indent="0" marL="0">
+              <a:buNone/>
+            </a:pPr>
+            <a:r>
+              <a:rPr lang="en-US" sz="1300" b="1" dirty="0">
+                <a:solidFill>
+                  <a:srgbClr val="FFFFFF"/>
+                </a:solidFill>
+                <a:latin typeface="Calibri" pitchFamily="34" charset="0"/>
+                <a:ea typeface="Calibri" pitchFamily="34" charset="-122"/>
+                <a:cs typeface="Calibri" pitchFamily="34" charset="-120"/>
+              </a:rPr>
+              <a:t>The memory wall removed</a:t>
+            </a:r>
+            <a:endParaRPr lang="en-US" sz="1300" dirty="0"/>
+          </a:p>
+        </p:txBody>
+      </p:sp>
+      <p:sp>
+        <p:nvSpPr>
+          <p:cNvPr id="27" name="Text 25"/>
+          <p:cNvSpPr/>
+          <p:nvPr/>
+        </p:nvSpPr>
+        <p:spPr>
+          <a:xfrm>
+            <a:off x="8238744" y="4855464"/>
+            <a:ext cx="3063240" cy="1005840"/>
           </a:xfrm>
           <a:prstGeom prst="rect">
             <a:avLst/>
@@ -6789,22 +7450,61 @@
           <a:p>
             <a:pPr indent="0" marL="0">
               <a:lnSpc>
-                <a:spcPts val="1800"/>
+                <a:spcPts val="1600"/>
               </a:lnSpc>
               <a:buNone/>
             </a:pPr>
             <a:r>
-              <a:rPr lang="en-US" sz="1300" dirty="0">
-                <a:solidFill>
-                  <a:srgbClr val="E8EDF7"/>
-                </a:solidFill>
-                <a:latin typeface="Calibri" pitchFamily="34" charset="0"/>
-                <a:ea typeface="Calibri" pitchFamily="34" charset="-122"/>
-                <a:cs typeface="Calibri" pitchFamily="34" charset="-120"/>
-              </a:rPr>
-              <a:t>Two decision claims were tested and withdrawn rather than defended. The value story above depends on neither.</a:t>
-            </a:r>
-            <a:endParaRPr lang="en-US" sz="1300" dirty="0"/>
+              <a:rPr lang="en-US" sz="1150" dirty="0">
+                <a:solidFill>
+                  <a:srgbClr val="8B98B4"/>
+                </a:solidFill>
+                <a:latin typeface="Calibri" pitchFamily="34" charset="0"/>
+                <a:ea typeface="Calibri" pitchFamily="34" charset="-122"/>
+                <a:cs typeface="Calibri" pitchFamily="34" charset="-120"/>
+              </a:rPr>
+              <a:t>Tensor-network representation at the measured bond dimension — what makes 40 qubits fit on one GPU.</a:t>
+            </a:r>
+            <a:endParaRPr lang="en-US" sz="1150" dirty="0"/>
+          </a:p>
+        </p:txBody>
+      </p:sp>
+      <p:sp>
+        <p:nvSpPr>
+          <p:cNvPr id="28" name="Text 26"/>
+          <p:cNvSpPr/>
+          <p:nvPr/>
+        </p:nvSpPr>
+        <p:spPr>
+          <a:xfrm>
+            <a:off x="685800" y="6327648"/>
+            <a:ext cx="10789920" cy="320040"/>
+          </a:xfrm>
+          <a:prstGeom prst="rect">
+            <a:avLst/>
+          </a:prstGeom>
+          <a:noFill/>
+          <a:ln/>
+        </p:spPr>
+        <p:txBody>
+          <a:bodyPr wrap="square" lIns="0" tIns="0" rIns="0" bIns="0" rtlCol="0" anchor="ctr"/>
+          <a:lstStyle/>
+          <a:p>
+            <a:pPr indent="0" marL="0">
+              <a:buNone/>
+            </a:pPr>
+            <a:r>
+              <a:rPr lang="en-US" sz="1050" dirty="0">
+                <a:solidFill>
+                  <a:srgbClr val="5D6B8A"/>
+                </a:solidFill>
+                <a:latin typeface="Calibri" pitchFamily="34" charset="0"/>
+                <a:ea typeface="Calibri" pitchFamily="34" charset="-122"/>
+                <a:cs typeface="Calibri" pitchFamily="34" charset="-120"/>
+              </a:rPr>
+              <a:t>Full traceability: docs/claims_ledger.md maps every number → script → evidence file → status.</a:t>
+            </a:r>
+            <a:endParaRPr lang="en-US" sz="1050" dirty="0"/>
           </a:p>
         </p:txBody>
       </p:sp>
@@ -6867,13 +7567,13 @@
             <a:r>
               <a:rPr lang="en-US" sz="1200" b="1" spc="300" kern="0" dirty="0">
                 <a:solidFill>
-                  <a:srgbClr val="4FD1E0"/>
-                </a:solidFill>
-                <a:latin typeface="Calibri" pitchFamily="34" charset="0"/>
-                <a:ea typeface="Calibri" pitchFamily="34" charset="-122"/>
-                <a:cs typeface="Calibri" pitchFamily="34" charset="-120"/>
-              </a:rPr>
-              <a:t>BOTTOM LINE</a:t>
+                  <a:srgbClr val="E9B84A"/>
+                </a:solidFill>
+                <a:latin typeface="Calibri" pitchFamily="34" charset="0"/>
+                <a:ea typeface="Calibri" pitchFamily="34" charset="-122"/>
+                <a:cs typeface="Calibri" pitchFamily="34" charset="-120"/>
+              </a:rPr>
+              <a:t>HONEST LIMITS — NON-NEGOTIABLE</a:t>
             </a:r>
             <a:endParaRPr lang="en-US" sz="1200" dirty="0"/>
           </a:p>
@@ -6904,7 +7604,7 @@
               <a:buNone/>
             </a:pPr>
             <a:r>
-              <a:rPr lang="en-US" sz="3100" b="1" dirty="0">
+              <a:rPr lang="en-US" sz="3300" b="1" dirty="0">
                 <a:solidFill>
                   <a:srgbClr val="FFFFFF"/>
                 </a:solidFill>
@@ -6912,9 +7612,9 @@
                 <a:ea typeface="Cambria" pitchFamily="34" charset="-122"/>
                 <a:cs typeface="Cambria" pitchFamily="34" charset="-120"/>
               </a:rPr>
-              <a:t>Where MATGEN-Q sits in the pipeline</a:t>
-            </a:r>
-            <a:endParaRPr lang="en-US" sz="3100" dirty="0"/>
+              <a:t>What we do not claim</a:t>
+            </a:r>
+            <a:endParaRPr lang="en-US" sz="3300" dirty="0"/>
           </a:p>
         </p:txBody>
       </p:sp>
@@ -6926,18 +7626,23 @@
         </p:nvSpPr>
         <p:spPr>
           <a:xfrm>
-            <a:off x="685800" y="1874520"/>
-            <a:ext cx="2377440" cy="1143000"/>
+            <a:off x="685800" y="1783080"/>
+            <a:ext cx="10789920" cy="841248"/>
           </a:xfrm>
           <a:prstGeom prst="roundRect">
             <a:avLst>
-              <a:gd name="adj" fmla="val 6400"/>
+              <a:gd name="adj" fmla="val 8696"/>
             </a:avLst>
           </a:prstGeom>
           <a:solidFill>
-            <a:srgbClr val="151E33"/>
+            <a:srgbClr val="1B2540"/>
           </a:solidFill>
-          <a:ln/>
+          <a:ln w="12700">
+            <a:solidFill>
+              <a:srgbClr val="2A3654"/>
+            </a:solidFill>
+            <a:prstDash val="solid"/>
+          </a:ln>
           <a:effectLst>
             <a:outerShdw sx="100000" sy="100000" kx="0" ky="0" algn="bl" rotWithShape="0" blurRad="127000" dist="38100" dir="5400000">
               <a:srgbClr val="000000">
@@ -6955,24 +7660,66 @@
         </p:nvSpPr>
         <p:spPr>
           <a:xfrm>
-            <a:off x="822960" y="1874520"/>
-            <a:ext cx="2103120" cy="1143000"/>
-          </a:xfrm>
-          <a:prstGeom prst="rect">
-            <a:avLst/>
-          </a:prstGeom>
-          <a:noFill/>
-          <a:ln/>
-        </p:spPr>
-        <p:txBody>
-          <a:bodyPr wrap="square" lIns="0" tIns="0" rIns="0" bIns="0" rtlCol="0" anchor="ctr"/>
-          <a:lstStyle/>
-          <a:p>
-            <a:pPr algn="ctr" indent="0" marL="0">
-              <a:buNone/>
-            </a:pPr>
-            <a:r>
-              <a:rPr lang="en-US" sz="1350" dirty="0">
+            <a:off x="960120" y="1892808"/>
+            <a:ext cx="365760" cy="548640"/>
+          </a:xfrm>
+          <a:prstGeom prst="rect">
+            <a:avLst/>
+          </a:prstGeom>
+          <a:noFill/>
+          <a:ln/>
+        </p:spPr>
+        <p:txBody>
+          <a:bodyPr wrap="square" lIns="0" tIns="0" rIns="0" bIns="0" rtlCol="0" anchor="ctr"/>
+          <a:lstStyle/>
+          <a:p>
+            <a:pPr indent="0" marL="0">
+              <a:buNone/>
+            </a:pPr>
+            <a:r>
+              <a:rPr lang="en-US" sz="1600" dirty="0">
+                <a:solidFill>
+                  <a:srgbClr val="E9B84A"/>
+                </a:solidFill>
+                <a:latin typeface="Calibri" pitchFamily="34" charset="0"/>
+                <a:ea typeface="Calibri" pitchFamily="34" charset="-122"/>
+                <a:cs typeface="Calibri" pitchFamily="34" charset="-120"/>
+              </a:rPr>
+              <a:t>⚑</a:t>
+            </a:r>
+            <a:endParaRPr lang="en-US" sz="1600" dirty="0"/>
+          </a:p>
+        </p:txBody>
+      </p:sp>
+      <p:sp>
+        <p:nvSpPr>
+          <p:cNvPr id="6" name="Text 4"/>
+          <p:cNvSpPr/>
+          <p:nvPr/>
+        </p:nvSpPr>
+        <p:spPr>
+          <a:xfrm>
+            <a:off x="1417320" y="1856232"/>
+            <a:ext cx="9784080" cy="713232"/>
+          </a:xfrm>
+          <a:prstGeom prst="rect">
+            <a:avLst/>
+          </a:prstGeom>
+          <a:noFill/>
+          <a:ln/>
+        </p:spPr>
+        <p:txBody>
+          <a:bodyPr wrap="square" lIns="0" tIns="0" rIns="0" bIns="0" rtlCol="0" anchor="ctr"/>
+          <a:lstStyle/>
+          <a:p>
+            <a:pPr indent="0" marL="0">
+              <a:lnSpc>
+                <a:spcPts val="1800"/>
+              </a:lnSpc>
+              <a:buNone/>
+            </a:pPr>
+            <a:r>
+              <a:rPr lang="en-US" sz="1300" dirty="0">
                 <a:solidFill>
                   <a:srgbClr val="E8EDF7"/>
                 </a:solidFill>
@@ -6980,48 +7727,9 @@
                 <a:ea typeface="Calibri" pitchFamily="34" charset="-122"/>
                 <a:cs typeface="Calibri" pitchFamily="34" charset="-120"/>
               </a:rPr>
-              <a:t>AI proposes</a:t>
-            </a:r>
-            <a:endParaRPr lang="en-US" sz="1350" dirty="0"/>
-          </a:p>
-        </p:txBody>
-      </p:sp>
-      <p:sp>
-        <p:nvSpPr>
-          <p:cNvPr id="6" name="Text 4"/>
-          <p:cNvSpPr/>
-          <p:nvPr/>
-        </p:nvSpPr>
-        <p:spPr>
-          <a:xfrm>
-            <a:off x="3044952" y="1874520"/>
-            <a:ext cx="274320" cy="1143000"/>
-          </a:xfrm>
-          <a:prstGeom prst="rect">
-            <a:avLst/>
-          </a:prstGeom>
-          <a:noFill/>
-          <a:ln/>
-        </p:spPr>
-        <p:txBody>
-          <a:bodyPr wrap="square" lIns="0" tIns="0" rIns="0" bIns="0" rtlCol="0" anchor="ctr"/>
-          <a:lstStyle/>
-          <a:p>
-            <a:pPr algn="ctr" indent="0" marL="0">
-              <a:buNone/>
-            </a:pPr>
-            <a:r>
-              <a:rPr lang="en-US" sz="1700" dirty="0">
-                <a:solidFill>
-                  <a:srgbClr val="5D6B8A"/>
-                </a:solidFill>
-                <a:latin typeface="Calibri" pitchFamily="34" charset="0"/>
-                <a:ea typeface="Calibri" pitchFamily="34" charset="-122"/>
-                <a:cs typeface="Calibri" pitchFamily="34" charset="-120"/>
-              </a:rPr>
-              <a:t>→</a:t>
-            </a:r>
-            <a:endParaRPr lang="en-US" sz="1700" dirty="0"/>
+              <a:t>No quantum ADVANTAGE at these sizes. At ≤40 qubits classical methods still solve these instances. The value is trust and correctness, not speed — the advantage regime is beyond, which the 40q run targets.</a:t>
+            </a:r>
+            <a:endParaRPr lang="en-US" sz="1300" dirty="0"/>
           </a:p>
         </p:txBody>
       </p:sp>
@@ -7033,18 +7741,23 @@
         </p:nvSpPr>
         <p:spPr>
           <a:xfrm>
-            <a:off x="3264408" y="1874520"/>
-            <a:ext cx="2651760" cy="1143000"/>
+            <a:off x="685800" y="2697480"/>
+            <a:ext cx="10789920" cy="841248"/>
           </a:xfrm>
           <a:prstGeom prst="roundRect">
             <a:avLst>
-              <a:gd name="adj" fmla="val 6400"/>
+              <a:gd name="adj" fmla="val 8696"/>
             </a:avLst>
           </a:prstGeom>
           <a:solidFill>
-            <a:srgbClr val="151E33"/>
+            <a:srgbClr val="1B2540"/>
           </a:solidFill>
-          <a:ln/>
+          <a:ln w="12700">
+            <a:solidFill>
+              <a:srgbClr val="2A3654"/>
+            </a:solidFill>
+            <a:prstDash val="solid"/>
+          </a:ln>
           <a:effectLst>
             <a:outerShdw sx="100000" sy="100000" kx="0" ky="0" algn="bl" rotWithShape="0" blurRad="127000" dist="38100" dir="5400000">
               <a:srgbClr val="000000">
@@ -7062,24 +7775,66 @@
         </p:nvSpPr>
         <p:spPr>
           <a:xfrm>
-            <a:off x="3401568" y="1874520"/>
-            <a:ext cx="2377440" cy="1143000"/>
-          </a:xfrm>
-          <a:prstGeom prst="rect">
-            <a:avLst/>
-          </a:prstGeom>
-          <a:noFill/>
-          <a:ln/>
-        </p:spPr>
-        <p:txBody>
-          <a:bodyPr wrap="square" lIns="0" tIns="0" rIns="0" bIns="0" rtlCol="0" anchor="ctr"/>
-          <a:lstStyle/>
-          <a:p>
-            <a:pPr algn="ctr" indent="0" marL="0">
-              <a:buNone/>
-            </a:pPr>
-            <a:r>
-              <a:rPr lang="en-US" sz="1350" dirty="0">
+            <a:off x="960120" y="2807208"/>
+            <a:ext cx="365760" cy="548640"/>
+          </a:xfrm>
+          <a:prstGeom prst="rect">
+            <a:avLst/>
+          </a:prstGeom>
+          <a:noFill/>
+          <a:ln/>
+        </p:spPr>
+        <p:txBody>
+          <a:bodyPr wrap="square" lIns="0" tIns="0" rIns="0" bIns="0" rtlCol="0" anchor="ctr"/>
+          <a:lstStyle/>
+          <a:p>
+            <a:pPr indent="0" marL="0">
+              <a:buNone/>
+            </a:pPr>
+            <a:r>
+              <a:rPr lang="en-US" sz="1600" dirty="0">
+                <a:solidFill>
+                  <a:srgbClr val="E9B84A"/>
+                </a:solidFill>
+                <a:latin typeface="Calibri" pitchFamily="34" charset="0"/>
+                <a:ea typeface="Calibri" pitchFamily="34" charset="-122"/>
+                <a:cs typeface="Calibri" pitchFamily="34" charset="-120"/>
+              </a:rPr>
+              <a:t>⚑</a:t>
+            </a:r>
+            <a:endParaRPr lang="en-US" sz="1600" dirty="0"/>
+          </a:p>
+        </p:txBody>
+      </p:sp>
+      <p:sp>
+        <p:nvSpPr>
+          <p:cNvPr id="9" name="Text 7"/>
+          <p:cNvSpPr/>
+          <p:nvPr/>
+        </p:nvSpPr>
+        <p:spPr>
+          <a:xfrm>
+            <a:off x="1417320" y="2770632"/>
+            <a:ext cx="9784080" cy="713232"/>
+          </a:xfrm>
+          <a:prstGeom prst="rect">
+            <a:avLst/>
+          </a:prstGeom>
+          <a:noFill/>
+          <a:ln/>
+        </p:spPr>
+        <p:txBody>
+          <a:bodyPr wrap="square" lIns="0" tIns="0" rIns="0" bIns="0" rtlCol="0" anchor="ctr"/>
+          <a:lstStyle/>
+          <a:p>
+            <a:pPr indent="0" marL="0">
+              <a:lnSpc>
+                <a:spcPts val="1800"/>
+              </a:lnSpc>
+              <a:buNone/>
+            </a:pPr>
+            <a:r>
+              <a:rPr lang="en-US" sz="1300" dirty="0">
                 <a:solidFill>
                   <a:srgbClr val="E8EDF7"/>
                 </a:solidFill>
@@ -7087,48 +7842,9 @@
                 <a:ea typeface="Calibri" pitchFamily="34" charset="-122"/>
                 <a:cs typeface="Calibri" pitchFamily="34" charset="-120"/>
               </a:rPr>
-              <a:t>Classical screens</a:t>
-            </a:r>
-            <a:endParaRPr lang="en-US" sz="1350" dirty="0"/>
-          </a:p>
-        </p:txBody>
-      </p:sp>
-      <p:sp>
-        <p:nvSpPr>
-          <p:cNvPr id="9" name="Text 7"/>
-          <p:cNvSpPr/>
-          <p:nvPr/>
-        </p:nvSpPr>
-        <p:spPr>
-          <a:xfrm>
-            <a:off x="5897880" y="1874520"/>
-            <a:ext cx="274320" cy="1143000"/>
-          </a:xfrm>
-          <a:prstGeom prst="rect">
-            <a:avLst/>
-          </a:prstGeom>
-          <a:noFill/>
-          <a:ln/>
-        </p:spPr>
-        <p:txBody>
-          <a:bodyPr wrap="square" lIns="0" tIns="0" rIns="0" bIns="0" rtlCol="0" anchor="ctr"/>
-          <a:lstStyle/>
-          <a:p>
-            <a:pPr algn="ctr" indent="0" marL="0">
-              <a:buNone/>
-            </a:pPr>
-            <a:r>
-              <a:rPr lang="en-US" sz="1700" dirty="0">
-                <a:solidFill>
-                  <a:srgbClr val="5D6B8A"/>
-                </a:solidFill>
-                <a:latin typeface="Calibri" pitchFamily="34" charset="0"/>
-                <a:ea typeface="Calibri" pitchFamily="34" charset="-122"/>
-                <a:cs typeface="Calibri" pitchFamily="34" charset="-120"/>
-              </a:rPr>
-              <a:t>→</a:t>
-            </a:r>
-            <a:endParaRPr lang="en-US" sz="1700" dirty="0"/>
+              <a:t>The value case is a framework, not a Mitsubishi ROI. The mechanism is measured here; the dollar inputs are placeholders for your pipeline's own numbers.</a:t>
+            </a:r>
+            <a:endParaRPr lang="en-US" sz="1300" dirty="0"/>
           </a:p>
         </p:txBody>
       </p:sp>
@@ -7140,18 +7856,23 @@
         </p:nvSpPr>
         <p:spPr>
           <a:xfrm>
-            <a:off x="6117336" y="1874520"/>
-            <a:ext cx="3566160" cy="1143000"/>
+            <a:off x="685800" y="3611880"/>
+            <a:ext cx="10789920" cy="841248"/>
           </a:xfrm>
           <a:prstGeom prst="roundRect">
             <a:avLst>
-              <a:gd name="adj" fmla="val 6400"/>
+              <a:gd name="adj" fmla="val 8696"/>
             </a:avLst>
           </a:prstGeom>
           <a:solidFill>
-            <a:srgbClr val="1E3A52"/>
+            <a:srgbClr val="1B2540"/>
           </a:solidFill>
-          <a:ln/>
+          <a:ln w="12700">
+            <a:solidFill>
+              <a:srgbClr val="2A3654"/>
+            </a:solidFill>
+            <a:prstDash val="solid"/>
+          </a:ln>
           <a:effectLst>
             <a:outerShdw sx="100000" sy="100000" kx="0" ky="0" algn="bl" rotWithShape="0" blurRad="127000" dist="38100" dir="5400000">
               <a:srgbClr val="000000">
@@ -7169,34 +7890,34 @@
         </p:nvSpPr>
         <p:spPr>
           <a:xfrm>
-            <a:off x="6254496" y="1874520"/>
-            <a:ext cx="3291840" cy="1143000"/>
-          </a:xfrm>
-          <a:prstGeom prst="rect">
-            <a:avLst/>
-          </a:prstGeom>
-          <a:noFill/>
-          <a:ln/>
-        </p:spPr>
-        <p:txBody>
-          <a:bodyPr wrap="square" lIns="0" tIns="0" rIns="0" bIns="0" rtlCol="0" anchor="ctr"/>
-          <a:lstStyle/>
-          <a:p>
-            <a:pPr algn="ctr" indent="0" marL="0">
-              <a:buNone/>
-            </a:pPr>
-            <a:r>
-              <a:rPr lang="en-US" sz="1500" b="1" dirty="0">
-                <a:solidFill>
-                  <a:srgbClr val="4FD1E0"/>
-                </a:solidFill>
-                <a:latin typeface="Calibri" pitchFamily="34" charset="0"/>
-                <a:ea typeface="Calibri" pitchFamily="34" charset="-122"/>
-                <a:cs typeface="Calibri" pitchFamily="34" charset="-120"/>
-              </a:rPr>
-              <a:t>MATGEN-Q trust gate</a:t>
-            </a:r>
-            <a:endParaRPr lang="en-US" sz="1500" dirty="0"/>
+            <a:off x="960120" y="3721608"/>
+            <a:ext cx="365760" cy="548640"/>
+          </a:xfrm>
+          <a:prstGeom prst="rect">
+            <a:avLst/>
+          </a:prstGeom>
+          <a:noFill/>
+          <a:ln/>
+        </p:spPr>
+        <p:txBody>
+          <a:bodyPr wrap="square" lIns="0" tIns="0" rIns="0" bIns="0" rtlCol="0" anchor="ctr"/>
+          <a:lstStyle/>
+          <a:p>
+            <a:pPr indent="0" marL="0">
+              <a:buNone/>
+            </a:pPr>
+            <a:r>
+              <a:rPr lang="en-US" sz="1600" dirty="0">
+                <a:solidFill>
+                  <a:srgbClr val="E9B84A"/>
+                </a:solidFill>
+                <a:latin typeface="Calibri" pitchFamily="34" charset="0"/>
+                <a:ea typeface="Calibri" pitchFamily="34" charset="-122"/>
+                <a:cs typeface="Calibri" pitchFamily="34" charset="-120"/>
+              </a:rPr>
+              <a:t>⚑</a:t>
+            </a:r>
+            <a:endParaRPr lang="en-US" sz="1600" dirty="0"/>
           </a:p>
         </p:txBody>
       </p:sp>
@@ -7208,34 +7929,37 @@
         </p:nvSpPr>
         <p:spPr>
           <a:xfrm>
-            <a:off x="9665208" y="1874520"/>
-            <a:ext cx="274320" cy="1143000"/>
-          </a:xfrm>
-          <a:prstGeom prst="rect">
-            <a:avLst/>
-          </a:prstGeom>
-          <a:noFill/>
-          <a:ln/>
-        </p:spPr>
-        <p:txBody>
-          <a:bodyPr wrap="square" lIns="0" tIns="0" rIns="0" bIns="0" rtlCol="0" anchor="ctr"/>
-          <a:lstStyle/>
-          <a:p>
-            <a:pPr algn="ctr" indent="0" marL="0">
-              <a:buNone/>
-            </a:pPr>
-            <a:r>
-              <a:rPr lang="en-US" sz="1700" dirty="0">
-                <a:solidFill>
-                  <a:srgbClr val="5D6B8A"/>
-                </a:solidFill>
-                <a:latin typeface="Calibri" pitchFamily="34" charset="0"/>
-                <a:ea typeface="Calibri" pitchFamily="34" charset="-122"/>
-                <a:cs typeface="Calibri" pitchFamily="34" charset="-120"/>
-              </a:rPr>
-              <a:t>→</a:t>
-            </a:r>
-            <a:endParaRPr lang="en-US" sz="1700" dirty="0"/>
+            <a:off x="1417320" y="3685032"/>
+            <a:ext cx="9784080" cy="713232"/>
+          </a:xfrm>
+          <a:prstGeom prst="rect">
+            <a:avLst/>
+          </a:prstGeom>
+          <a:noFill/>
+          <a:ln/>
+        </p:spPr>
+        <p:txBody>
+          <a:bodyPr wrap="square" lIns="0" tIns="0" rIns="0" bIns="0" rtlCol="0" anchor="ctr"/>
+          <a:lstStyle/>
+          <a:p>
+            <a:pPr indent="0" marL="0">
+              <a:lnSpc>
+                <a:spcPts val="1800"/>
+              </a:lnSpc>
+              <a:buNone/>
+            </a:pPr>
+            <a:r>
+              <a:rPr lang="en-US" sz="1300" dirty="0">
+                <a:solidFill>
+                  <a:srgbClr val="E8EDF7"/>
+                </a:solidFill>
+                <a:latin typeface="Calibri" pitchFamily="34" charset="0"/>
+                <a:ea typeface="Calibri" pitchFamily="34" charset="-122"/>
+                <a:cs typeface="Calibri" pitchFamily="34" charset="-120"/>
+              </a:rPr>
+              <a:t>Large-ladder results beyond 20q use a determinant-space proxy for the measurement step — validated against real circuit-sampled shots at 12 / 16 / 20 qubits.</a:t>
+            </a:r>
+            <a:endParaRPr lang="en-US" sz="1300" dirty="0"/>
           </a:p>
         </p:txBody>
       </p:sp>
@@ -7247,18 +7971,23 @@
         </p:nvSpPr>
         <p:spPr>
           <a:xfrm>
-            <a:off x="9884664" y="1874520"/>
-            <a:ext cx="2194560" cy="1143000"/>
+            <a:off x="685800" y="4526280"/>
+            <a:ext cx="10789920" cy="841248"/>
           </a:xfrm>
           <a:prstGeom prst="roundRect">
             <a:avLst>
-              <a:gd name="adj" fmla="val 6400"/>
+              <a:gd name="adj" fmla="val 8696"/>
             </a:avLst>
           </a:prstGeom>
           <a:solidFill>
-            <a:srgbClr val="151E33"/>
+            <a:srgbClr val="1B2540"/>
           </a:solidFill>
-          <a:ln/>
+          <a:ln w="12700">
+            <a:solidFill>
+              <a:srgbClr val="2A3654"/>
+            </a:solidFill>
+            <a:prstDash val="solid"/>
+          </a:ln>
           <a:effectLst>
             <a:outerShdw sx="100000" sy="100000" kx="0" ky="0" algn="bl" rotWithShape="0" blurRad="127000" dist="38100" dir="5400000">
               <a:srgbClr val="000000">
@@ -7276,24 +8005,66 @@
         </p:nvSpPr>
         <p:spPr>
           <a:xfrm>
-            <a:off x="10021824" y="1874520"/>
-            <a:ext cx="1920240" cy="1143000"/>
-          </a:xfrm>
-          <a:prstGeom prst="rect">
-            <a:avLst/>
-          </a:prstGeom>
-          <a:noFill/>
-          <a:ln/>
-        </p:spPr>
-        <p:txBody>
-          <a:bodyPr wrap="square" lIns="0" tIns="0" rIns="0" bIns="0" rtlCol="0" anchor="ctr"/>
-          <a:lstStyle/>
-          <a:p>
-            <a:pPr algn="ctr" indent="0" marL="0">
-              <a:buNone/>
-            </a:pPr>
-            <a:r>
-              <a:rPr lang="en-US" sz="1350" dirty="0">
+            <a:off x="960120" y="4636008"/>
+            <a:ext cx="365760" cy="548640"/>
+          </a:xfrm>
+          <a:prstGeom prst="rect">
+            <a:avLst/>
+          </a:prstGeom>
+          <a:noFill/>
+          <a:ln/>
+        </p:spPr>
+        <p:txBody>
+          <a:bodyPr wrap="square" lIns="0" tIns="0" rIns="0" bIns="0" rtlCol="0" anchor="ctr"/>
+          <a:lstStyle/>
+          <a:p>
+            <a:pPr indent="0" marL="0">
+              <a:buNone/>
+            </a:pPr>
+            <a:r>
+              <a:rPr lang="en-US" sz="1600" dirty="0">
+                <a:solidFill>
+                  <a:srgbClr val="E9B84A"/>
+                </a:solidFill>
+                <a:latin typeface="Calibri" pitchFamily="34" charset="0"/>
+                <a:ea typeface="Calibri" pitchFamily="34" charset="-122"/>
+                <a:cs typeface="Calibri" pitchFamily="34" charset="-120"/>
+              </a:rPr>
+              <a:t>⚑</a:t>
+            </a:r>
+            <a:endParaRPr lang="en-US" sz="1600" dirty="0"/>
+          </a:p>
+        </p:txBody>
+      </p:sp>
+      <p:sp>
+        <p:nvSpPr>
+          <p:cNvPr id="15" name="Text 13"/>
+          <p:cNvSpPr/>
+          <p:nvPr/>
+        </p:nvSpPr>
+        <p:spPr>
+          <a:xfrm>
+            <a:off x="1417320" y="4599432"/>
+            <a:ext cx="9784080" cy="713232"/>
+          </a:xfrm>
+          <a:prstGeom prst="rect">
+            <a:avLst/>
+          </a:prstGeom>
+          <a:noFill/>
+          <a:ln/>
+        </p:spPr>
+        <p:txBody>
+          <a:bodyPr wrap="square" lIns="0" tIns="0" rIns="0" bIns="0" rtlCol="0" anchor="ctr"/>
+          <a:lstStyle/>
+          <a:p>
+            <a:pPr indent="0" marL="0">
+              <a:lnSpc>
+                <a:spcPts val="1800"/>
+              </a:lnSpc>
+              <a:buNone/>
+            </a:pPr>
+            <a:r>
+              <a:rPr lang="en-US" sz="1300" dirty="0">
                 <a:solidFill>
                   <a:srgbClr val="E8EDF7"/>
                 </a:solidFill>
@@ -7301,48 +8072,9 @@
                 <a:ea typeface="Calibri" pitchFamily="34" charset="-122"/>
                 <a:cs typeface="Calibri" pitchFamily="34" charset="-120"/>
               </a:rPr>
-              <a:t>Synthesize</a:t>
-            </a:r>
-            <a:endParaRPr lang="en-US" sz="1350" dirty="0"/>
-          </a:p>
-        </p:txBody>
-      </p:sp>
-      <p:sp>
-        <p:nvSpPr>
-          <p:cNvPr id="15" name="Text 13"/>
-          <p:cNvSpPr/>
-          <p:nvPr/>
-        </p:nvSpPr>
-        <p:spPr>
-          <a:xfrm>
-            <a:off x="685800" y="3154680"/>
-            <a:ext cx="10789920" cy="365760"/>
-          </a:xfrm>
-          <a:prstGeom prst="rect">
-            <a:avLst/>
-          </a:prstGeom>
-          <a:noFill/>
-          <a:ln/>
-        </p:spPr>
-        <p:txBody>
-          <a:bodyPr wrap="square" lIns="0" tIns="0" rIns="0" bIns="0" rtlCol="0" anchor="ctr"/>
-          <a:lstStyle/>
-          <a:p>
-            <a:pPr indent="0" marL="0">
-              <a:buNone/>
-            </a:pPr>
-            <a:r>
-              <a:rPr lang="en-US" sz="1350" i="1" dirty="0">
-                <a:solidFill>
-                  <a:srgbClr val="8B98B4"/>
-                </a:solidFill>
-                <a:latin typeface="Calibri" pitchFamily="34" charset="0"/>
-                <a:ea typeface="Calibri" pitchFamily="34" charset="-122"/>
-                <a:cs typeface="Calibri" pitchFamily="34" charset="-120"/>
-              </a:rPr>
-              <a:t>Applied only to the strongly-correlated candidates — the subset where the classical screen is unreliable.</a:t>
-            </a:r>
-            <a:endParaRPr lang="en-US" sz="1350" dirty="0"/>
+              <a:t>The 40q absolute result sits AT the chemical-accuracy threshold, not comfortably inside it. The full 40q tensor-network growth run remains owed.</a:t>
+            </a:r>
+            <a:endParaRPr lang="en-US" sz="1300" dirty="0"/>
           </a:p>
         </p:txBody>
       </p:sp>
@@ -7354,18 +8086,23 @@
         </p:nvSpPr>
         <p:spPr>
           <a:xfrm>
-            <a:off x="685800" y="3703320"/>
-            <a:ext cx="10789920" cy="1965960"/>
+            <a:off x="685800" y="5440680"/>
+            <a:ext cx="10789920" cy="841248"/>
           </a:xfrm>
           <a:prstGeom prst="roundRect">
             <a:avLst>
-              <a:gd name="adj" fmla="val 3721"/>
+              <a:gd name="adj" fmla="val 8696"/>
             </a:avLst>
           </a:prstGeom>
           <a:solidFill>
-            <a:srgbClr val="151E33"/>
+            <a:srgbClr val="1B2540"/>
           </a:solidFill>
-          <a:ln/>
+          <a:ln w="12700">
+            <a:solidFill>
+              <a:srgbClr val="2A3654"/>
+            </a:solidFill>
+            <a:prstDash val="solid"/>
+          </a:ln>
           <a:effectLst>
             <a:outerShdw sx="100000" sy="100000" kx="0" ky="0" algn="bl" rotWithShape="0" blurRad="127000" dist="38100" dir="5400000">
               <a:srgbClr val="000000">
@@ -7383,34 +8120,34 @@
         </p:nvSpPr>
         <p:spPr>
           <a:xfrm>
-            <a:off x="1051560" y="3977640"/>
-            <a:ext cx="10058400" cy="502920"/>
-          </a:xfrm>
-          <a:prstGeom prst="rect">
-            <a:avLst/>
-          </a:prstGeom>
-          <a:noFill/>
-          <a:ln/>
-        </p:spPr>
-        <p:txBody>
-          <a:bodyPr wrap="square" lIns="0" tIns="0" rIns="0" bIns="0" rtlCol="0" anchor="ctr"/>
-          <a:lstStyle/>
-          <a:p>
-            <a:pPr indent="0" marL="0">
-              <a:buNone/>
-            </a:pPr>
-            <a:r>
-              <a:rPr lang="en-US" sz="2700" b="1" dirty="0">
-                <a:solidFill>
-                  <a:srgbClr val="FFFFFF"/>
-                </a:solidFill>
-                <a:latin typeface="Cambria" pitchFamily="34" charset="0"/>
-                <a:ea typeface="Cambria" pitchFamily="34" charset="-122"/>
-                <a:cs typeface="Cambria" pitchFamily="34" charset="-120"/>
-              </a:rPr>
-              <a:t>You stop paying for confidently-wrong predictions.</a:t>
-            </a:r>
-            <a:endParaRPr lang="en-US" sz="2700" dirty="0"/>
+            <a:off x="960120" y="5550408"/>
+            <a:ext cx="365760" cy="548640"/>
+          </a:xfrm>
+          <a:prstGeom prst="rect">
+            <a:avLst/>
+          </a:prstGeom>
+          <a:noFill/>
+          <a:ln/>
+        </p:spPr>
+        <p:txBody>
+          <a:bodyPr wrap="square" lIns="0" tIns="0" rIns="0" bIns="0" rtlCol="0" anchor="ctr"/>
+          <a:lstStyle/>
+          <a:p>
+            <a:pPr indent="0" marL="0">
+              <a:buNone/>
+            </a:pPr>
+            <a:r>
+              <a:rPr lang="en-US" sz="1600" dirty="0">
+                <a:solidFill>
+                  <a:srgbClr val="E9B84A"/>
+                </a:solidFill>
+                <a:latin typeface="Calibri" pitchFamily="34" charset="0"/>
+                <a:ea typeface="Calibri" pitchFamily="34" charset="-122"/>
+                <a:cs typeface="Calibri" pitchFamily="34" charset="-120"/>
+              </a:rPr>
+              <a:t>⚑</a:t>
+            </a:r>
+            <a:endParaRPr lang="en-US" sz="1600" dirty="0"/>
           </a:p>
         </p:txBody>
       </p:sp>
@@ -7422,8 +8159,8 @@
         </p:nvSpPr>
         <p:spPr>
           <a:xfrm>
-            <a:off x="1051560" y="4572000"/>
-            <a:ext cx="10058400" cy="1005840"/>
+            <a:off x="1417320" y="5513832"/>
+            <a:ext cx="9784080" cy="713232"/>
           </a:xfrm>
           <a:prstGeom prst="rect">
             <a:avLst/>
@@ -7437,61 +8174,22 @@
           <a:p>
             <a:pPr indent="0" marL="0">
               <a:lnSpc>
-                <a:spcPts val="2100"/>
+                <a:spcPts val="1800"/>
               </a:lnSpc>
               <a:buNone/>
             </a:pPr>
             <a:r>
-              <a:rPr lang="en-US" sz="1400" dirty="0">
-                <a:solidFill>
-                  <a:srgbClr val="8B98B4"/>
-                </a:solidFill>
-                <a:latin typeface="Calibri" pitchFamily="34" charset="0"/>
-                <a:ea typeface="Calibri" pitchFamily="34" charset="-122"/>
-                <a:cs typeface="Calibri" pitchFamily="34" charset="-120"/>
-              </a:rPr>
-              <a:t>The classical gold standard can be confidently wrong on exactly the chemistry that matters, with no warning. MATGEN-Q is variational and self-certifying — it never blindsides you, and it is systematically improvable to the exact answer. Executed to 40 qubits on real hardware, and re-runnable end-to-end in one command.</a:t>
-            </a:r>
-            <a:endParaRPr lang="en-US" sz="1400" dirty="0"/>
-          </a:p>
-        </p:txBody>
-      </p:sp>
-      <p:sp>
-        <p:nvSpPr>
-          <p:cNvPr id="19" name="Text 17"/>
-          <p:cNvSpPr/>
-          <p:nvPr/>
-        </p:nvSpPr>
-        <p:spPr>
-          <a:xfrm>
-            <a:off x="685800" y="6263640"/>
-            <a:ext cx="10789920" cy="320040"/>
-          </a:xfrm>
-          <a:prstGeom prst="rect">
-            <a:avLst/>
-          </a:prstGeom>
-          <a:noFill/>
-          <a:ln/>
-        </p:spPr>
-        <p:txBody>
-          <a:bodyPr wrap="square" lIns="0" tIns="0" rIns="0" bIns="0" rtlCol="0" anchor="ctr"/>
-          <a:lstStyle/>
-          <a:p>
-            <a:pPr indent="0" marL="0">
-              <a:buNone/>
-            </a:pPr>
-            <a:r>
-              <a:rPr lang="en-US" sz="1100" dirty="0">
-                <a:solidFill>
-                  <a:srgbClr val="5D6B8A"/>
-                </a:solidFill>
-                <a:latin typeface="Calibri" pitchFamily="34" charset="0"/>
-                <a:ea typeface="Calibri" pitchFamily="34" charset="-122"/>
-                <a:cs typeface="Calibri" pitchFamily="34" charset="-120"/>
-              </a:rPr>
-              <a:t>Team EIGENNEXUS  ·  MATGEN-Q  ·  GIC 2026 Phase 3</a:t>
-            </a:r>
-            <a:endParaRPr lang="en-US" sz="1100" dirty="0"/>
+              <a:rPr lang="en-US" sz="1300" dirty="0">
+                <a:solidFill>
+                  <a:srgbClr val="E8EDF7"/>
+                </a:solidFill>
+                <a:latin typeface="Calibri" pitchFamily="34" charset="0"/>
+                <a:ea typeface="Calibri" pitchFamily="34" charset="-122"/>
+                <a:cs typeface="Calibri" pitchFamily="34" charset="-120"/>
+              </a:rPr>
+              <a:t>Two decision claims were tested and withdrawn rather than defended. The value story above depends on neither.</a:t>
+            </a:r>
+            <a:endParaRPr lang="en-US" sz="1300" dirty="0"/>
           </a:p>
         </p:txBody>
       </p:sp>

--- a/paper/EIGENNEXUS_MATGENQ_Value_Story.pptx
+++ b/paper/EIGENNEXUS_MATGENQ_Value_Story.pptx
@@ -5870,7 +5870,7 @@
                 <a:ea typeface="Calibri" pitchFamily="34" charset="-122"/>
                 <a:cs typeface="Calibri" pitchFamily="34" charset="-120"/>
               </a:rPr>
-              <a:t>Honest limits: not cheaper (19.1 h vs ~15 min to escalate χ classically) — the value is the trigger, not the compute. n = 2: a pattern worth investigating, not a measured rate. Reported as the pre-registered P4 criterion failing as-measured, because P4 assumed DMRG(χ=400) was truth.</a:t>
+              <a:t>Honest limits: this is the METHOD, not the hardware — at 38q the determinant selection ran classically (the disclosed proxy; device-sampled selection is validated at 20q/28q). Not cheaper (19.1 h vs ~15 min to escalate χ classically) — the value is the trigger, not the compute. n = 2: a pattern, not a measured rate. Reported as the pre-registered P4 criterion failing as-measured.</a:t>
             </a:r>
             <a:endParaRPr lang="en-US" sz="1000" dirty="0"/>
           </a:p>

--- a/paper/EIGENNEXUS_MATGENQ_Value_Story.pptx
+++ b/paper/EIGENNEXUS_MATGENQ_Value_Story.pptx
@@ -15,9 +15,11 @@
     <p:sldId id="263" r:id="rId9"/>
     <p:sldId id="264" r:id="rId10"/>
     <p:sldId id="265" r:id="rId11"/>
+    <p:sldId id="266" r:id="rId12"/>
+    <p:sldId id="267" r:id="rId13"/>
   </p:sldIdLst>
   <p:notesMasterIdLst>
-    <p:notesMasterId r:id="rId12"/>
+    <p:notesMasterId r:id="rId14"/>
   </p:notesMasterIdLst>
   <p:sldSz cx="12161520" cy="6858000"/>
   <p:notesSz cx="6858000" cy="12161520"/>
@@ -623,6 +625,182 @@
             <a:fld id="{F7021451-1387-4CA6-816F-3879F97B5CBC}" type="slidenum">
               <a:rPr lang="en-US"/>
               <a:t>10</a:t>
+            </a:fld>
+            <a:endParaRPr lang="en-US"/>
+          </a:p>
+        </p:txBody>
+      </p:sp>
+    </p:spTree>
+    <p:extLst>
+      <p:ext uri="{BB962C8B-B14F-4D97-AF65-F5344CB8AC3E}">
+        <p14:creationId xmlns:p14="http://schemas.microsoft.com/office/powerpoint/2010/main" val="1024086991"/>
+      </p:ext>
+    </p:extLst>
+  </p:cSld>
+  <p:clrMapOvr>
+    <a:masterClrMapping/>
+  </p:clrMapOvr>
+</p:notes>
+</file>
+
+<file path=ppt/notesSlides/notesSlide11.xml><?xml version="1.0" encoding="utf-8"?>
+<p:notes xmlns:a="http://schemas.openxmlformats.org/drawingml/2006/main" xmlns:r="http://schemas.openxmlformats.org/officeDocument/2006/relationships" xmlns:p="http://schemas.openxmlformats.org/presentationml/2006/main">
+  <p:cSld>
+    <p:spTree>
+      <p:nvGrpSpPr>
+        <p:cNvPr id="1" name=""/>
+        <p:cNvGrpSpPr/>
+        <p:nvPr/>
+      </p:nvGrpSpPr>
+      <p:grpSpPr>
+        <a:xfrm>
+          <a:off x="0" y="0"/>
+          <a:ext cx="0" cy="0"/>
+          <a:chOff x="0" y="0"/>
+          <a:chExt cx="0" cy="0"/>
+        </a:xfrm>
+      </p:grpSpPr>
+      <p:sp>
+        <p:nvSpPr>
+          <p:cNvPr id="2" name="Slide Image Placeholder 1"/>
+          <p:cNvSpPr>
+            <a:spLocks noGrp="1" noRot="1" noChangeAspect="1"/>
+          </p:cNvSpPr>
+          <p:nvPr>
+            <p:ph type="sldImg"/>
+          </p:nvPr>
+        </p:nvSpPr>
+        <p:spPr/>
+      </p:sp>
+      <p:sp>
+        <p:nvSpPr>
+          <p:cNvPr id="3" name="Notes Placeholder 2"/>
+          <p:cNvSpPr>
+            <a:spLocks noGrp="1"/>
+          </p:cNvSpPr>
+          <p:nvPr>
+            <p:ph type="body" idx="1"/>
+          </p:nvPr>
+        </p:nvSpPr>
+        <p:spPr/>
+        <p:txBody>
+          <a:bodyPr/>
+          <a:lstStyle/>
+          <a:p>
+            <a:r>
+              <a:rPr lang="en-US" dirty="0"/>
+              <a:t/>
+            </a:r>
+            <a:endParaRPr lang="en-US" dirty="0"/>
+          </a:p>
+        </p:txBody>
+      </p:sp>
+      <p:sp>
+        <p:nvSpPr>
+          <p:cNvPr id="4" name="Slide Number Placeholder 3"/>
+          <p:cNvSpPr>
+            <a:spLocks noGrp="1"/>
+          </p:cNvSpPr>
+          <p:nvPr>
+            <p:ph type="sldNum" sz="quarter" idx="10"/>
+          </p:nvPr>
+        </p:nvSpPr>
+        <p:spPr/>
+        <p:txBody>
+          <a:bodyPr/>
+          <a:lstStyle/>
+          <a:p>
+            <a:fld id="{F7021451-1387-4CA6-816F-3879F97B5CBC}" type="slidenum">
+              <a:rPr lang="en-US"/>
+              <a:t>11</a:t>
+            </a:fld>
+            <a:endParaRPr lang="en-US"/>
+          </a:p>
+        </p:txBody>
+      </p:sp>
+    </p:spTree>
+    <p:extLst>
+      <p:ext uri="{BB962C8B-B14F-4D97-AF65-F5344CB8AC3E}">
+        <p14:creationId xmlns:p14="http://schemas.microsoft.com/office/powerpoint/2010/main" val="1024086991"/>
+      </p:ext>
+    </p:extLst>
+  </p:cSld>
+  <p:clrMapOvr>
+    <a:masterClrMapping/>
+  </p:clrMapOvr>
+</p:notes>
+</file>
+
+<file path=ppt/notesSlides/notesSlide12.xml><?xml version="1.0" encoding="utf-8"?>
+<p:notes xmlns:a="http://schemas.openxmlformats.org/drawingml/2006/main" xmlns:r="http://schemas.openxmlformats.org/officeDocument/2006/relationships" xmlns:p="http://schemas.openxmlformats.org/presentationml/2006/main">
+  <p:cSld>
+    <p:spTree>
+      <p:nvGrpSpPr>
+        <p:cNvPr id="1" name=""/>
+        <p:cNvGrpSpPr/>
+        <p:nvPr/>
+      </p:nvGrpSpPr>
+      <p:grpSpPr>
+        <a:xfrm>
+          <a:off x="0" y="0"/>
+          <a:ext cx="0" cy="0"/>
+          <a:chOff x="0" y="0"/>
+          <a:chExt cx="0" cy="0"/>
+        </a:xfrm>
+      </p:grpSpPr>
+      <p:sp>
+        <p:nvSpPr>
+          <p:cNvPr id="2" name="Slide Image Placeholder 1"/>
+          <p:cNvSpPr>
+            <a:spLocks noGrp="1" noRot="1" noChangeAspect="1"/>
+          </p:cNvSpPr>
+          <p:nvPr>
+            <p:ph type="sldImg"/>
+          </p:nvPr>
+        </p:nvSpPr>
+        <p:spPr/>
+      </p:sp>
+      <p:sp>
+        <p:nvSpPr>
+          <p:cNvPr id="3" name="Notes Placeholder 2"/>
+          <p:cNvSpPr>
+            <a:spLocks noGrp="1"/>
+          </p:cNvSpPr>
+          <p:nvPr>
+            <p:ph type="body" idx="1"/>
+          </p:nvPr>
+        </p:nvSpPr>
+        <p:spPr/>
+        <p:txBody>
+          <a:bodyPr/>
+          <a:lstStyle/>
+          <a:p>
+            <a:r>
+              <a:rPr lang="en-US" dirty="0"/>
+              <a:t/>
+            </a:r>
+            <a:endParaRPr lang="en-US" dirty="0"/>
+          </a:p>
+        </p:txBody>
+      </p:sp>
+      <p:sp>
+        <p:nvSpPr>
+          <p:cNvPr id="4" name="Slide Number Placeholder 3"/>
+          <p:cNvSpPr>
+            <a:spLocks noGrp="1"/>
+          </p:cNvSpPr>
+          <p:nvPr>
+            <p:ph type="sldNum" sz="quarter" idx="10"/>
+          </p:nvPr>
+        </p:nvSpPr>
+        <p:spPr/>
+        <p:txBody>
+          <a:bodyPr/>
+          <a:lstStyle/>
+          <a:p>
+            <a:fld id="{F7021451-1387-4CA6-816F-3879F97B5CBC}" type="slidenum">
+              <a:rPr lang="en-US"/>
+              <a:t>12</a:t>
             </a:fld>
             <a:endParaRPr lang="en-US"/>
           </a:p>
@@ -2221,6 +2399,1849 @@
                 <a:ea typeface="Calibri" pitchFamily="34" charset="-122"/>
                 <a:cs typeface="Calibri" pitchFamily="34" charset="-120"/>
               </a:rPr>
+              <a:t>EXECUTED — EVERY NUMBER TRACES TO A COMMITTED FILE</a:t>
+            </a:r>
+            <a:endParaRPr lang="en-US" sz="1200" dirty="0"/>
+          </a:p>
+        </p:txBody>
+      </p:sp>
+      <p:sp>
+        <p:nvSpPr>
+          <p:cNvPr id="3" name="Text 1"/>
+          <p:cNvSpPr/>
+          <p:nvPr/>
+        </p:nvSpPr>
+        <p:spPr>
+          <a:xfrm>
+            <a:off x="685800" y="749808"/>
+            <a:ext cx="10789920" cy="914400"/>
+          </a:xfrm>
+          <a:prstGeom prst="rect">
+            <a:avLst/>
+          </a:prstGeom>
+          <a:noFill/>
+          <a:ln/>
+        </p:spPr>
+        <p:txBody>
+          <a:bodyPr wrap="square" lIns="0" tIns="0" rIns="0" bIns="0" rtlCol="0" anchor="ctr"/>
+          <a:lstStyle/>
+          <a:p>
+            <a:pPr indent="0" marL="0">
+              <a:buNone/>
+            </a:pPr>
+            <a:r>
+              <a:rPr lang="en-US" sz="3300" b="1" dirty="0">
+                <a:solidFill>
+                  <a:srgbClr val="FFFFFF"/>
+                </a:solidFill>
+                <a:latin typeface="Cambria" pitchFamily="34" charset="0"/>
+                <a:ea typeface="Cambria" pitchFamily="34" charset="-122"/>
+                <a:cs typeface="Cambria" pitchFamily="34" charset="-120"/>
+              </a:rPr>
+              <a:t>What actually ran</a:t>
+            </a:r>
+            <a:endParaRPr lang="en-US" sz="3300" dirty="0"/>
+          </a:p>
+        </p:txBody>
+      </p:sp>
+      <p:sp>
+        <p:nvSpPr>
+          <p:cNvPr id="4" name="Shape 2"/>
+          <p:cNvSpPr/>
+          <p:nvPr/>
+        </p:nvSpPr>
+        <p:spPr>
+          <a:xfrm>
+            <a:off x="685800" y="1783080"/>
+            <a:ext cx="3502152" cy="2011680"/>
+          </a:xfrm>
+          <a:prstGeom prst="roundRect">
+            <a:avLst>
+              <a:gd name="adj" fmla="val 3636"/>
+            </a:avLst>
+          </a:prstGeom>
+          <a:solidFill>
+            <a:srgbClr val="151E33"/>
+          </a:solidFill>
+          <a:ln/>
+          <a:effectLst>
+            <a:outerShdw sx="100000" sy="100000" kx="0" ky="0" algn="bl" rotWithShape="0" blurRad="127000" dist="38100" dir="5400000">
+              <a:srgbClr val="000000">
+                <a:alpha val="35000"/>
+              </a:srgbClr>
+            </a:outerShdw>
+          </a:effectLst>
+        </p:spPr>
+      </p:sp>
+      <p:sp>
+        <p:nvSpPr>
+          <p:cNvPr id="5" name="Text 3"/>
+          <p:cNvSpPr/>
+          <p:nvPr/>
+        </p:nvSpPr>
+        <p:spPr>
+          <a:xfrm>
+            <a:off x="923544" y="1929384"/>
+            <a:ext cx="3063240" cy="411480"/>
+          </a:xfrm>
+          <a:prstGeom prst="rect">
+            <a:avLst/>
+          </a:prstGeom>
+          <a:noFill/>
+          <a:ln/>
+        </p:spPr>
+        <p:txBody>
+          <a:bodyPr wrap="square" lIns="0" tIns="0" rIns="0" bIns="0" rtlCol="0" anchor="ctr"/>
+          <a:lstStyle/>
+          <a:p>
+            <a:pPr indent="0" marL="0">
+              <a:buNone/>
+            </a:pPr>
+            <a:r>
+              <a:rPr lang="en-US" sz="2000" b="1" dirty="0">
+                <a:solidFill>
+                  <a:srgbClr val="4FD1E0"/>
+                </a:solidFill>
+                <a:latin typeface="Calibri" pitchFamily="34" charset="0"/>
+                <a:ea typeface="Calibri" pitchFamily="34" charset="-122"/>
+                <a:cs typeface="Calibri" pitchFamily="34" charset="-120"/>
+              </a:rPr>
+              <a:t>+1.226 mHa</a:t>
+            </a:r>
+            <a:endParaRPr lang="en-US" sz="2000" dirty="0"/>
+          </a:p>
+        </p:txBody>
+      </p:sp>
+      <p:sp>
+        <p:nvSpPr>
+          <p:cNvPr id="6" name="Text 4"/>
+          <p:cNvSpPr/>
+          <p:nvPr/>
+        </p:nvSpPr>
+        <p:spPr>
+          <a:xfrm>
+            <a:off x="923544" y="2350008"/>
+            <a:ext cx="3063240" cy="274320"/>
+          </a:xfrm>
+          <a:prstGeom prst="rect">
+            <a:avLst/>
+          </a:prstGeom>
+          <a:noFill/>
+          <a:ln/>
+        </p:spPr>
+        <p:txBody>
+          <a:bodyPr wrap="square" lIns="0" tIns="0" rIns="0" bIns="0" rtlCol="0" anchor="ctr"/>
+          <a:lstStyle/>
+          <a:p>
+            <a:pPr indent="0" marL="0">
+              <a:buNone/>
+            </a:pPr>
+            <a:r>
+              <a:rPr lang="en-US" sz="1300" b="1" dirty="0">
+                <a:solidFill>
+                  <a:srgbClr val="FFFFFF"/>
+                </a:solidFill>
+                <a:latin typeface="Calibri" pitchFamily="34" charset="0"/>
+                <a:ea typeface="Calibri" pitchFamily="34" charset="-122"/>
+                <a:cs typeface="Calibri" pitchFamily="34" charset="-120"/>
+              </a:rPr>
+              <a:t>40q flagship on GPU</a:t>
+            </a:r>
+            <a:endParaRPr lang="en-US" sz="1300" dirty="0"/>
+          </a:p>
+        </p:txBody>
+      </p:sp>
+      <p:sp>
+        <p:nvSpPr>
+          <p:cNvPr id="7" name="Text 5"/>
+          <p:cNvSpPr/>
+          <p:nvPr/>
+        </p:nvSpPr>
+        <p:spPr>
+          <a:xfrm>
+            <a:off x="923544" y="2660904"/>
+            <a:ext cx="3063240" cy="1005840"/>
+          </a:xfrm>
+          <a:prstGeom prst="rect">
+            <a:avLst/>
+          </a:prstGeom>
+          <a:noFill/>
+          <a:ln/>
+        </p:spPr>
+        <p:txBody>
+          <a:bodyPr wrap="square" lIns="0" tIns="0" rIns="0" bIns="0" rtlCol="0" anchor="ctr"/>
+          <a:lstStyle/>
+          <a:p>
+            <a:pPr indent="0" marL="0">
+              <a:lnSpc>
+                <a:spcPts val="1600"/>
+              </a:lnSpc>
+              <a:buNone/>
+            </a:pPr>
+            <a:r>
+              <a:rPr lang="en-US" sz="1150" dirty="0">
+                <a:solidFill>
+                  <a:srgbClr val="8B98B4"/>
+                </a:solidFill>
+                <a:latin typeface="Calibri" pitchFamily="34" charset="0"/>
+                <a:ea typeface="Calibri" pitchFamily="34" charset="-122"/>
+                <a:cs typeface="Calibri" pitchFamily="34" charset="-120"/>
+              </a:rPr>
+              <a:t>Chemically accurate vs its frozen DMRG(χ=400) reference at 450,257 determinants — pre-registered criterion met.</a:t>
+            </a:r>
+            <a:endParaRPr lang="en-US" sz="1150" dirty="0"/>
+          </a:p>
+        </p:txBody>
+      </p:sp>
+      <p:sp>
+        <p:nvSpPr>
+          <p:cNvPr id="8" name="Shape 6"/>
+          <p:cNvSpPr/>
+          <p:nvPr/>
+        </p:nvSpPr>
+        <p:spPr>
+          <a:xfrm>
+            <a:off x="4343400" y="1783080"/>
+            <a:ext cx="3502152" cy="2011680"/>
+          </a:xfrm>
+          <a:prstGeom prst="roundRect">
+            <a:avLst>
+              <a:gd name="adj" fmla="val 3636"/>
+            </a:avLst>
+          </a:prstGeom>
+          <a:solidFill>
+            <a:srgbClr val="151E33"/>
+          </a:solidFill>
+          <a:ln/>
+          <a:effectLst>
+            <a:outerShdw sx="100000" sy="100000" kx="0" ky="0" algn="bl" rotWithShape="0" blurRad="127000" dist="38100" dir="5400000">
+              <a:srgbClr val="000000">
+                <a:alpha val="35000"/>
+              </a:srgbClr>
+            </a:outerShdw>
+          </a:effectLst>
+        </p:spPr>
+      </p:sp>
+      <p:sp>
+        <p:nvSpPr>
+          <p:cNvPr id="9" name="Text 7"/>
+          <p:cNvSpPr/>
+          <p:nvPr/>
+        </p:nvSpPr>
+        <p:spPr>
+          <a:xfrm>
+            <a:off x="4581144" y="1929384"/>
+            <a:ext cx="3063240" cy="411480"/>
+          </a:xfrm>
+          <a:prstGeom prst="rect">
+            <a:avLst/>
+          </a:prstGeom>
+          <a:noFill/>
+          <a:ln/>
+        </p:spPr>
+        <p:txBody>
+          <a:bodyPr wrap="square" lIns="0" tIns="0" rIns="0" bIns="0" rtlCol="0" anchor="ctr"/>
+          <a:lstStyle/>
+          <a:p>
+            <a:pPr indent="0" marL="0">
+              <a:buNone/>
+            </a:pPr>
+            <a:r>
+              <a:rPr lang="en-US" sz="2000" b="1" dirty="0">
+                <a:solidFill>
+                  <a:srgbClr val="3FBF7F"/>
+                </a:solidFill>
+                <a:latin typeface="Calibri" pitchFamily="34" charset="0"/>
+                <a:ea typeface="Calibri" pitchFamily="34" charset="-122"/>
+                <a:cs typeface="Calibri" pitchFamily="34" charset="-120"/>
+              </a:rPr>
+              <a:t>+1.59 mHa</a:t>
+            </a:r>
+            <a:endParaRPr lang="en-US" sz="2000" dirty="0"/>
+          </a:p>
+        </p:txBody>
+      </p:sp>
+      <p:sp>
+        <p:nvSpPr>
+          <p:cNvPr id="10" name="Text 8"/>
+          <p:cNvSpPr/>
+          <p:nvPr/>
+        </p:nvSpPr>
+        <p:spPr>
+          <a:xfrm>
+            <a:off x="4581144" y="2350008"/>
+            <a:ext cx="3063240" cy="274320"/>
+          </a:xfrm>
+          <a:prstGeom prst="rect">
+            <a:avLst/>
+          </a:prstGeom>
+          <a:noFill/>
+          <a:ln/>
+        </p:spPr>
+        <p:txBody>
+          <a:bodyPr wrap="square" lIns="0" tIns="0" rIns="0" bIns="0" rtlCol="0" anchor="ctr"/>
+          <a:lstStyle/>
+          <a:p>
+            <a:pPr indent="0" marL="0">
+              <a:buNone/>
+            </a:pPr>
+            <a:r>
+              <a:rPr lang="en-US" sz="1300" b="1" dirty="0">
+                <a:solidFill>
+                  <a:srgbClr val="FFFFFF"/>
+                </a:solidFill>
+                <a:latin typeface="Calibri" pitchFamily="34" charset="0"/>
+                <a:ea typeface="Calibri" pitchFamily="34" charset="-122"/>
+                <a:cs typeface="Calibri" pitchFamily="34" charset="-120"/>
+              </a:rPr>
+              <a:t>40q absolute anchor</a:t>
+            </a:r>
+            <a:endParaRPr lang="en-US" sz="1300" dirty="0"/>
+          </a:p>
+        </p:txBody>
+      </p:sp>
+      <p:sp>
+        <p:nvSpPr>
+          <p:cNvPr id="11" name="Text 9"/>
+          <p:cNvSpPr/>
+          <p:nvPr/>
+        </p:nvSpPr>
+        <p:spPr>
+          <a:xfrm>
+            <a:off x="4581144" y="2660904"/>
+            <a:ext cx="3063240" cy="1005840"/>
+          </a:xfrm>
+          <a:prstGeom prst="rect">
+            <a:avLst/>
+          </a:prstGeom>
+          <a:noFill/>
+          <a:ln/>
+        </p:spPr>
+        <p:txBody>
+          <a:bodyPr wrap="square" lIns="0" tIns="0" rIns="0" bIns="0" rtlCol="0" anchor="ctr"/>
+          <a:lstStyle/>
+          <a:p>
+            <a:pPr indent="0" marL="0">
+              <a:lnSpc>
+                <a:spcPts val="1600"/>
+              </a:lnSpc>
+              <a:buNone/>
+            </a:pPr>
+            <a:r>
+              <a:rPr lang="en-US" sz="1150" dirty="0">
+                <a:solidFill>
+                  <a:srgbClr val="8B98B4"/>
+                </a:solidFill>
+                <a:latin typeface="Calibri" pitchFamily="34" charset="0"/>
+                <a:ea typeface="Calibri" pitchFamily="34" charset="-122"/>
+                <a:cs typeface="Calibri" pitchFamily="34" charset="-120"/>
+              </a:rPr>
+              <a:t>Independent DMRG extrapolation to the near-exact limit; robust to ±0.05 mHa under a leave-one-out jackknife.</a:t>
+            </a:r>
+            <a:endParaRPr lang="en-US" sz="1150" dirty="0"/>
+          </a:p>
+        </p:txBody>
+      </p:sp>
+      <p:sp>
+        <p:nvSpPr>
+          <p:cNvPr id="12" name="Shape 10"/>
+          <p:cNvSpPr/>
+          <p:nvPr/>
+        </p:nvSpPr>
+        <p:spPr>
+          <a:xfrm>
+            <a:off x="8001000" y="1783080"/>
+            <a:ext cx="3502152" cy="2011680"/>
+          </a:xfrm>
+          <a:prstGeom prst="roundRect">
+            <a:avLst>
+              <a:gd name="adj" fmla="val 3636"/>
+            </a:avLst>
+          </a:prstGeom>
+          <a:solidFill>
+            <a:srgbClr val="151E33"/>
+          </a:solidFill>
+          <a:ln/>
+          <a:effectLst>
+            <a:outerShdw sx="100000" sy="100000" kx="0" ky="0" algn="bl" rotWithShape="0" blurRad="127000" dist="38100" dir="5400000">
+              <a:srgbClr val="000000">
+                <a:alpha val="35000"/>
+              </a:srgbClr>
+            </a:outerShdw>
+          </a:effectLst>
+        </p:spPr>
+      </p:sp>
+      <p:sp>
+        <p:nvSpPr>
+          <p:cNvPr id="13" name="Text 11"/>
+          <p:cNvSpPr/>
+          <p:nvPr/>
+        </p:nvSpPr>
+        <p:spPr>
+          <a:xfrm>
+            <a:off x="8238744" y="1929384"/>
+            <a:ext cx="3063240" cy="411480"/>
+          </a:xfrm>
+          <a:prstGeom prst="rect">
+            <a:avLst/>
+          </a:prstGeom>
+          <a:noFill/>
+          <a:ln/>
+        </p:spPr>
+        <p:txBody>
+          <a:bodyPr wrap="square" lIns="0" tIns="0" rIns="0" bIns="0" rtlCol="0" anchor="ctr"/>
+          <a:lstStyle/>
+          <a:p>
+            <a:pPr indent="0" marL="0">
+              <a:buNone/>
+            </a:pPr>
+            <a:r>
+              <a:rPr lang="en-US" sz="2000" b="1" dirty="0">
+                <a:solidFill>
+                  <a:srgbClr val="9A8CFF"/>
+                </a:solidFill>
+                <a:latin typeface="Calibri" pitchFamily="34" charset="0"/>
+                <a:ea typeface="Calibri" pitchFamily="34" charset="-122"/>
+                <a:cs typeface="Calibri" pitchFamily="34" charset="-120"/>
+              </a:rPr>
+              <a:t>−3.784 / −0.399</a:t>
+            </a:r>
+            <a:endParaRPr lang="en-US" sz="2000" dirty="0"/>
+          </a:p>
+        </p:txBody>
+      </p:sp>
+      <p:sp>
+        <p:nvSpPr>
+          <p:cNvPr id="14" name="Text 12"/>
+          <p:cNvSpPr/>
+          <p:nvPr/>
+        </p:nvSpPr>
+        <p:spPr>
+          <a:xfrm>
+            <a:off x="8238744" y="2350008"/>
+            <a:ext cx="3063240" cy="274320"/>
+          </a:xfrm>
+          <a:prstGeom prst="rect">
+            <a:avLst/>
+          </a:prstGeom>
+          <a:noFill/>
+          <a:ln/>
+        </p:spPr>
+        <p:txBody>
+          <a:bodyPr wrap="square" lIns="0" tIns="0" rIns="0" bIns="0" rtlCol="0" anchor="ctr"/>
+          <a:lstStyle/>
+          <a:p>
+            <a:pPr indent="0" marL="0">
+              <a:buNone/>
+            </a:pPr>
+            <a:r>
+              <a:rPr lang="en-US" sz="1300" b="1" dirty="0">
+                <a:solidFill>
+                  <a:srgbClr val="FFFFFF"/>
+                </a:solidFill>
+                <a:latin typeface="Calibri" pitchFamily="34" charset="0"/>
+                <a:ea typeface="Calibri" pitchFamily="34" charset="-122"/>
+                <a:cs typeface="Calibri" pitchFamily="34" charset="-120"/>
+              </a:rPr>
+              <a:t>38q reference corrections</a:t>
+            </a:r>
+            <a:endParaRPr lang="en-US" sz="1300" dirty="0"/>
+          </a:p>
+        </p:txBody>
+      </p:sp>
+      <p:sp>
+        <p:nvSpPr>
+          <p:cNvPr id="15" name="Text 13"/>
+          <p:cNvSpPr/>
+          <p:nvPr/>
+        </p:nvSpPr>
+        <p:spPr>
+          <a:xfrm>
+            <a:off x="8238744" y="2660904"/>
+            <a:ext cx="3063240" cy="1005840"/>
+          </a:xfrm>
+          <a:prstGeom prst="rect">
+            <a:avLst/>
+          </a:prstGeom>
+          <a:noFill/>
+          <a:ln/>
+        </p:spPr>
+        <p:txBody>
+          <a:bodyPr wrap="square" lIns="0" tIns="0" rIns="0" bIns="0" rtlCol="0" anchor="ctr"/>
+          <a:lstStyle/>
+          <a:p>
+            <a:pPr indent="0" marL="0">
+              <a:lnSpc>
+                <a:spcPts val="1600"/>
+              </a:lnSpc>
+              <a:buNone/>
+            </a:pPr>
+            <a:r>
+              <a:rPr lang="en-US" sz="1150" dirty="0">
+                <a:solidFill>
+                  <a:srgbClr val="8B98B4"/>
+                </a:solidFill>
+                <a:latin typeface="Calibri" pitchFamily="34" charset="0"/>
+                <a:ea typeface="Calibri" pitchFamily="34" charset="-122"/>
+                <a:cs typeface="Calibri" pitchFamily="34" charset="-120"/>
+              </a:rPr>
+              <a:t>CrO and the real Sn₂O₂ EUV motif land below their same-CAS DMRG references — mechanism confirmed at three χ.</a:t>
+            </a:r>
+            <a:endParaRPr lang="en-US" sz="1150" dirty="0"/>
+          </a:p>
+        </p:txBody>
+      </p:sp>
+      <p:sp>
+        <p:nvSpPr>
+          <p:cNvPr id="16" name="Shape 14"/>
+          <p:cNvSpPr/>
+          <p:nvPr/>
+        </p:nvSpPr>
+        <p:spPr>
+          <a:xfrm>
+            <a:off x="685800" y="3977640"/>
+            <a:ext cx="3502152" cy="2011680"/>
+          </a:xfrm>
+          <a:prstGeom prst="roundRect">
+            <a:avLst>
+              <a:gd name="adj" fmla="val 3636"/>
+            </a:avLst>
+          </a:prstGeom>
+          <a:solidFill>
+            <a:srgbClr val="151E33"/>
+          </a:solidFill>
+          <a:ln/>
+          <a:effectLst>
+            <a:outerShdw sx="100000" sy="100000" kx="0" ky="0" algn="bl" rotWithShape="0" blurRad="127000" dist="38100" dir="5400000">
+              <a:srgbClr val="000000">
+                <a:alpha val="35000"/>
+              </a:srgbClr>
+            </a:outerShdw>
+          </a:effectLst>
+        </p:spPr>
+      </p:sp>
+      <p:sp>
+        <p:nvSpPr>
+          <p:cNvPr id="17" name="Text 15"/>
+          <p:cNvSpPr/>
+          <p:nvPr/>
+        </p:nvSpPr>
+        <p:spPr>
+          <a:xfrm>
+            <a:off x="923544" y="4123944"/>
+            <a:ext cx="3063240" cy="411480"/>
+          </a:xfrm>
+          <a:prstGeom prst="rect">
+            <a:avLst/>
+          </a:prstGeom>
+          <a:noFill/>
+          <a:ln/>
+        </p:spPr>
+        <p:txBody>
+          <a:bodyPr wrap="square" lIns="0" tIns="0" rIns="0" bIns="0" rtlCol="0" anchor="ctr"/>
+          <a:lstStyle/>
+          <a:p>
+            <a:pPr indent="0" marL="0">
+              <a:buNone/>
+            </a:pPr>
+            <a:r>
+              <a:rPr lang="en-US" sz="2000" b="1" dirty="0">
+                <a:solidFill>
+                  <a:srgbClr val="3FBF7F"/>
+                </a:solidFill>
+                <a:latin typeface="Calibri" pitchFamily="34" charset="0"/>
+                <a:ea typeface="Calibri" pitchFamily="34" charset="-122"/>
+                <a:cs typeface="Calibri" pitchFamily="34" charset="-120"/>
+              </a:rPr>
+              <a:t>0.038 / 0.197 mHa</a:t>
+            </a:r>
+            <a:endParaRPr lang="en-US" sz="2000" dirty="0"/>
+          </a:p>
+        </p:txBody>
+      </p:sp>
+      <p:sp>
+        <p:nvSpPr>
+          <p:cNvPr id="18" name="Text 16"/>
+          <p:cNvSpPr/>
+          <p:nvPr/>
+        </p:nvSpPr>
+        <p:spPr>
+          <a:xfrm>
+            <a:off x="923544" y="4544568"/>
+            <a:ext cx="3063240" cy="274320"/>
+          </a:xfrm>
+          <a:prstGeom prst="rect">
+            <a:avLst/>
+          </a:prstGeom>
+          <a:noFill/>
+          <a:ln/>
+        </p:spPr>
+        <p:txBody>
+          <a:bodyPr wrap="square" lIns="0" tIns="0" rIns="0" bIns="0" rtlCol="0" anchor="ctr"/>
+          <a:lstStyle/>
+          <a:p>
+            <a:pPr indent="0" marL="0">
+              <a:buNone/>
+            </a:pPr>
+            <a:r>
+              <a:rPr lang="en-US" sz="1300" b="1" dirty="0">
+                <a:solidFill>
+                  <a:srgbClr val="FFFFFF"/>
+                </a:solidFill>
+                <a:latin typeface="Calibri" pitchFamily="34" charset="0"/>
+                <a:ea typeface="Calibri" pitchFamily="34" charset="-122"/>
+                <a:cs typeface="Calibri" pitchFamily="34" charset="-120"/>
+              </a:rPr>
+              <a:t>Open-shell oxides (20q)</a:t>
+            </a:r>
+            <a:endParaRPr lang="en-US" sz="1300" dirty="0"/>
+          </a:p>
+        </p:txBody>
+      </p:sp>
+      <p:sp>
+        <p:nvSpPr>
+          <p:cNvPr id="19" name="Text 17"/>
+          <p:cNvSpPr/>
+          <p:nvPr/>
+        </p:nvSpPr>
+        <p:spPr>
+          <a:xfrm>
+            <a:off x="923544" y="4855464"/>
+            <a:ext cx="3063240" cy="1005840"/>
+          </a:xfrm>
+          <a:prstGeom prst="rect">
+            <a:avLst/>
+          </a:prstGeom>
+          <a:noFill/>
+          <a:ln/>
+        </p:spPr>
+        <p:txBody>
+          <a:bodyPr wrap="square" lIns="0" tIns="0" rIns="0" bIns="0" rtlCol="0" anchor="ctr"/>
+          <a:lstStyle/>
+          <a:p>
+            <a:pPr indent="0" marL="0">
+              <a:lnSpc>
+                <a:spcPts val="1600"/>
+              </a:lnSpc>
+              <a:buNone/>
+            </a:pPr>
+            <a:r>
+              <a:rPr lang="en-US" sz="1150" dirty="0">
+                <a:solidFill>
+                  <a:srgbClr val="8B98B4"/>
+                </a:solidFill>
+                <a:latin typeface="Calibri" pitchFamily="34" charset="0"/>
+                <a:ea typeface="Calibri" pitchFamily="34" charset="-122"/>
+                <a:cs typeface="Calibri" pitchFamily="34" charset="-120"/>
+              </a:rPr>
+              <a:t>CrO ⁵Π and NiO ³Σ⁻ to chemical accuracy against exact diagonalization.</a:t>
+            </a:r>
+            <a:endParaRPr lang="en-US" sz="1150" dirty="0"/>
+          </a:p>
+        </p:txBody>
+      </p:sp>
+      <p:sp>
+        <p:nvSpPr>
+          <p:cNvPr id="20" name="Shape 18"/>
+          <p:cNvSpPr/>
+          <p:nvPr/>
+        </p:nvSpPr>
+        <p:spPr>
+          <a:xfrm>
+            <a:off x="4343400" y="3977640"/>
+            <a:ext cx="3502152" cy="2011680"/>
+          </a:xfrm>
+          <a:prstGeom prst="roundRect">
+            <a:avLst>
+              <a:gd name="adj" fmla="val 3636"/>
+            </a:avLst>
+          </a:prstGeom>
+          <a:solidFill>
+            <a:srgbClr val="151E33"/>
+          </a:solidFill>
+          <a:ln/>
+          <a:effectLst>
+            <a:outerShdw sx="100000" sy="100000" kx="0" ky="0" algn="bl" rotWithShape="0" blurRad="127000" dist="38100" dir="5400000">
+              <a:srgbClr val="000000">
+                <a:alpha val="35000"/>
+              </a:srgbClr>
+            </a:outerShdw>
+          </a:effectLst>
+        </p:spPr>
+      </p:sp>
+      <p:sp>
+        <p:nvSpPr>
+          <p:cNvPr id="21" name="Text 19"/>
+          <p:cNvSpPr/>
+          <p:nvPr/>
+        </p:nvSpPr>
+        <p:spPr>
+          <a:xfrm>
+            <a:off x="4581144" y="4123944"/>
+            <a:ext cx="3063240" cy="411480"/>
+          </a:xfrm>
+          <a:prstGeom prst="rect">
+            <a:avLst/>
+          </a:prstGeom>
+          <a:noFill/>
+          <a:ln/>
+        </p:spPr>
+        <p:txBody>
+          <a:bodyPr wrap="square" lIns="0" tIns="0" rIns="0" bIns="0" rtlCol="0" anchor="ctr"/>
+          <a:lstStyle/>
+          <a:p>
+            <a:pPr indent="0" marL="0">
+              <a:buNone/>
+            </a:pPr>
+            <a:r>
+              <a:rPr lang="en-US" sz="2000" b="1" dirty="0">
+                <a:solidFill>
+                  <a:srgbClr val="4FD1E0"/>
+                </a:solidFill>
+                <a:latin typeface="Calibri" pitchFamily="34" charset="0"/>
+                <a:ea typeface="Calibri" pitchFamily="34" charset="-122"/>
+                <a:cs typeface="Calibri" pitchFamily="34" charset="-120"/>
+              </a:rPr>
+              <a:t>real QPU</a:t>
+            </a:r>
+            <a:endParaRPr lang="en-US" sz="2000" dirty="0"/>
+          </a:p>
+        </p:txBody>
+      </p:sp>
+      <p:sp>
+        <p:nvSpPr>
+          <p:cNvPr id="22" name="Text 20"/>
+          <p:cNvSpPr/>
+          <p:nvPr/>
+        </p:nvSpPr>
+        <p:spPr>
+          <a:xfrm>
+            <a:off x="4581144" y="4544568"/>
+            <a:ext cx="3063240" cy="274320"/>
+          </a:xfrm>
+          <a:prstGeom prst="rect">
+            <a:avLst/>
+          </a:prstGeom>
+          <a:noFill/>
+          <a:ln/>
+        </p:spPr>
+        <p:txBody>
+          <a:bodyPr wrap="square" lIns="0" tIns="0" rIns="0" bIns="0" rtlCol="0" anchor="ctr"/>
+          <a:lstStyle/>
+          <a:p>
+            <a:pPr indent="0" marL="0">
+              <a:buNone/>
+            </a:pPr>
+            <a:r>
+              <a:rPr lang="en-US" sz="1300" b="1" dirty="0">
+                <a:solidFill>
+                  <a:srgbClr val="FFFFFF"/>
+                </a:solidFill>
+                <a:latin typeface="Calibri" pitchFamily="34" charset="0"/>
+                <a:ea typeface="Calibri" pitchFamily="34" charset="-122"/>
+                <a:cs typeface="Calibri" pitchFamily="34" charset="-120"/>
+              </a:rPr>
+              <a:t>Trapped-ion silicon</a:t>
+            </a:r>
+            <a:endParaRPr lang="en-US" sz="1300" dirty="0"/>
+          </a:p>
+        </p:txBody>
+      </p:sp>
+      <p:sp>
+        <p:nvSpPr>
+          <p:cNvPr id="23" name="Text 21"/>
+          <p:cNvSpPr/>
+          <p:nvPr/>
+        </p:nvSpPr>
+        <p:spPr>
+          <a:xfrm>
+            <a:off x="4581144" y="4855464"/>
+            <a:ext cx="3063240" cy="1005840"/>
+          </a:xfrm>
+          <a:prstGeom prst="rect">
+            <a:avLst/>
+          </a:prstGeom>
+          <a:noFill/>
+          <a:ln/>
+        </p:spPr>
+        <p:txBody>
+          <a:bodyPr wrap="square" lIns="0" tIns="0" rIns="0" bIns="0" rtlCol="0" anchor="ctr"/>
+          <a:lstStyle/>
+          <a:p>
+            <a:pPr indent="0" marL="0">
+              <a:lnSpc>
+                <a:spcPts val="1600"/>
+              </a:lnSpc>
+              <a:buNone/>
+            </a:pPr>
+            <a:r>
+              <a:rPr lang="en-US" sz="1150" dirty="0">
+                <a:solidFill>
+                  <a:srgbClr val="8B98B4"/>
+                </a:solidFill>
+                <a:latin typeface="Calibri" pitchFamily="34" charset="0"/>
+                <a:ea typeface="Calibri" pitchFamily="34" charset="-122"/>
+                <a:cs typeface="Calibri" pitchFamily="34" charset="-120"/>
+              </a:rPr>
+              <a:t>AQT ibex-q1 decoded; device-sampled determinants seed a QSCI growth that recovers exact FCI.</a:t>
+            </a:r>
+            <a:endParaRPr lang="en-US" sz="1150" dirty="0"/>
+          </a:p>
+        </p:txBody>
+      </p:sp>
+      <p:sp>
+        <p:nvSpPr>
+          <p:cNvPr id="24" name="Shape 22"/>
+          <p:cNvSpPr/>
+          <p:nvPr/>
+        </p:nvSpPr>
+        <p:spPr>
+          <a:xfrm>
+            <a:off x="8001000" y="3977640"/>
+            <a:ext cx="3502152" cy="2011680"/>
+          </a:xfrm>
+          <a:prstGeom prst="roundRect">
+            <a:avLst>
+              <a:gd name="adj" fmla="val 3636"/>
+            </a:avLst>
+          </a:prstGeom>
+          <a:solidFill>
+            <a:srgbClr val="151E33"/>
+          </a:solidFill>
+          <a:ln/>
+          <a:effectLst>
+            <a:outerShdw sx="100000" sy="100000" kx="0" ky="0" algn="bl" rotWithShape="0" blurRad="127000" dist="38100" dir="5400000">
+              <a:srgbClr val="000000">
+                <a:alpha val="35000"/>
+              </a:srgbClr>
+            </a:outerShdw>
+          </a:effectLst>
+        </p:spPr>
+      </p:sp>
+      <p:sp>
+        <p:nvSpPr>
+          <p:cNvPr id="25" name="Text 23"/>
+          <p:cNvSpPr/>
+          <p:nvPr/>
+        </p:nvSpPr>
+        <p:spPr>
+          <a:xfrm>
+            <a:off x="8238744" y="4123944"/>
+            <a:ext cx="3063240" cy="411480"/>
+          </a:xfrm>
+          <a:prstGeom prst="rect">
+            <a:avLst/>
+          </a:prstGeom>
+          <a:noFill/>
+          <a:ln/>
+        </p:spPr>
+        <p:txBody>
+          <a:bodyPr wrap="square" lIns="0" tIns="0" rIns="0" bIns="0" rtlCol="0" anchor="ctr"/>
+          <a:lstStyle/>
+          <a:p>
+            <a:pPr indent="0" marL="0">
+              <a:buNone/>
+            </a:pPr>
+            <a:r>
+              <a:rPr lang="en-US" sz="2000" b="1" dirty="0">
+                <a:solidFill>
+                  <a:srgbClr val="E9B84A"/>
+                </a:solidFill>
+                <a:latin typeface="Calibri" pitchFamily="34" charset="0"/>
+                <a:ea typeface="Calibri" pitchFamily="34" charset="-122"/>
+                <a:cs typeface="Calibri" pitchFamily="34" charset="-120"/>
+              </a:rPr>
+              <a:t>16 TB → 195 MB</a:t>
+            </a:r>
+            <a:endParaRPr lang="en-US" sz="2000" dirty="0"/>
+          </a:p>
+        </p:txBody>
+      </p:sp>
+      <p:sp>
+        <p:nvSpPr>
+          <p:cNvPr id="26" name="Text 24"/>
+          <p:cNvSpPr/>
+          <p:nvPr/>
+        </p:nvSpPr>
+        <p:spPr>
+          <a:xfrm>
+            <a:off x="8238744" y="4544568"/>
+            <a:ext cx="3063240" cy="274320"/>
+          </a:xfrm>
+          <a:prstGeom prst="rect">
+            <a:avLst/>
+          </a:prstGeom>
+          <a:noFill/>
+          <a:ln/>
+        </p:spPr>
+        <p:txBody>
+          <a:bodyPr wrap="square" lIns="0" tIns="0" rIns="0" bIns="0" rtlCol="0" anchor="ctr"/>
+          <a:lstStyle/>
+          <a:p>
+            <a:pPr indent="0" marL="0">
+              <a:buNone/>
+            </a:pPr>
+            <a:r>
+              <a:rPr lang="en-US" sz="1300" b="1" dirty="0">
+                <a:solidFill>
+                  <a:srgbClr val="FFFFFF"/>
+                </a:solidFill>
+                <a:latin typeface="Calibri" pitchFamily="34" charset="0"/>
+                <a:ea typeface="Calibri" pitchFamily="34" charset="-122"/>
+                <a:cs typeface="Calibri" pitchFamily="34" charset="-120"/>
+              </a:rPr>
+              <a:t>The memory wall removed</a:t>
+            </a:r>
+            <a:endParaRPr lang="en-US" sz="1300" dirty="0"/>
+          </a:p>
+        </p:txBody>
+      </p:sp>
+      <p:sp>
+        <p:nvSpPr>
+          <p:cNvPr id="27" name="Text 25"/>
+          <p:cNvSpPr/>
+          <p:nvPr/>
+        </p:nvSpPr>
+        <p:spPr>
+          <a:xfrm>
+            <a:off x="8238744" y="4855464"/>
+            <a:ext cx="3063240" cy="1005840"/>
+          </a:xfrm>
+          <a:prstGeom prst="rect">
+            <a:avLst/>
+          </a:prstGeom>
+          <a:noFill/>
+          <a:ln/>
+        </p:spPr>
+        <p:txBody>
+          <a:bodyPr wrap="square" lIns="0" tIns="0" rIns="0" bIns="0" rtlCol="0" anchor="ctr"/>
+          <a:lstStyle/>
+          <a:p>
+            <a:pPr indent="0" marL="0">
+              <a:lnSpc>
+                <a:spcPts val="1600"/>
+              </a:lnSpc>
+              <a:buNone/>
+            </a:pPr>
+            <a:r>
+              <a:rPr lang="en-US" sz="1150" dirty="0">
+                <a:solidFill>
+                  <a:srgbClr val="8B98B4"/>
+                </a:solidFill>
+                <a:latin typeface="Calibri" pitchFamily="34" charset="0"/>
+                <a:ea typeface="Calibri" pitchFamily="34" charset="-122"/>
+                <a:cs typeface="Calibri" pitchFamily="34" charset="-120"/>
+              </a:rPr>
+              <a:t>Tensor-network representation at the measured bond dimension — what makes 40 qubits fit on one GPU.</a:t>
+            </a:r>
+            <a:endParaRPr lang="en-US" sz="1150" dirty="0"/>
+          </a:p>
+        </p:txBody>
+      </p:sp>
+      <p:sp>
+        <p:nvSpPr>
+          <p:cNvPr id="28" name="Text 26"/>
+          <p:cNvSpPr/>
+          <p:nvPr/>
+        </p:nvSpPr>
+        <p:spPr>
+          <a:xfrm>
+            <a:off x="685800" y="6327648"/>
+            <a:ext cx="10789920" cy="320040"/>
+          </a:xfrm>
+          <a:prstGeom prst="rect">
+            <a:avLst/>
+          </a:prstGeom>
+          <a:noFill/>
+          <a:ln/>
+        </p:spPr>
+        <p:txBody>
+          <a:bodyPr wrap="square" lIns="0" tIns="0" rIns="0" bIns="0" rtlCol="0" anchor="ctr"/>
+          <a:lstStyle/>
+          <a:p>
+            <a:pPr indent="0" marL="0">
+              <a:buNone/>
+            </a:pPr>
+            <a:r>
+              <a:rPr lang="en-US" sz="1050" dirty="0">
+                <a:solidFill>
+                  <a:srgbClr val="5D6B8A"/>
+                </a:solidFill>
+                <a:latin typeface="Calibri" pitchFamily="34" charset="0"/>
+                <a:ea typeface="Calibri" pitchFamily="34" charset="-122"/>
+                <a:cs typeface="Calibri" pitchFamily="34" charset="-120"/>
+              </a:rPr>
+              <a:t>Full traceability: docs/claims_ledger.md maps every number → script → evidence file → status.</a:t>
+            </a:r>
+            <a:endParaRPr lang="en-US" sz="1050" dirty="0"/>
+          </a:p>
+        </p:txBody>
+      </p:sp>
+    </p:spTree>
+  </p:cSld>
+  <p:clrMapOvr>
+    <a:masterClrMapping/>
+  </p:clrMapOvr>
+</p:sld>
+</file>
+
+<file path=ppt/slides/slide11.xml><?xml version="1.0" encoding="utf-8"?>
+<p:sld xmlns:a="http://schemas.openxmlformats.org/drawingml/2006/main" xmlns:r="http://schemas.openxmlformats.org/officeDocument/2006/relationships" xmlns:p="http://schemas.openxmlformats.org/presentationml/2006/main">
+  <p:cSld name="Slide 11">
+    <p:bg>
+      <p:bgPr>
+        <a:solidFill>
+          <a:srgbClr val="0B1220"/>
+        </a:solidFill>
+      </p:bgPr>
+    </p:bg>
+    <p:spTree>
+      <p:nvGrpSpPr>
+        <p:cNvPr id="1" name=""/>
+        <p:cNvGrpSpPr/>
+        <p:nvPr/>
+      </p:nvGrpSpPr>
+      <p:grpSpPr>
+        <a:xfrm>
+          <a:off x="0" y="0"/>
+          <a:ext cx="0" cy="0"/>
+          <a:chOff x="0" y="0"/>
+          <a:chExt cx="0" cy="0"/>
+        </a:xfrm>
+      </p:grpSpPr>
+      <p:sp>
+        <p:nvSpPr>
+          <p:cNvPr id="2" name="Text 0"/>
+          <p:cNvSpPr/>
+          <p:nvPr/>
+        </p:nvSpPr>
+        <p:spPr>
+          <a:xfrm>
+            <a:off x="685800" y="384048"/>
+            <a:ext cx="10789920" cy="274320"/>
+          </a:xfrm>
+          <a:prstGeom prst="rect">
+            <a:avLst/>
+          </a:prstGeom>
+          <a:noFill/>
+          <a:ln/>
+        </p:spPr>
+        <p:txBody>
+          <a:bodyPr wrap="square" lIns="0" tIns="0" rIns="0" bIns="0" rtlCol="0" anchor="ctr"/>
+          <a:lstStyle/>
+          <a:p>
+            <a:pPr indent="0" marL="0">
+              <a:buNone/>
+            </a:pPr>
+            <a:r>
+              <a:rPr lang="en-US" sz="1200" b="1" spc="300" kern="0" dirty="0">
+                <a:solidFill>
+                  <a:srgbClr val="E9B84A"/>
+                </a:solidFill>
+                <a:latin typeface="Calibri" pitchFamily="34" charset="0"/>
+                <a:ea typeface="Calibri" pitchFamily="34" charset="-122"/>
+                <a:cs typeface="Calibri" pitchFamily="34" charset="-120"/>
+              </a:rPr>
+              <a:t>HONEST LIMITS — NON-NEGOTIABLE</a:t>
+            </a:r>
+            <a:endParaRPr lang="en-US" sz="1200" dirty="0"/>
+          </a:p>
+        </p:txBody>
+      </p:sp>
+      <p:sp>
+        <p:nvSpPr>
+          <p:cNvPr id="3" name="Text 1"/>
+          <p:cNvSpPr/>
+          <p:nvPr/>
+        </p:nvSpPr>
+        <p:spPr>
+          <a:xfrm>
+            <a:off x="685800" y="749808"/>
+            <a:ext cx="10789920" cy="914400"/>
+          </a:xfrm>
+          <a:prstGeom prst="rect">
+            <a:avLst/>
+          </a:prstGeom>
+          <a:noFill/>
+          <a:ln/>
+        </p:spPr>
+        <p:txBody>
+          <a:bodyPr wrap="square" lIns="0" tIns="0" rIns="0" bIns="0" rtlCol="0" anchor="ctr"/>
+          <a:lstStyle/>
+          <a:p>
+            <a:pPr indent="0" marL="0">
+              <a:buNone/>
+            </a:pPr>
+            <a:r>
+              <a:rPr lang="en-US" sz="3300" b="1" dirty="0">
+                <a:solidFill>
+                  <a:srgbClr val="FFFFFF"/>
+                </a:solidFill>
+                <a:latin typeface="Cambria" pitchFamily="34" charset="0"/>
+                <a:ea typeface="Cambria" pitchFamily="34" charset="-122"/>
+                <a:cs typeface="Cambria" pitchFamily="34" charset="-120"/>
+              </a:rPr>
+              <a:t>What we do not claim</a:t>
+            </a:r>
+            <a:endParaRPr lang="en-US" sz="3300" dirty="0"/>
+          </a:p>
+        </p:txBody>
+      </p:sp>
+      <p:sp>
+        <p:nvSpPr>
+          <p:cNvPr id="4" name="Shape 2"/>
+          <p:cNvSpPr/>
+          <p:nvPr/>
+        </p:nvSpPr>
+        <p:spPr>
+          <a:xfrm>
+            <a:off x="685800" y="1664208"/>
+            <a:ext cx="10789920" cy="749808"/>
+          </a:xfrm>
+          <a:prstGeom prst="roundRect">
+            <a:avLst>
+              <a:gd name="adj" fmla="val 9756"/>
+            </a:avLst>
+          </a:prstGeom>
+          <a:solidFill>
+            <a:srgbClr val="1B2540"/>
+          </a:solidFill>
+          <a:ln w="12700">
+            <a:solidFill>
+              <a:srgbClr val="2A3654"/>
+            </a:solidFill>
+            <a:prstDash val="solid"/>
+          </a:ln>
+          <a:effectLst>
+            <a:outerShdw sx="100000" sy="100000" kx="0" ky="0" algn="bl" rotWithShape="0" blurRad="127000" dist="38100" dir="5400000">
+              <a:srgbClr val="000000">
+                <a:alpha val="35000"/>
+              </a:srgbClr>
+            </a:outerShdw>
+          </a:effectLst>
+        </p:spPr>
+      </p:sp>
+      <p:sp>
+        <p:nvSpPr>
+          <p:cNvPr id="5" name="Text 3"/>
+          <p:cNvSpPr/>
+          <p:nvPr/>
+        </p:nvSpPr>
+        <p:spPr>
+          <a:xfrm>
+            <a:off x="960120" y="1737360"/>
+            <a:ext cx="365760" cy="566928"/>
+          </a:xfrm>
+          <a:prstGeom prst="rect">
+            <a:avLst/>
+          </a:prstGeom>
+          <a:noFill/>
+          <a:ln/>
+        </p:spPr>
+        <p:txBody>
+          <a:bodyPr wrap="square" lIns="0" tIns="0" rIns="0" bIns="0" rtlCol="0" anchor="ctr"/>
+          <a:lstStyle/>
+          <a:p>
+            <a:pPr indent="0" marL="0">
+              <a:buNone/>
+            </a:pPr>
+            <a:r>
+              <a:rPr lang="en-US" sz="1600" dirty="0">
+                <a:solidFill>
+                  <a:srgbClr val="E9B84A"/>
+                </a:solidFill>
+                <a:latin typeface="Calibri" pitchFamily="34" charset="0"/>
+                <a:ea typeface="Calibri" pitchFamily="34" charset="-122"/>
+                <a:cs typeface="Calibri" pitchFamily="34" charset="-120"/>
+              </a:rPr>
+              <a:t>⚑</a:t>
+            </a:r>
+            <a:endParaRPr lang="en-US" sz="1600" dirty="0"/>
+          </a:p>
+        </p:txBody>
+      </p:sp>
+      <p:sp>
+        <p:nvSpPr>
+          <p:cNvPr id="6" name="Text 4"/>
+          <p:cNvSpPr/>
+          <p:nvPr/>
+        </p:nvSpPr>
+        <p:spPr>
+          <a:xfrm>
+            <a:off x="1417320" y="1709928"/>
+            <a:ext cx="9784080" cy="676656"/>
+          </a:xfrm>
+          <a:prstGeom prst="rect">
+            <a:avLst/>
+          </a:prstGeom>
+          <a:noFill/>
+          <a:ln/>
+        </p:spPr>
+        <p:txBody>
+          <a:bodyPr wrap="square" lIns="0" tIns="0" rIns="0" bIns="0" rtlCol="0" anchor="ctr"/>
+          <a:lstStyle/>
+          <a:p>
+            <a:pPr indent="0" marL="0">
+              <a:lnSpc>
+                <a:spcPts val="1500"/>
+              </a:lnSpc>
+              <a:buNone/>
+            </a:pPr>
+            <a:r>
+              <a:rPr lang="en-US" sz="1150" dirty="0">
+                <a:solidFill>
+                  <a:srgbClr val="E8EDF7"/>
+                </a:solidFill>
+                <a:latin typeface="Calibri" pitchFamily="34" charset="0"/>
+                <a:ea typeface="Calibri" pitchFamily="34" charset="-122"/>
+                <a:cs typeface="Calibri" pitchFamily="34" charset="-120"/>
+              </a:rPr>
+              <a:t>No quantum ADVANTAGE at these sizes. At ≤40 qubits classical methods still solve these instances. The value is trust and correctness, not speed — the advantage regime is beyond, which the 40q run targets.</a:t>
+            </a:r>
+            <a:endParaRPr lang="en-US" sz="1150" dirty="0"/>
+          </a:p>
+        </p:txBody>
+      </p:sp>
+      <p:sp>
+        <p:nvSpPr>
+          <p:cNvPr id="7" name="Shape 5"/>
+          <p:cNvSpPr/>
+          <p:nvPr/>
+        </p:nvSpPr>
+        <p:spPr>
+          <a:xfrm>
+            <a:off x="685800" y="2487168"/>
+            <a:ext cx="10789920" cy="749808"/>
+          </a:xfrm>
+          <a:prstGeom prst="roundRect">
+            <a:avLst>
+              <a:gd name="adj" fmla="val 9756"/>
+            </a:avLst>
+          </a:prstGeom>
+          <a:solidFill>
+            <a:srgbClr val="1B2540"/>
+          </a:solidFill>
+          <a:ln w="12700">
+            <a:solidFill>
+              <a:srgbClr val="2A3654"/>
+            </a:solidFill>
+            <a:prstDash val="solid"/>
+          </a:ln>
+          <a:effectLst>
+            <a:outerShdw sx="100000" sy="100000" kx="0" ky="0" algn="bl" rotWithShape="0" blurRad="127000" dist="38100" dir="5400000">
+              <a:srgbClr val="000000">
+                <a:alpha val="35000"/>
+              </a:srgbClr>
+            </a:outerShdw>
+          </a:effectLst>
+        </p:spPr>
+      </p:sp>
+      <p:sp>
+        <p:nvSpPr>
+          <p:cNvPr id="8" name="Text 6"/>
+          <p:cNvSpPr/>
+          <p:nvPr/>
+        </p:nvSpPr>
+        <p:spPr>
+          <a:xfrm>
+            <a:off x="960120" y="2560320"/>
+            <a:ext cx="365760" cy="566928"/>
+          </a:xfrm>
+          <a:prstGeom prst="rect">
+            <a:avLst/>
+          </a:prstGeom>
+          <a:noFill/>
+          <a:ln/>
+        </p:spPr>
+        <p:txBody>
+          <a:bodyPr wrap="square" lIns="0" tIns="0" rIns="0" bIns="0" rtlCol="0" anchor="ctr"/>
+          <a:lstStyle/>
+          <a:p>
+            <a:pPr indent="0" marL="0">
+              <a:buNone/>
+            </a:pPr>
+            <a:r>
+              <a:rPr lang="en-US" sz="1600" dirty="0">
+                <a:solidFill>
+                  <a:srgbClr val="E9B84A"/>
+                </a:solidFill>
+                <a:latin typeface="Calibri" pitchFamily="34" charset="0"/>
+                <a:ea typeface="Calibri" pitchFamily="34" charset="-122"/>
+                <a:cs typeface="Calibri" pitchFamily="34" charset="-120"/>
+              </a:rPr>
+              <a:t>⚑</a:t>
+            </a:r>
+            <a:endParaRPr lang="en-US" sz="1600" dirty="0"/>
+          </a:p>
+        </p:txBody>
+      </p:sp>
+      <p:sp>
+        <p:nvSpPr>
+          <p:cNvPr id="9" name="Text 7"/>
+          <p:cNvSpPr/>
+          <p:nvPr/>
+        </p:nvSpPr>
+        <p:spPr>
+          <a:xfrm>
+            <a:off x="1417320" y="2532888"/>
+            <a:ext cx="9784080" cy="676656"/>
+          </a:xfrm>
+          <a:prstGeom prst="rect">
+            <a:avLst/>
+          </a:prstGeom>
+          <a:noFill/>
+          <a:ln/>
+        </p:spPr>
+        <p:txBody>
+          <a:bodyPr wrap="square" lIns="0" tIns="0" rIns="0" bIns="0" rtlCol="0" anchor="ctr"/>
+          <a:lstStyle/>
+          <a:p>
+            <a:pPr indent="0" marL="0">
+              <a:lnSpc>
+                <a:spcPts val="1500"/>
+              </a:lnSpc>
+              <a:buNone/>
+            </a:pPr>
+            <a:r>
+              <a:rPr lang="en-US" sz="1150" dirty="0">
+                <a:solidFill>
+                  <a:srgbClr val="E8EDF7"/>
+                </a:solidFill>
+                <a:latin typeface="Calibri" pitchFamily="34" charset="0"/>
+                <a:ea typeface="Calibri" pitchFamily="34" charset="-122"/>
+                <a:cs typeface="Calibri" pitchFamily="34" charset="-120"/>
+              </a:rPr>
+              <a:t>The value case is a framework, not a Mitsubishi ROI. The mechanism is measured here; the dollar inputs are placeholders for your pipeline's own numbers.</a:t>
+            </a:r>
+            <a:endParaRPr lang="en-US" sz="1150" dirty="0"/>
+          </a:p>
+        </p:txBody>
+      </p:sp>
+      <p:sp>
+        <p:nvSpPr>
+          <p:cNvPr id="10" name="Shape 8"/>
+          <p:cNvSpPr/>
+          <p:nvPr/>
+        </p:nvSpPr>
+        <p:spPr>
+          <a:xfrm>
+            <a:off x="685800" y="3310128"/>
+            <a:ext cx="10789920" cy="749808"/>
+          </a:xfrm>
+          <a:prstGeom prst="roundRect">
+            <a:avLst>
+              <a:gd name="adj" fmla="val 9756"/>
+            </a:avLst>
+          </a:prstGeom>
+          <a:solidFill>
+            <a:srgbClr val="1B2540"/>
+          </a:solidFill>
+          <a:ln w="12700">
+            <a:solidFill>
+              <a:srgbClr val="2A3654"/>
+            </a:solidFill>
+            <a:prstDash val="solid"/>
+          </a:ln>
+          <a:effectLst>
+            <a:outerShdw sx="100000" sy="100000" kx="0" ky="0" algn="bl" rotWithShape="0" blurRad="127000" dist="38100" dir="5400000">
+              <a:srgbClr val="000000">
+                <a:alpha val="35000"/>
+              </a:srgbClr>
+            </a:outerShdw>
+          </a:effectLst>
+        </p:spPr>
+      </p:sp>
+      <p:sp>
+        <p:nvSpPr>
+          <p:cNvPr id="11" name="Text 9"/>
+          <p:cNvSpPr/>
+          <p:nvPr/>
+        </p:nvSpPr>
+        <p:spPr>
+          <a:xfrm>
+            <a:off x="960120" y="3383280"/>
+            <a:ext cx="365760" cy="566928"/>
+          </a:xfrm>
+          <a:prstGeom prst="rect">
+            <a:avLst/>
+          </a:prstGeom>
+          <a:noFill/>
+          <a:ln/>
+        </p:spPr>
+        <p:txBody>
+          <a:bodyPr wrap="square" lIns="0" tIns="0" rIns="0" bIns="0" rtlCol="0" anchor="ctr"/>
+          <a:lstStyle/>
+          <a:p>
+            <a:pPr indent="0" marL="0">
+              <a:buNone/>
+            </a:pPr>
+            <a:r>
+              <a:rPr lang="en-US" sz="1600" dirty="0">
+                <a:solidFill>
+                  <a:srgbClr val="E9B84A"/>
+                </a:solidFill>
+                <a:latin typeface="Calibri" pitchFamily="34" charset="0"/>
+                <a:ea typeface="Calibri" pitchFamily="34" charset="-122"/>
+                <a:cs typeface="Calibri" pitchFamily="34" charset="-120"/>
+              </a:rPr>
+              <a:t>⚑</a:t>
+            </a:r>
+            <a:endParaRPr lang="en-US" sz="1600" dirty="0"/>
+          </a:p>
+        </p:txBody>
+      </p:sp>
+      <p:sp>
+        <p:nvSpPr>
+          <p:cNvPr id="12" name="Text 10"/>
+          <p:cNvSpPr/>
+          <p:nvPr/>
+        </p:nvSpPr>
+        <p:spPr>
+          <a:xfrm>
+            <a:off x="1417320" y="3355848"/>
+            <a:ext cx="9784080" cy="676656"/>
+          </a:xfrm>
+          <a:prstGeom prst="rect">
+            <a:avLst/>
+          </a:prstGeom>
+          <a:noFill/>
+          <a:ln/>
+        </p:spPr>
+        <p:txBody>
+          <a:bodyPr wrap="square" lIns="0" tIns="0" rIns="0" bIns="0" rtlCol="0" anchor="ctr"/>
+          <a:lstStyle/>
+          <a:p>
+            <a:pPr indent="0" marL="0">
+              <a:lnSpc>
+                <a:spcPts val="1500"/>
+              </a:lnSpc>
+              <a:buNone/>
+            </a:pPr>
+            <a:r>
+              <a:rPr lang="en-US" sz="1150" dirty="0">
+                <a:solidFill>
+                  <a:srgbClr val="E8EDF7"/>
+                </a:solidFill>
+                <a:latin typeface="Calibri" pitchFamily="34" charset="0"/>
+                <a:ea typeface="Calibri" pitchFamily="34" charset="-122"/>
+                <a:cs typeface="Calibri" pitchFamily="34" charset="-120"/>
+              </a:rPr>
+              <a:t>Large-ladder results beyond 20q use a determinant-space proxy for the measurement step — validated against real circuit-sampled shots at 12 / 16 / 20 qubits.</a:t>
+            </a:r>
+            <a:endParaRPr lang="en-US" sz="1150" dirty="0"/>
+          </a:p>
+        </p:txBody>
+      </p:sp>
+      <p:sp>
+        <p:nvSpPr>
+          <p:cNvPr id="13" name="Shape 11"/>
+          <p:cNvSpPr/>
+          <p:nvPr/>
+        </p:nvSpPr>
+        <p:spPr>
+          <a:xfrm>
+            <a:off x="685800" y="4133088"/>
+            <a:ext cx="10789920" cy="749808"/>
+          </a:xfrm>
+          <a:prstGeom prst="roundRect">
+            <a:avLst>
+              <a:gd name="adj" fmla="val 9756"/>
+            </a:avLst>
+          </a:prstGeom>
+          <a:solidFill>
+            <a:srgbClr val="1B2540"/>
+          </a:solidFill>
+          <a:ln w="12700">
+            <a:solidFill>
+              <a:srgbClr val="2A3654"/>
+            </a:solidFill>
+            <a:prstDash val="solid"/>
+          </a:ln>
+          <a:effectLst>
+            <a:outerShdw sx="100000" sy="100000" kx="0" ky="0" algn="bl" rotWithShape="0" blurRad="127000" dist="38100" dir="5400000">
+              <a:srgbClr val="000000">
+                <a:alpha val="35000"/>
+              </a:srgbClr>
+            </a:outerShdw>
+          </a:effectLst>
+        </p:spPr>
+      </p:sp>
+      <p:sp>
+        <p:nvSpPr>
+          <p:cNvPr id="14" name="Text 12"/>
+          <p:cNvSpPr/>
+          <p:nvPr/>
+        </p:nvSpPr>
+        <p:spPr>
+          <a:xfrm>
+            <a:off x="960120" y="4206240"/>
+            <a:ext cx="365760" cy="566928"/>
+          </a:xfrm>
+          <a:prstGeom prst="rect">
+            <a:avLst/>
+          </a:prstGeom>
+          <a:noFill/>
+          <a:ln/>
+        </p:spPr>
+        <p:txBody>
+          <a:bodyPr wrap="square" lIns="0" tIns="0" rIns="0" bIns="0" rtlCol="0" anchor="ctr"/>
+          <a:lstStyle/>
+          <a:p>
+            <a:pPr indent="0" marL="0">
+              <a:buNone/>
+            </a:pPr>
+            <a:r>
+              <a:rPr lang="en-US" sz="1600" dirty="0">
+                <a:solidFill>
+                  <a:srgbClr val="E9B84A"/>
+                </a:solidFill>
+                <a:latin typeface="Calibri" pitchFamily="34" charset="0"/>
+                <a:ea typeface="Calibri" pitchFamily="34" charset="-122"/>
+                <a:cs typeface="Calibri" pitchFamily="34" charset="-120"/>
+              </a:rPr>
+              <a:t>⚑</a:t>
+            </a:r>
+            <a:endParaRPr lang="en-US" sz="1600" dirty="0"/>
+          </a:p>
+        </p:txBody>
+      </p:sp>
+      <p:sp>
+        <p:nvSpPr>
+          <p:cNvPr id="15" name="Text 13"/>
+          <p:cNvSpPr/>
+          <p:nvPr/>
+        </p:nvSpPr>
+        <p:spPr>
+          <a:xfrm>
+            <a:off x="1417320" y="4178808"/>
+            <a:ext cx="9784080" cy="676656"/>
+          </a:xfrm>
+          <a:prstGeom prst="rect">
+            <a:avLst/>
+          </a:prstGeom>
+          <a:noFill/>
+          <a:ln/>
+        </p:spPr>
+        <p:txBody>
+          <a:bodyPr wrap="square" lIns="0" tIns="0" rIns="0" bIns="0" rtlCol="0" anchor="ctr"/>
+          <a:lstStyle/>
+          <a:p>
+            <a:pPr indent="0" marL="0">
+              <a:lnSpc>
+                <a:spcPts val="1500"/>
+              </a:lnSpc>
+              <a:buNone/>
+            </a:pPr>
+            <a:r>
+              <a:rPr lang="en-US" sz="1150" dirty="0">
+                <a:solidFill>
+                  <a:srgbClr val="E8EDF7"/>
+                </a:solidFill>
+                <a:latin typeface="Calibri" pitchFamily="34" charset="0"/>
+                <a:ea typeface="Calibri" pitchFamily="34" charset="-122"/>
+                <a:cs typeface="Calibri" pitchFamily="34" charset="-120"/>
+              </a:rPr>
+              <a:t>The 40q absolute result sits AT the chemical-accuracy threshold, not comfortably inside it.</a:t>
+            </a:r>
+            <a:endParaRPr lang="en-US" sz="1150" dirty="0"/>
+          </a:p>
+        </p:txBody>
+      </p:sp>
+      <p:sp>
+        <p:nvSpPr>
+          <p:cNvPr id="16" name="Shape 14"/>
+          <p:cNvSpPr/>
+          <p:nvPr/>
+        </p:nvSpPr>
+        <p:spPr>
+          <a:xfrm>
+            <a:off x="685800" y="4956048"/>
+            <a:ext cx="10789920" cy="749808"/>
+          </a:xfrm>
+          <a:prstGeom prst="roundRect">
+            <a:avLst>
+              <a:gd name="adj" fmla="val 9756"/>
+            </a:avLst>
+          </a:prstGeom>
+          <a:solidFill>
+            <a:srgbClr val="1B2540"/>
+          </a:solidFill>
+          <a:ln w="12700">
+            <a:solidFill>
+              <a:srgbClr val="2A3654"/>
+            </a:solidFill>
+            <a:prstDash val="solid"/>
+          </a:ln>
+          <a:effectLst>
+            <a:outerShdw sx="100000" sy="100000" kx="0" ky="0" algn="bl" rotWithShape="0" blurRad="127000" dist="38100" dir="5400000">
+              <a:srgbClr val="000000">
+                <a:alpha val="35000"/>
+              </a:srgbClr>
+            </a:outerShdw>
+          </a:effectLst>
+        </p:spPr>
+      </p:sp>
+      <p:sp>
+        <p:nvSpPr>
+          <p:cNvPr id="17" name="Text 15"/>
+          <p:cNvSpPr/>
+          <p:nvPr/>
+        </p:nvSpPr>
+        <p:spPr>
+          <a:xfrm>
+            <a:off x="960120" y="5029200"/>
+            <a:ext cx="365760" cy="566928"/>
+          </a:xfrm>
+          <a:prstGeom prst="rect">
+            <a:avLst/>
+          </a:prstGeom>
+          <a:noFill/>
+          <a:ln/>
+        </p:spPr>
+        <p:txBody>
+          <a:bodyPr wrap="square" lIns="0" tIns="0" rIns="0" bIns="0" rtlCol="0" anchor="ctr"/>
+          <a:lstStyle/>
+          <a:p>
+            <a:pPr indent="0" marL="0">
+              <a:buNone/>
+            </a:pPr>
+            <a:r>
+              <a:rPr lang="en-US" sz="1600" dirty="0">
+                <a:solidFill>
+                  <a:srgbClr val="E9B84A"/>
+                </a:solidFill>
+                <a:latin typeface="Calibri" pitchFamily="34" charset="0"/>
+                <a:ea typeface="Calibri" pitchFamily="34" charset="-122"/>
+                <a:cs typeface="Calibri" pitchFamily="34" charset="-120"/>
+              </a:rPr>
+              <a:t>⚑</a:t>
+            </a:r>
+            <a:endParaRPr lang="en-US" sz="1600" dirty="0"/>
+          </a:p>
+        </p:txBody>
+      </p:sp>
+      <p:sp>
+        <p:nvSpPr>
+          <p:cNvPr id="18" name="Text 16"/>
+          <p:cNvSpPr/>
+          <p:nvPr/>
+        </p:nvSpPr>
+        <p:spPr>
+          <a:xfrm>
+            <a:off x="1417320" y="5001768"/>
+            <a:ext cx="9784080" cy="676656"/>
+          </a:xfrm>
+          <a:prstGeom prst="rect">
+            <a:avLst/>
+          </a:prstGeom>
+          <a:noFill/>
+          <a:ln/>
+        </p:spPr>
+        <p:txBody>
+          <a:bodyPr wrap="square" lIns="0" tIns="0" rIns="0" bIns="0" rtlCol="0" anchor="ctr"/>
+          <a:lstStyle/>
+          <a:p>
+            <a:pPr indent="0" marL="0">
+              <a:lnSpc>
+                <a:spcPts val="1500"/>
+              </a:lnSpc>
+              <a:buNone/>
+            </a:pPr>
+            <a:r>
+              <a:rPr lang="en-US" sz="1150" dirty="0">
+                <a:solidFill>
+                  <a:srgbClr val="E8EDF7"/>
+                </a:solidFill>
+                <a:latin typeface="Calibri" pitchFamily="34" charset="0"/>
+                <a:ea typeface="Calibri" pitchFamily="34" charset="-122"/>
+                <a:cs typeface="Calibri" pitchFamily="34" charset="-120"/>
+              </a:rPr>
+              <a:t>The 40q tensor-network backend RAN (2.65 h, 12.06 GB) but yielded only 108 determinants where ~450,000 were needed. E9 measured why — seed yield grows only linearly in depth, leaving it 798× short — so the MP2-seeded classical growth was a NECESSARY architecture, not a workaround. What is owed is a sampling strategy, not GPU hours.</a:t>
+            </a:r>
+            <a:endParaRPr lang="en-US" sz="1150" dirty="0"/>
+          </a:p>
+        </p:txBody>
+      </p:sp>
+      <p:sp>
+        <p:nvSpPr>
+          <p:cNvPr id="19" name="Shape 17"/>
+          <p:cNvSpPr/>
+          <p:nvPr/>
+        </p:nvSpPr>
+        <p:spPr>
+          <a:xfrm>
+            <a:off x="685800" y="5779008"/>
+            <a:ext cx="10789920" cy="749808"/>
+          </a:xfrm>
+          <a:prstGeom prst="roundRect">
+            <a:avLst>
+              <a:gd name="adj" fmla="val 9756"/>
+            </a:avLst>
+          </a:prstGeom>
+          <a:solidFill>
+            <a:srgbClr val="1B2540"/>
+          </a:solidFill>
+          <a:ln w="12700">
+            <a:solidFill>
+              <a:srgbClr val="2A3654"/>
+            </a:solidFill>
+            <a:prstDash val="solid"/>
+          </a:ln>
+          <a:effectLst>
+            <a:outerShdw sx="100000" sy="100000" kx="0" ky="0" algn="bl" rotWithShape="0" blurRad="127000" dist="38100" dir="5400000">
+              <a:srgbClr val="000000">
+                <a:alpha val="35000"/>
+              </a:srgbClr>
+            </a:outerShdw>
+          </a:effectLst>
+        </p:spPr>
+      </p:sp>
+      <p:sp>
+        <p:nvSpPr>
+          <p:cNvPr id="20" name="Text 18"/>
+          <p:cNvSpPr/>
+          <p:nvPr/>
+        </p:nvSpPr>
+        <p:spPr>
+          <a:xfrm>
+            <a:off x="960120" y="5852160"/>
+            <a:ext cx="365760" cy="566928"/>
+          </a:xfrm>
+          <a:prstGeom prst="rect">
+            <a:avLst/>
+          </a:prstGeom>
+          <a:noFill/>
+          <a:ln/>
+        </p:spPr>
+        <p:txBody>
+          <a:bodyPr wrap="square" lIns="0" tIns="0" rIns="0" bIns="0" rtlCol="0" anchor="ctr"/>
+          <a:lstStyle/>
+          <a:p>
+            <a:pPr indent="0" marL="0">
+              <a:buNone/>
+            </a:pPr>
+            <a:r>
+              <a:rPr lang="en-US" sz="1600" dirty="0">
+                <a:solidFill>
+                  <a:srgbClr val="E9B84A"/>
+                </a:solidFill>
+                <a:latin typeface="Calibri" pitchFamily="34" charset="0"/>
+                <a:ea typeface="Calibri" pitchFamily="34" charset="-122"/>
+                <a:cs typeface="Calibri" pitchFamily="34" charset="-120"/>
+              </a:rPr>
+              <a:t>⚑</a:t>
+            </a:r>
+            <a:endParaRPr lang="en-US" sz="1600" dirty="0"/>
+          </a:p>
+        </p:txBody>
+      </p:sp>
+      <p:sp>
+        <p:nvSpPr>
+          <p:cNvPr id="21" name="Text 19"/>
+          <p:cNvSpPr/>
+          <p:nvPr/>
+        </p:nvSpPr>
+        <p:spPr>
+          <a:xfrm>
+            <a:off x="1417320" y="5824728"/>
+            <a:ext cx="9784080" cy="676656"/>
+          </a:xfrm>
+          <a:prstGeom prst="rect">
+            <a:avLst/>
+          </a:prstGeom>
+          <a:noFill/>
+          <a:ln/>
+        </p:spPr>
+        <p:txBody>
+          <a:bodyPr wrap="square" lIns="0" tIns="0" rIns="0" bIns="0" rtlCol="0" anchor="ctr"/>
+          <a:lstStyle/>
+          <a:p>
+            <a:pPr indent="0" marL="0">
+              <a:lnSpc>
+                <a:spcPts val="1500"/>
+              </a:lnSpc>
+              <a:buNone/>
+            </a:pPr>
+            <a:r>
+              <a:rPr lang="en-US" sz="1150" dirty="0">
+                <a:solidFill>
+                  <a:srgbClr val="E8EDF7"/>
+                </a:solidFill>
+                <a:latin typeface="Calibri" pitchFamily="34" charset="0"/>
+                <a:ea typeface="Calibri" pitchFamily="34" charset="-122"/>
+                <a:cs typeface="Calibri" pitchFamily="34" charset="-120"/>
+              </a:rPr>
+              <a:t>Two decision claims were tested and withdrawn rather than defended. The value story above depends on neither.</a:t>
+            </a:r>
+            <a:endParaRPr lang="en-US" sz="1150" dirty="0"/>
+          </a:p>
+        </p:txBody>
+      </p:sp>
+    </p:spTree>
+  </p:cSld>
+  <p:clrMapOvr>
+    <a:masterClrMapping/>
+  </p:clrMapOvr>
+</p:sld>
+</file>
+
+<file path=ppt/slides/slide12.xml><?xml version="1.0" encoding="utf-8"?>
+<p:sld xmlns:a="http://schemas.openxmlformats.org/drawingml/2006/main" xmlns:r="http://schemas.openxmlformats.org/officeDocument/2006/relationships" xmlns:p="http://schemas.openxmlformats.org/presentationml/2006/main">
+  <p:cSld name="Slide 12">
+    <p:bg>
+      <p:bgPr>
+        <a:solidFill>
+          <a:srgbClr val="0B1220"/>
+        </a:solidFill>
+      </p:bgPr>
+    </p:bg>
+    <p:spTree>
+      <p:nvGrpSpPr>
+        <p:cNvPr id="1" name=""/>
+        <p:cNvGrpSpPr/>
+        <p:nvPr/>
+      </p:nvGrpSpPr>
+      <p:grpSpPr>
+        <a:xfrm>
+          <a:off x="0" y="0"/>
+          <a:ext cx="0" cy="0"/>
+          <a:chOff x="0" y="0"/>
+          <a:chExt cx="0" cy="0"/>
+        </a:xfrm>
+      </p:grpSpPr>
+      <p:sp>
+        <p:nvSpPr>
+          <p:cNvPr id="2" name="Text 0"/>
+          <p:cNvSpPr/>
+          <p:nvPr/>
+        </p:nvSpPr>
+        <p:spPr>
+          <a:xfrm>
+            <a:off x="685800" y="384048"/>
+            <a:ext cx="10789920" cy="274320"/>
+          </a:xfrm>
+          <a:prstGeom prst="rect">
+            <a:avLst/>
+          </a:prstGeom>
+          <a:noFill/>
+          <a:ln/>
+        </p:spPr>
+        <p:txBody>
+          <a:bodyPr wrap="square" lIns="0" tIns="0" rIns="0" bIns="0" rtlCol="0" anchor="ctr"/>
+          <a:lstStyle/>
+          <a:p>
+            <a:pPr indent="0" marL="0">
+              <a:buNone/>
+            </a:pPr>
+            <a:r>
+              <a:rPr lang="en-US" sz="1200" b="1" spc="300" kern="0" dirty="0">
+                <a:solidFill>
+                  <a:srgbClr val="4FD1E0"/>
+                </a:solidFill>
+                <a:latin typeface="Calibri" pitchFamily="34" charset="0"/>
+                <a:ea typeface="Calibri" pitchFamily="34" charset="-122"/>
+                <a:cs typeface="Calibri" pitchFamily="34" charset="-120"/>
+              </a:rPr>
               <a:t>BOTTOM LINE</a:t>
             </a:r>
             <a:endParaRPr lang="en-US" sz="1200" dirty="0"/>
@@ -5935,13 +7956,13 @@
             <a:r>
               <a:rPr lang="en-US" sz="1200" b="1" spc="300" kern="0" dirty="0">
                 <a:solidFill>
-                  <a:srgbClr val="3FBF7F"/>
-                </a:solidFill>
-                <a:latin typeface="Calibri" pitchFamily="34" charset="0"/>
-                <a:ea typeface="Calibri" pitchFamily="34" charset="-122"/>
-                <a:cs typeface="Calibri" pitchFamily="34" charset="-120"/>
-              </a:rPr>
-              <a:t>THE SCIENTIFIC VALUE</a:t>
+                  <a:srgbClr val="E9B84A"/>
+                </a:solidFill>
+                <a:latin typeface="Calibri" pitchFamily="34" charset="0"/>
+                <a:ea typeface="Calibri" pitchFamily="34" charset="-122"/>
+                <a:cs typeface="Calibri" pitchFamily="34" charset="-120"/>
+              </a:rPr>
+              <a:t>THE PREDICTIVE RULE  ·  MEASURED AGAINST EXACT FCI</a:t>
             </a:r>
             <a:endParaRPr lang="en-US" sz="1200" dirty="0"/>
           </a:p>
@@ -5972,7 +7993,7 @@
               <a:buNone/>
             </a:pPr>
             <a:r>
-              <a:rPr lang="en-US" sz="3300" b="1" dirty="0">
+              <a:rPr lang="en-US" sz="3100" b="1" dirty="0">
                 <a:solidFill>
                   <a:srgbClr val="FFFFFF"/>
                 </a:solidFill>
@@ -5980,32 +8001,100 @@
                 <a:ea typeface="Cambria" pitchFamily="34" charset="-122"/>
                 <a:cs typeface="Cambria" pitchFamily="34" charset="-120"/>
               </a:rPr>
-              <a:t>Built so a skeptic can check every number</a:t>
-            </a:r>
-            <a:endParaRPr lang="en-US" sz="3300" dirty="0"/>
-          </a:p>
-        </p:txBody>
-      </p:sp>
-      <p:sp>
-        <p:nvSpPr>
-          <p:cNvPr id="4" name="Shape 2"/>
-          <p:cNvSpPr/>
-          <p:nvPr/>
-        </p:nvSpPr>
-        <p:spPr>
-          <a:xfrm>
-            <a:off x="685800" y="1783080"/>
-            <a:ext cx="10789920" cy="1005840"/>
+              <a:t>When can you trust a classical reference?</a:t>
+            </a:r>
+            <a:endParaRPr lang="en-US" sz="3100" dirty="0"/>
+          </a:p>
+        </p:txBody>
+      </p:sp>
+      <p:sp>
+        <p:nvSpPr>
+          <p:cNvPr id="4" name="Text 2"/>
+          <p:cNvSpPr/>
+          <p:nvPr/>
+        </p:nvSpPr>
+        <p:spPr>
+          <a:xfrm>
+            <a:off x="685800" y="1627632"/>
+            <a:ext cx="10789920" cy="384048"/>
+          </a:xfrm>
+          <a:prstGeom prst="rect">
+            <a:avLst/>
+          </a:prstGeom>
+          <a:noFill/>
+          <a:ln/>
+        </p:spPr>
+        <p:txBody>
+          <a:bodyPr wrap="square" lIns="0" tIns="0" rIns="0" bIns="0" rtlCol="0" anchor="ctr"/>
+          <a:lstStyle/>
+          <a:p>
+            <a:pPr indent="0" marL="0">
+              <a:buNone/>
+            </a:pPr>
+            <a:r>
+              <a:rPr lang="en-US" sz="1450" dirty="0">
+                <a:solidFill>
+                  <a:srgbClr val="E8EDF7"/>
+                </a:solidFill>
+                <a:latin typeface="Calibri" pitchFamily="34" charset="0"/>
+                <a:ea typeface="Calibri" pitchFamily="34" charset="-122"/>
+                <a:cs typeface="Calibri" pitchFamily="34" charset="-120"/>
+              </a:rPr>
+              <a:t>Two axes silently break a bond dimension you already validated — one measured against exact FCI.</a:t>
+            </a:r>
+            <a:endParaRPr lang="en-US" sz="1450" dirty="0"/>
+          </a:p>
+        </p:txBody>
+      </p:sp>
+      <p:pic>
+        <p:nvPicPr>
+          <p:cNvPr id="5" name="Image 0" descr="/home/user/potomac_advancedmaterials/results/reference_reliability.png">    </p:cNvPr>
+          <p:cNvPicPr>
+            <a:picLocks noChangeAspect="1"/>
+          </p:cNvPicPr>
+          <p:nvPr/>
+        </p:nvPicPr>
+        <p:blipFill>
+          <a:blip r:embed="rId1"/>
+          <a:stretch>
+            <a:fillRect/>
+          </a:stretch>
+        </p:blipFill>
+        <p:spPr>
+          <a:xfrm>
+            <a:off x="960120" y="2057400"/>
+            <a:ext cx="10241280" cy="3703320"/>
+          </a:xfrm>
+          <a:prstGeom prst="rect">
+            <a:avLst/>
+          </a:prstGeom>
+        </p:spPr>
+      </p:pic>
+      <p:sp>
+        <p:nvSpPr>
+          <p:cNvPr id="6" name="Shape 3"/>
+          <p:cNvSpPr/>
+          <p:nvPr/>
+        </p:nvSpPr>
+        <p:spPr>
+          <a:xfrm>
+            <a:off x="685800" y="5852160"/>
+            <a:ext cx="10789920" cy="777240"/>
           </a:xfrm>
           <a:prstGeom prst="roundRect">
             <a:avLst>
-              <a:gd name="adj" fmla="val 7273"/>
+              <a:gd name="adj" fmla="val 9412"/>
             </a:avLst>
           </a:prstGeom>
           <a:solidFill>
-            <a:srgbClr val="151E33"/>
+            <a:srgbClr val="1B2540"/>
           </a:solidFill>
-          <a:ln/>
+          <a:ln w="12700">
+            <a:solidFill>
+              <a:srgbClr val="2A3654"/>
+            </a:solidFill>
+            <a:prstDash val="solid"/>
+          </a:ln>
           <a:effectLst>
             <a:outerShdw sx="100000" sy="100000" kx="0" ky="0" algn="bl" rotWithShape="0" blurRad="127000" dist="38100" dir="5400000">
               <a:srgbClr val="000000">
@@ -6017,53 +8106,14 @@
       </p:sp>
       <p:sp>
         <p:nvSpPr>
-          <p:cNvPr id="5" name="Text 3"/>
-          <p:cNvSpPr/>
-          <p:nvPr/>
-        </p:nvSpPr>
-        <p:spPr>
-          <a:xfrm>
-            <a:off x="1005840" y="1929384"/>
-            <a:ext cx="2651760" cy="365760"/>
-          </a:xfrm>
-          <a:prstGeom prst="rect">
-            <a:avLst/>
-          </a:prstGeom>
-          <a:noFill/>
-          <a:ln/>
-        </p:spPr>
-        <p:txBody>
-          <a:bodyPr wrap="square" lIns="0" tIns="0" rIns="0" bIns="0" rtlCol="0" anchor="ctr"/>
-          <a:lstStyle/>
-          <a:p>
-            <a:pPr indent="0" marL="0">
-              <a:buNone/>
-            </a:pPr>
-            <a:r>
-              <a:rPr lang="en-US" sz="1700" b="1" dirty="0">
-                <a:solidFill>
-                  <a:srgbClr val="3FBF7F"/>
-                </a:solidFill>
-                <a:latin typeface="Cambria" pitchFamily="34" charset="0"/>
-                <a:ea typeface="Cambria" pitchFamily="34" charset="-122"/>
-                <a:cs typeface="Cambria" pitchFamily="34" charset="-120"/>
-              </a:rPr>
-              <a:t>Pre-registered</a:t>
-            </a:r>
-            <a:endParaRPr lang="en-US" sz="1700" dirty="0"/>
-          </a:p>
-        </p:txBody>
-      </p:sp>
-      <p:sp>
-        <p:nvSpPr>
-          <p:cNvPr id="6" name="Text 4"/>
-          <p:cNvSpPr/>
-          <p:nvPr/>
-        </p:nvSpPr>
-        <p:spPr>
-          <a:xfrm>
-            <a:off x="3749040" y="1911096"/>
-            <a:ext cx="7452360" cy="777240"/>
+          <p:cNvPr id="7" name="Text 4"/>
+          <p:cNvSpPr/>
+          <p:nvPr/>
+        </p:nvSpPr>
+        <p:spPr>
+          <a:xfrm>
+            <a:off x="1005840" y="5852160"/>
+            <a:ext cx="10149840" cy="777240"/>
           </a:xfrm>
           <a:prstGeom prst="rect">
             <a:avLst/>
@@ -6077,381 +8127,29 @@
           <a:p>
             <a:pPr indent="0" marL="0">
               <a:lnSpc>
-                <a:spcPts val="1800"/>
+                <a:spcPts val="1600"/>
               </a:lnSpc>
               <a:buNone/>
             </a:pPr>
             <a:r>
-              <a:rPr lang="en-US" sz="1300" dirty="0">
-                <a:solidFill>
-                  <a:srgbClr val="8B98B4"/>
-                </a:solidFill>
-                <a:latin typeface="Calibri" pitchFamily="34" charset="0"/>
-                <a:ea typeface="Calibri" pitchFamily="34" charset="-122"/>
-                <a:cs typeface="Calibri" pitchFamily="34" charset="-120"/>
-              </a:rPr>
-              <a:t>Every judged claim's threshold was git-timestamped BEFORE the run. Outcomes reported as measured — passes, a resource-DNF, a non-convergence.</a:t>
-            </a:r>
-            <a:endParaRPr lang="en-US" sz="1300" dirty="0"/>
-          </a:p>
-        </p:txBody>
-      </p:sp>
-      <p:sp>
-        <p:nvSpPr>
-          <p:cNvPr id="7" name="Shape 5"/>
-          <p:cNvSpPr/>
-          <p:nvPr/>
-        </p:nvSpPr>
-        <p:spPr>
-          <a:xfrm>
-            <a:off x="685800" y="2898648"/>
-            <a:ext cx="10789920" cy="1005840"/>
-          </a:xfrm>
-          <a:prstGeom prst="roundRect">
-            <a:avLst>
-              <a:gd name="adj" fmla="val 7273"/>
-            </a:avLst>
-          </a:prstGeom>
-          <a:solidFill>
-            <a:srgbClr val="151E33"/>
-          </a:solidFill>
-          <a:ln/>
-          <a:effectLst>
-            <a:outerShdw sx="100000" sy="100000" kx="0" ky="0" algn="bl" rotWithShape="0" blurRad="127000" dist="38100" dir="5400000">
-              <a:srgbClr val="000000">
-                <a:alpha val="35000"/>
-              </a:srgbClr>
-            </a:outerShdw>
-          </a:effectLst>
-        </p:spPr>
-      </p:sp>
-      <p:sp>
-        <p:nvSpPr>
-          <p:cNvPr id="8" name="Text 6"/>
-          <p:cNvSpPr/>
-          <p:nvPr/>
-        </p:nvSpPr>
-        <p:spPr>
-          <a:xfrm>
-            <a:off x="1005840" y="3044952"/>
-            <a:ext cx="2651760" cy="365760"/>
-          </a:xfrm>
-          <a:prstGeom prst="rect">
-            <a:avLst/>
-          </a:prstGeom>
-          <a:noFill/>
-          <a:ln/>
-        </p:spPr>
-        <p:txBody>
-          <a:bodyPr wrap="square" lIns="0" tIns="0" rIns="0" bIns="0" rtlCol="0" anchor="ctr"/>
-          <a:lstStyle/>
-          <a:p>
-            <a:pPr indent="0" marL="0">
-              <a:buNone/>
-            </a:pPr>
-            <a:r>
-              <a:rPr lang="en-US" sz="1700" b="1" dirty="0">
-                <a:solidFill>
-                  <a:srgbClr val="4FD1E0"/>
-                </a:solidFill>
-                <a:latin typeface="Cambria" pitchFamily="34" charset="0"/>
-                <a:ea typeface="Cambria" pitchFamily="34" charset="-122"/>
-                <a:cs typeface="Cambria" pitchFamily="34" charset="-120"/>
-              </a:rPr>
-              <a:t>Re-runnable</a:t>
-            </a:r>
-            <a:endParaRPr lang="en-US" sz="1700" dirty="0"/>
-          </a:p>
-        </p:txBody>
-      </p:sp>
-      <p:sp>
-        <p:nvSpPr>
-          <p:cNvPr id="9" name="Text 7"/>
-          <p:cNvSpPr/>
-          <p:nvPr/>
-        </p:nvSpPr>
-        <p:spPr>
-          <a:xfrm>
-            <a:off x="3749040" y="3026664"/>
-            <a:ext cx="7452360" cy="777240"/>
-          </a:xfrm>
-          <a:prstGeom prst="rect">
-            <a:avLst/>
-          </a:prstGeom>
-          <a:noFill/>
-          <a:ln/>
-        </p:spPr>
-        <p:txBody>
-          <a:bodyPr wrap="square" lIns="0" tIns="0" rIns="0" bIns="0" rtlCol="0" anchor="ctr"/>
-          <a:lstStyle/>
-          <a:p>
+              <a:rPr lang="en-US" sz="1250" b="1" dirty="0">
+                <a:solidFill>
+                  <a:srgbClr val="E9B84A"/>
+                </a:solidFill>
+                <a:latin typeface="Calibri" pitchFamily="34" charset="0"/>
+                <a:ea typeface="Calibri" pitchFamily="34" charset="-122"/>
+                <a:cs typeface="Calibri" pitchFamily="34" charset="-120"/>
+              </a:rPr>
+              <a:t>The rule:  </a:t>
+            </a:r>
             <a:pPr indent="0" marL="0">
               <a:lnSpc>
-                <a:spcPts val="1800"/>
+                <a:spcPts val="1600"/>
               </a:lnSpc>
               <a:buNone/>
             </a:pPr>
             <a:r>
-              <a:rPr lang="en-US" sz="1300" dirty="0">
-                <a:solidFill>
-                  <a:srgbClr val="8B98B4"/>
-                </a:solidFill>
-                <a:latin typeface="Calibri" pitchFamily="34" charset="0"/>
-                <a:ea typeface="Calibri" pitchFamily="34" charset="-122"/>
-                <a:cs typeface="Calibri" pitchFamily="34" charset="-120"/>
-              </a:rPr>
-              <a:t>One command re-executes 17 headline scripts and audits 9 GPU/QPU artifacts: 26/26 PASS, no modification needed.</a:t>
-            </a:r>
-            <a:endParaRPr lang="en-US" sz="1300" dirty="0"/>
-          </a:p>
-        </p:txBody>
-      </p:sp>
-      <p:sp>
-        <p:nvSpPr>
-          <p:cNvPr id="10" name="Shape 8"/>
-          <p:cNvSpPr/>
-          <p:nvPr/>
-        </p:nvSpPr>
-        <p:spPr>
-          <a:xfrm>
-            <a:off x="685800" y="4014216"/>
-            <a:ext cx="10789920" cy="1005840"/>
-          </a:xfrm>
-          <a:prstGeom prst="roundRect">
-            <a:avLst>
-              <a:gd name="adj" fmla="val 7273"/>
-            </a:avLst>
-          </a:prstGeom>
-          <a:solidFill>
-            <a:srgbClr val="151E33"/>
-          </a:solidFill>
-          <a:ln/>
-          <a:effectLst>
-            <a:outerShdw sx="100000" sy="100000" kx="0" ky="0" algn="bl" rotWithShape="0" blurRad="127000" dist="38100" dir="5400000">
-              <a:srgbClr val="000000">
-                <a:alpha val="35000"/>
-              </a:srgbClr>
-            </a:outerShdw>
-          </a:effectLst>
-        </p:spPr>
-      </p:sp>
-      <p:sp>
-        <p:nvSpPr>
-          <p:cNvPr id="11" name="Text 9"/>
-          <p:cNvSpPr/>
-          <p:nvPr/>
-        </p:nvSpPr>
-        <p:spPr>
-          <a:xfrm>
-            <a:off x="1005840" y="4160520"/>
-            <a:ext cx="2651760" cy="365760"/>
-          </a:xfrm>
-          <a:prstGeom prst="rect">
-            <a:avLst/>
-          </a:prstGeom>
-          <a:noFill/>
-          <a:ln/>
-        </p:spPr>
-        <p:txBody>
-          <a:bodyPr wrap="square" lIns="0" tIns="0" rIns="0" bIns="0" rtlCol="0" anchor="ctr"/>
-          <a:lstStyle/>
-          <a:p>
-            <a:pPr indent="0" marL="0">
-              <a:buNone/>
-            </a:pPr>
-            <a:r>
-              <a:rPr lang="en-US" sz="1700" b="1" dirty="0">
-                <a:solidFill>
-                  <a:srgbClr val="E9B84A"/>
-                </a:solidFill>
-                <a:latin typeface="Cambria" pitchFamily="34" charset="0"/>
-                <a:ea typeface="Cambria" pitchFamily="34" charset="-122"/>
-                <a:cs typeface="Cambria" pitchFamily="34" charset="-120"/>
-              </a:rPr>
-              <a:t>Self-corrected</a:t>
-            </a:r>
-            <a:endParaRPr lang="en-US" sz="1700" dirty="0"/>
-          </a:p>
-        </p:txBody>
-      </p:sp>
-      <p:sp>
-        <p:nvSpPr>
-          <p:cNvPr id="12" name="Text 10"/>
-          <p:cNvSpPr/>
-          <p:nvPr/>
-        </p:nvSpPr>
-        <p:spPr>
-          <a:xfrm>
-            <a:off x="3749040" y="4142232"/>
-            <a:ext cx="7452360" cy="777240"/>
-          </a:xfrm>
-          <a:prstGeom prst="rect">
-            <a:avLst/>
-          </a:prstGeom>
-          <a:noFill/>
-          <a:ln/>
-        </p:spPr>
-        <p:txBody>
-          <a:bodyPr wrap="square" lIns="0" tIns="0" rIns="0" bIns="0" rtlCol="0" anchor="ctr"/>
-          <a:lstStyle/>
-          <a:p>
-            <a:pPr indent="0" marL="0">
-              <a:lnSpc>
-                <a:spcPts val="1800"/>
-              </a:lnSpc>
-              <a:buNone/>
-            </a:pPr>
-            <a:r>
-              <a:rPr lang="en-US" sz="1300" dirty="0">
-                <a:solidFill>
-                  <a:srgbClr val="8B98B4"/>
-                </a:solidFill>
-                <a:latin typeface="Calibri" pitchFamily="34" charset="0"/>
-                <a:ea typeface="Calibri" pitchFamily="34" charset="-122"/>
-                <a:cs typeface="Calibri" pitchFamily="34" charset="-120"/>
-              </a:rPr>
-              <a:t>Two claims we tested and WITHDREW: an active-space-fragile candidate ranking, and a DFT sign-flip that proved to be an SCF artifact.</a:t>
-            </a:r>
-            <a:endParaRPr lang="en-US" sz="1300" dirty="0"/>
-          </a:p>
-        </p:txBody>
-      </p:sp>
-      <p:sp>
-        <p:nvSpPr>
-          <p:cNvPr id="13" name="Shape 11"/>
-          <p:cNvSpPr/>
-          <p:nvPr/>
-        </p:nvSpPr>
-        <p:spPr>
-          <a:xfrm>
-            <a:off x="685800" y="5129784"/>
-            <a:ext cx="10789920" cy="1005840"/>
-          </a:xfrm>
-          <a:prstGeom prst="roundRect">
-            <a:avLst>
-              <a:gd name="adj" fmla="val 7273"/>
-            </a:avLst>
-          </a:prstGeom>
-          <a:solidFill>
-            <a:srgbClr val="151E33"/>
-          </a:solidFill>
-          <a:ln/>
-          <a:effectLst>
-            <a:outerShdw sx="100000" sy="100000" kx="0" ky="0" algn="bl" rotWithShape="0" blurRad="127000" dist="38100" dir="5400000">
-              <a:srgbClr val="000000">
-                <a:alpha val="35000"/>
-              </a:srgbClr>
-            </a:outerShdw>
-          </a:effectLst>
-        </p:spPr>
-      </p:sp>
-      <p:sp>
-        <p:nvSpPr>
-          <p:cNvPr id="14" name="Text 12"/>
-          <p:cNvSpPr/>
-          <p:nvPr/>
-        </p:nvSpPr>
-        <p:spPr>
-          <a:xfrm>
-            <a:off x="1005840" y="5276088"/>
-            <a:ext cx="2651760" cy="365760"/>
-          </a:xfrm>
-          <a:prstGeom prst="rect">
-            <a:avLst/>
-          </a:prstGeom>
-          <a:noFill/>
-          <a:ln/>
-        </p:spPr>
-        <p:txBody>
-          <a:bodyPr wrap="square" lIns="0" tIns="0" rIns="0" bIns="0" rtlCol="0" anchor="ctr"/>
-          <a:lstStyle/>
-          <a:p>
-            <a:pPr indent="0" marL="0">
-              <a:buNone/>
-            </a:pPr>
-            <a:r>
-              <a:rPr lang="en-US" sz="1700" b="1" dirty="0">
-                <a:solidFill>
-                  <a:srgbClr val="9A8CFF"/>
-                </a:solidFill>
-                <a:latin typeface="Cambria" pitchFamily="34" charset="0"/>
-                <a:ea typeface="Cambria" pitchFamily="34" charset="-122"/>
-                <a:cs typeface="Cambria" pitchFamily="34" charset="-120"/>
-              </a:rPr>
-              <a:t>Reference-correcting</a:t>
-            </a:r>
-            <a:endParaRPr lang="en-US" sz="1700" dirty="0"/>
-          </a:p>
-        </p:txBody>
-      </p:sp>
-      <p:sp>
-        <p:nvSpPr>
-          <p:cNvPr id="15" name="Text 13"/>
-          <p:cNvSpPr/>
-          <p:nvPr/>
-        </p:nvSpPr>
-        <p:spPr>
-          <a:xfrm>
-            <a:off x="3749040" y="5257800"/>
-            <a:ext cx="7452360" cy="777240"/>
-          </a:xfrm>
-          <a:prstGeom prst="rect">
-            <a:avLst/>
-          </a:prstGeom>
-          <a:noFill/>
-          <a:ln/>
-        </p:spPr>
-        <p:txBody>
-          <a:bodyPr wrap="square" lIns="0" tIns="0" rIns="0" bIns="0" rtlCol="0" anchor="ctr"/>
-          <a:lstStyle/>
-          <a:p>
-            <a:pPr indent="0" marL="0">
-              <a:lnSpc>
-                <a:spcPts val="1800"/>
-              </a:lnSpc>
-              <a:buNone/>
-            </a:pPr>
-            <a:r>
-              <a:rPr lang="en-US" sz="1300" dirty="0">
-                <a:solidFill>
-                  <a:srgbClr val="8B98B4"/>
-                </a:solidFill>
-                <a:latin typeface="Calibri" pitchFamily="34" charset="0"/>
-                <a:ea typeface="Calibri" pitchFamily="34" charset="-122"/>
-                <a:cs typeface="Calibri" pitchFamily="34" charset="-120"/>
-              </a:rPr>
-              <a:t>At 38q our solver drops BELOW the classical DMRG reference — and χ=800/1200 confirm it is the reference that was truncated, not us.</a:t>
-            </a:r>
-            <a:endParaRPr lang="en-US" sz="1300" dirty="0"/>
-          </a:p>
-        </p:txBody>
-      </p:sp>
-      <p:sp>
-        <p:nvSpPr>
-          <p:cNvPr id="16" name="Text 14"/>
-          <p:cNvSpPr/>
-          <p:nvPr/>
-        </p:nvSpPr>
-        <p:spPr>
-          <a:xfrm>
-            <a:off x="685800" y="6263640"/>
-            <a:ext cx="10789920" cy="365760"/>
-          </a:xfrm>
-          <a:prstGeom prst="rect">
-            <a:avLst/>
-          </a:prstGeom>
-          <a:noFill/>
-          <a:ln/>
-        </p:spPr>
-        <p:txBody>
-          <a:bodyPr wrap="square" lIns="0" tIns="0" rIns="0" bIns="0" rtlCol="0" anchor="ctr"/>
-          <a:lstStyle/>
-          <a:p>
-            <a:pPr indent="0" marL="0">
-              <a:buNone/>
-            </a:pPr>
-            <a:r>
-              <a:rPr lang="en-US" sz="1500" i="1" dirty="0">
+              <a:rPr lang="en-US" sz="1250" dirty="0">
                 <a:solidFill>
                   <a:srgbClr val="E8EDF7"/>
                 </a:solidFill>
@@ -6459,9 +8157,9 @@
                 <a:ea typeface="Calibri" pitchFamily="34" charset="-122"/>
                 <a:cs typeface="Calibri" pitchFamily="34" charset="-120"/>
               </a:rPr>
-              <a:t>We publish the negatives. That is why the positives should be believed.</a:t>
-            </a:r>
-            <a:endParaRPr lang="en-US" sz="1500" dirty="0"/>
+              <a:t>a bond dimension validated on a smaller or easier system tells you nothing about its error on a larger or harder one — and DMRG gives no internal signal either way. That is where an independent check earns its keep.</a:t>
+            </a:r>
+            <a:endParaRPr lang="en-US" sz="1250" dirty="0"/>
           </a:p>
         </p:txBody>
       </p:sp>
@@ -6524,13 +8222,13 @@
             <a:r>
               <a:rPr lang="en-US" sz="1200" b="1" spc="300" kern="0" dirty="0">
                 <a:solidFill>
-                  <a:srgbClr val="4FD1E0"/>
-                </a:solidFill>
-                <a:latin typeface="Calibri" pitchFamily="34" charset="0"/>
-                <a:ea typeface="Calibri" pitchFamily="34" charset="-122"/>
-                <a:cs typeface="Calibri" pitchFamily="34" charset="-120"/>
-              </a:rPr>
-              <a:t>EXECUTED — EVERY NUMBER TRACES TO A COMMITTED FILE</a:t>
+                  <a:srgbClr val="3FBF7F"/>
+                </a:solidFill>
+                <a:latin typeface="Calibri" pitchFamily="34" charset="0"/>
+                <a:ea typeface="Calibri" pitchFamily="34" charset="-122"/>
+                <a:cs typeface="Calibri" pitchFamily="34" charset="-120"/>
+              </a:rPr>
+              <a:t>THE STRONGEST SCIENTIFIC RESULT</a:t>
             </a:r>
             <a:endParaRPr lang="en-US" sz="1200" dirty="0"/>
           </a:p>
@@ -6561,7 +8259,7 @@
               <a:buNone/>
             </a:pPr>
             <a:r>
-              <a:rPr lang="en-US" sz="3300" b="1" dirty="0">
+              <a:rPr lang="en-US" sz="3100" b="1" dirty="0">
                 <a:solidFill>
                   <a:srgbClr val="FFFFFF"/>
                 </a:solidFill>
@@ -6569,26 +8267,68 @@
                 <a:ea typeface="Cambria" pitchFamily="34" charset="-122"/>
                 <a:cs typeface="Cambria" pitchFamily="34" charset="-120"/>
               </a:rPr>
-              <a:t>What actually ran</a:t>
-            </a:r>
-            <a:endParaRPr lang="en-US" sz="3300" dirty="0"/>
-          </a:p>
-        </p:txBody>
-      </p:sp>
-      <p:sp>
-        <p:nvSpPr>
-          <p:cNvPr id="4" name="Shape 2"/>
-          <p:cNvSpPr/>
-          <p:nvPr/>
-        </p:nvSpPr>
-        <p:spPr>
-          <a:xfrm>
-            <a:off x="685800" y="1783080"/>
-            <a:ext cx="3502152" cy="2011680"/>
+              <a:t>The 40-qubit exact energy — pinned twice</a:t>
+            </a:r>
+            <a:endParaRPr lang="en-US" sz="3100" dirty="0"/>
+          </a:p>
+        </p:txBody>
+      </p:sp>
+      <p:sp>
+        <p:nvSpPr>
+          <p:cNvPr id="4" name="Text 2"/>
+          <p:cNvSpPr/>
+          <p:nvPr/>
+        </p:nvSpPr>
+        <p:spPr>
+          <a:xfrm>
+            <a:off x="685800" y="1645920"/>
+            <a:ext cx="6217920" cy="1051560"/>
+          </a:xfrm>
+          <a:prstGeom prst="rect">
+            <a:avLst/>
+          </a:prstGeom>
+          <a:noFill/>
+          <a:ln/>
+        </p:spPr>
+        <p:txBody>
+          <a:bodyPr wrap="square" lIns="0" tIns="0" rIns="0" bIns="0" rtlCol="0" anchor="ctr"/>
+          <a:lstStyle/>
+          <a:p>
+            <a:pPr indent="0" marL="0">
+              <a:lnSpc>
+                <a:spcPts val="2200"/>
+              </a:lnSpc>
+              <a:buNone/>
+            </a:pPr>
+            <a:r>
+              <a:rPr lang="en-US" sz="1450" dirty="0">
+                <a:solidFill>
+                  <a:srgbClr val="E8EDF7"/>
+                </a:solidFill>
+                <a:latin typeface="Calibri" pitchFamily="34" charset="0"/>
+                <a:ea typeface="Calibri" pitchFamily="34" charset="-122"/>
+                <a:cs typeface="Calibri" pitchFamily="34" charset="-120"/>
+              </a:rPr>
+              <a:t>Full CI at 40 qubits is intractable (~3.4×10¹⁰ determinants), so any “exact” value is an extrapolation you must take on trust. We pin it by two independent routes.</a:t>
+            </a:r>
+            <a:endParaRPr lang="en-US" sz="1450" dirty="0"/>
+          </a:p>
+        </p:txBody>
+      </p:sp>
+      <p:sp>
+        <p:nvSpPr>
+          <p:cNvPr id="5" name="Shape 3"/>
+          <p:cNvSpPr/>
+          <p:nvPr/>
+        </p:nvSpPr>
+        <p:spPr>
+          <a:xfrm>
+            <a:off x="685800" y="2788920"/>
+            <a:ext cx="6217920" cy="1298448"/>
           </a:xfrm>
           <a:prstGeom prst="roundRect">
             <a:avLst>
-              <a:gd name="adj" fmla="val 3636"/>
+              <a:gd name="adj" fmla="val 5634"/>
             </a:avLst>
           </a:prstGeom>
           <a:solidFill>
@@ -6606,30 +8346,30 @@
       </p:sp>
       <p:sp>
         <p:nvSpPr>
-          <p:cNvPr id="5" name="Text 3"/>
-          <p:cNvSpPr/>
-          <p:nvPr/>
-        </p:nvSpPr>
-        <p:spPr>
-          <a:xfrm>
-            <a:off x="923544" y="1929384"/>
-            <a:ext cx="3063240" cy="411480"/>
-          </a:xfrm>
-          <a:prstGeom prst="rect">
-            <a:avLst/>
-          </a:prstGeom>
-          <a:noFill/>
-          <a:ln/>
-        </p:spPr>
-        <p:txBody>
-          <a:bodyPr wrap="square" lIns="0" tIns="0" rIns="0" bIns="0" rtlCol="0" anchor="ctr"/>
-          <a:lstStyle/>
-          <a:p>
-            <a:pPr indent="0" marL="0">
-              <a:buNone/>
-            </a:pPr>
-            <a:r>
-              <a:rPr lang="en-US" sz="2000" b="1" dirty="0">
+          <p:cNvPr id="6" name="Text 4"/>
+          <p:cNvSpPr/>
+          <p:nvPr/>
+        </p:nvSpPr>
+        <p:spPr>
+          <a:xfrm>
+            <a:off x="960120" y="2916936"/>
+            <a:ext cx="1371600" cy="292608"/>
+          </a:xfrm>
+          <a:prstGeom prst="rect">
+            <a:avLst/>
+          </a:prstGeom>
+          <a:noFill/>
+          <a:ln/>
+        </p:spPr>
+        <p:txBody>
+          <a:bodyPr wrap="square" lIns="0" tIns="0" rIns="0" bIns="0" rtlCol="0" anchor="ctr"/>
+          <a:lstStyle/>
+          <a:p>
+            <a:pPr indent="0" marL="0">
+              <a:buNone/>
+            </a:pPr>
+            <a:r>
+              <a:rPr lang="en-US" sz="1300" b="1" spc="150" kern="0" dirty="0">
                 <a:solidFill>
                   <a:srgbClr val="4FD1E0"/>
                 </a:solidFill>
@@ -6637,38 +8377,38 @@
                 <a:ea typeface="Calibri" pitchFamily="34" charset="-122"/>
                 <a:cs typeface="Calibri" pitchFamily="34" charset="-120"/>
               </a:rPr>
-              <a:t>+1.226 mHa</a:t>
-            </a:r>
-            <a:endParaRPr lang="en-US" sz="2000" dirty="0"/>
-          </a:p>
-        </p:txBody>
-      </p:sp>
-      <p:sp>
-        <p:nvSpPr>
-          <p:cNvPr id="6" name="Text 4"/>
-          <p:cNvSpPr/>
-          <p:nvPr/>
-        </p:nvSpPr>
-        <p:spPr>
-          <a:xfrm>
-            <a:off x="923544" y="2350008"/>
-            <a:ext cx="3063240" cy="274320"/>
-          </a:xfrm>
-          <a:prstGeom prst="rect">
-            <a:avLst/>
-          </a:prstGeom>
-          <a:noFill/>
-          <a:ln/>
-        </p:spPr>
-        <p:txBody>
-          <a:bodyPr wrap="square" lIns="0" tIns="0" rIns="0" bIns="0" rtlCol="0" anchor="ctr"/>
-          <a:lstStyle/>
-          <a:p>
-            <a:pPr indent="0" marL="0">
-              <a:buNone/>
-            </a:pPr>
-            <a:r>
-              <a:rPr lang="en-US" sz="1300" b="1" dirty="0">
+              <a:t>Route A</a:t>
+            </a:r>
+            <a:endParaRPr lang="en-US" sz="1300" dirty="0"/>
+          </a:p>
+        </p:txBody>
+      </p:sp>
+      <p:sp>
+        <p:nvSpPr>
+          <p:cNvPr id="7" name="Text 5"/>
+          <p:cNvSpPr/>
+          <p:nvPr/>
+        </p:nvSpPr>
+        <p:spPr>
+          <a:xfrm>
+            <a:off x="2286000" y="2916936"/>
+            <a:ext cx="2743200" cy="292608"/>
+          </a:xfrm>
+          <a:prstGeom prst="rect">
+            <a:avLst/>
+          </a:prstGeom>
+          <a:noFill/>
+          <a:ln/>
+        </p:spPr>
+        <p:txBody>
+          <a:bodyPr wrap="square" lIns="0" tIns="0" rIns="0" bIns="0" rtlCol="0" anchor="ctr"/>
+          <a:lstStyle/>
+          <a:p>
+            <a:pPr indent="0" marL="0">
+              <a:buNone/>
+            </a:pPr>
+            <a:r>
+              <a:rPr lang="en-US" sz="1250" b="1" dirty="0">
                 <a:solidFill>
                   <a:srgbClr val="FFFFFF"/>
                 </a:solidFill>
@@ -6676,22 +8416,61 @@
                 <a:ea typeface="Calibri" pitchFamily="34" charset="-122"/>
                 <a:cs typeface="Calibri" pitchFamily="34" charset="-120"/>
               </a:rPr>
-              <a:t>40q flagship on GPU</a:t>
-            </a:r>
-            <a:endParaRPr lang="en-US" sz="1300" dirty="0"/>
-          </a:p>
-        </p:txBody>
-      </p:sp>
-      <p:sp>
-        <p:nvSpPr>
-          <p:cNvPr id="7" name="Text 5"/>
-          <p:cNvSpPr/>
-          <p:nvPr/>
-        </p:nvSpPr>
-        <p:spPr>
-          <a:xfrm>
-            <a:off x="923544" y="2660904"/>
-            <a:ext cx="3063240" cy="1005840"/>
+              <a:t>classical tensor network</a:t>
+            </a:r>
+            <a:endParaRPr lang="en-US" sz="1250" dirty="0"/>
+          </a:p>
+        </p:txBody>
+      </p:sp>
+      <p:sp>
+        <p:nvSpPr>
+          <p:cNvPr id="8" name="Text 6"/>
+          <p:cNvSpPr/>
+          <p:nvPr/>
+        </p:nvSpPr>
+        <p:spPr>
+          <a:xfrm>
+            <a:off x="4114800" y="2880360"/>
+            <a:ext cx="2743200" cy="365760"/>
+          </a:xfrm>
+          <a:prstGeom prst="rect">
+            <a:avLst/>
+          </a:prstGeom>
+          <a:noFill/>
+          <a:ln/>
+        </p:spPr>
+        <p:txBody>
+          <a:bodyPr wrap="square" lIns="0" tIns="0" rIns="0" bIns="0" rtlCol="0" anchor="ctr"/>
+          <a:lstStyle/>
+          <a:p>
+            <a:pPr algn="r" indent="0" marL="0">
+              <a:buNone/>
+            </a:pPr>
+            <a:r>
+              <a:rPr lang="en-US" sz="1600" b="1" dirty="0">
+                <a:solidFill>
+                  <a:srgbClr val="4FD1E0"/>
+                </a:solidFill>
+                <a:latin typeface="Calibri" pitchFamily="34" charset="0"/>
+                <a:ea typeface="Calibri" pitchFamily="34" charset="-122"/>
+                <a:cs typeface="Calibri" pitchFamily="34" charset="-120"/>
+              </a:rPr>
+              <a:t>−10.293599 Ha</a:t>
+            </a:r>
+            <a:endParaRPr lang="en-US" sz="1600" dirty="0"/>
+          </a:p>
+        </p:txBody>
+      </p:sp>
+      <p:sp>
+        <p:nvSpPr>
+          <p:cNvPr id="9" name="Text 7"/>
+          <p:cNvSpPr/>
+          <p:nvPr/>
+        </p:nvSpPr>
+        <p:spPr>
+          <a:xfrm>
+            <a:off x="960120" y="3319272"/>
+            <a:ext cx="5669280" cy="640080"/>
           </a:xfrm>
           <a:prstGeom prst="rect">
             <a:avLst/>
@@ -6718,7 +8497,7 @@
                 <a:ea typeface="Calibri" pitchFamily="34" charset="-122"/>
                 <a:cs typeface="Calibri" pitchFamily="34" charset="-120"/>
               </a:rPr>
-              <a:t>Chemically accurate vs its frozen DMRG(χ=400) reference at 450,257 determinants — pre-registered criterion met.</a:t>
+              <a:t>block2 DMRG χ=400→2400, extrapolated on discarded weight → 0</a:t>
             </a:r>
             <a:endParaRPr lang="en-US" sz="1150" dirty="0"/>
           </a:p>
@@ -6726,18 +8505,18 @@
       </p:sp>
       <p:sp>
         <p:nvSpPr>
-          <p:cNvPr id="8" name="Shape 6"/>
-          <p:cNvSpPr/>
-          <p:nvPr/>
-        </p:nvSpPr>
-        <p:spPr>
-          <a:xfrm>
-            <a:off x="4343400" y="1783080"/>
-            <a:ext cx="3502152" cy="2011680"/>
+          <p:cNvPr id="10" name="Shape 8"/>
+          <p:cNvSpPr/>
+          <p:nvPr/>
+        </p:nvSpPr>
+        <p:spPr>
+          <a:xfrm>
+            <a:off x="685800" y="4206240"/>
+            <a:ext cx="6217920" cy="1298448"/>
           </a:xfrm>
           <a:prstGeom prst="roundRect">
             <a:avLst>
-              <a:gd name="adj" fmla="val 3636"/>
+              <a:gd name="adj" fmla="val 5634"/>
             </a:avLst>
           </a:prstGeom>
           <a:solidFill>
@@ -6755,69 +8534,69 @@
       </p:sp>
       <p:sp>
         <p:nvSpPr>
-          <p:cNvPr id="9" name="Text 7"/>
-          <p:cNvSpPr/>
-          <p:nvPr/>
-        </p:nvSpPr>
-        <p:spPr>
-          <a:xfrm>
-            <a:off x="4581144" y="1929384"/>
-            <a:ext cx="3063240" cy="411480"/>
-          </a:xfrm>
-          <a:prstGeom prst="rect">
-            <a:avLst/>
-          </a:prstGeom>
-          <a:noFill/>
-          <a:ln/>
-        </p:spPr>
-        <p:txBody>
-          <a:bodyPr wrap="square" lIns="0" tIns="0" rIns="0" bIns="0" rtlCol="0" anchor="ctr"/>
-          <a:lstStyle/>
-          <a:p>
-            <a:pPr indent="0" marL="0">
-              <a:buNone/>
-            </a:pPr>
-            <a:r>
-              <a:rPr lang="en-US" sz="2000" b="1" dirty="0">
-                <a:solidFill>
-                  <a:srgbClr val="3FBF7F"/>
-                </a:solidFill>
-                <a:latin typeface="Calibri" pitchFamily="34" charset="0"/>
-                <a:ea typeface="Calibri" pitchFamily="34" charset="-122"/>
-                <a:cs typeface="Calibri" pitchFamily="34" charset="-120"/>
-              </a:rPr>
-              <a:t>+1.59 mHa</a:t>
-            </a:r>
-            <a:endParaRPr lang="en-US" sz="2000" dirty="0"/>
-          </a:p>
-        </p:txBody>
-      </p:sp>
-      <p:sp>
-        <p:nvSpPr>
-          <p:cNvPr id="10" name="Text 8"/>
-          <p:cNvSpPr/>
-          <p:nvPr/>
-        </p:nvSpPr>
-        <p:spPr>
-          <a:xfrm>
-            <a:off x="4581144" y="2350008"/>
-            <a:ext cx="3063240" cy="274320"/>
-          </a:xfrm>
-          <a:prstGeom prst="rect">
-            <a:avLst/>
-          </a:prstGeom>
-          <a:noFill/>
-          <a:ln/>
-        </p:spPr>
-        <p:txBody>
-          <a:bodyPr wrap="square" lIns="0" tIns="0" rIns="0" bIns="0" rtlCol="0" anchor="ctr"/>
-          <a:lstStyle/>
-          <a:p>
-            <a:pPr indent="0" marL="0">
-              <a:buNone/>
-            </a:pPr>
-            <a:r>
-              <a:rPr lang="en-US" sz="1300" b="1" dirty="0">
+          <p:cNvPr id="11" name="Text 9"/>
+          <p:cNvSpPr/>
+          <p:nvPr/>
+        </p:nvSpPr>
+        <p:spPr>
+          <a:xfrm>
+            <a:off x="960120" y="4334256"/>
+            <a:ext cx="1371600" cy="292608"/>
+          </a:xfrm>
+          <a:prstGeom prst="rect">
+            <a:avLst/>
+          </a:prstGeom>
+          <a:noFill/>
+          <a:ln/>
+        </p:spPr>
+        <p:txBody>
+          <a:bodyPr wrap="square" lIns="0" tIns="0" rIns="0" bIns="0" rtlCol="0" anchor="ctr"/>
+          <a:lstStyle/>
+          <a:p>
+            <a:pPr indent="0" marL="0">
+              <a:buNone/>
+            </a:pPr>
+            <a:r>
+              <a:rPr lang="en-US" sz="1300" b="1" spc="150" kern="0" dirty="0">
+                <a:solidFill>
+                  <a:srgbClr val="9A8CFF"/>
+                </a:solidFill>
+                <a:latin typeface="Calibri" pitchFamily="34" charset="0"/>
+                <a:ea typeface="Calibri" pitchFamily="34" charset="-122"/>
+                <a:cs typeface="Calibri" pitchFamily="34" charset="-120"/>
+              </a:rPr>
+              <a:t>Route B</a:t>
+            </a:r>
+            <a:endParaRPr lang="en-US" sz="1300" dirty="0"/>
+          </a:p>
+        </p:txBody>
+      </p:sp>
+      <p:sp>
+        <p:nvSpPr>
+          <p:cNvPr id="12" name="Text 10"/>
+          <p:cNvSpPr/>
+          <p:nvPr/>
+        </p:nvSpPr>
+        <p:spPr>
+          <a:xfrm>
+            <a:off x="2286000" y="4334256"/>
+            <a:ext cx="2743200" cy="292608"/>
+          </a:xfrm>
+          <a:prstGeom prst="rect">
+            <a:avLst/>
+          </a:prstGeom>
+          <a:noFill/>
+          <a:ln/>
+        </p:spPr>
+        <p:txBody>
+          <a:bodyPr wrap="square" lIns="0" tIns="0" rIns="0" bIns="0" rtlCol="0" anchor="ctr"/>
+          <a:lstStyle/>
+          <a:p>
+            <a:pPr indent="0" marL="0">
+              <a:buNone/>
+            </a:pPr>
+            <a:r>
+              <a:rPr lang="en-US" sz="1250" b="1" dirty="0">
                 <a:solidFill>
                   <a:srgbClr val="FFFFFF"/>
                 </a:solidFill>
@@ -6825,22 +8604,61 @@
                 <a:ea typeface="Calibri" pitchFamily="34" charset="-122"/>
                 <a:cs typeface="Calibri" pitchFamily="34" charset="-120"/>
               </a:rPr>
-              <a:t>40q absolute anchor</a:t>
-            </a:r>
-            <a:endParaRPr lang="en-US" sz="1300" dirty="0"/>
-          </a:p>
-        </p:txBody>
-      </p:sp>
-      <p:sp>
-        <p:nvSpPr>
-          <p:cNvPr id="11" name="Text 9"/>
-          <p:cNvSpPr/>
-          <p:nvPr/>
-        </p:nvSpPr>
-        <p:spPr>
-          <a:xfrm>
-            <a:off x="4581144" y="2660904"/>
-            <a:ext cx="3063240" cy="1005840"/>
+              <a:t>determinant selection</a:t>
+            </a:r>
+            <a:endParaRPr lang="en-US" sz="1250" dirty="0"/>
+          </a:p>
+        </p:txBody>
+      </p:sp>
+      <p:sp>
+        <p:nvSpPr>
+          <p:cNvPr id="13" name="Text 11"/>
+          <p:cNvSpPr/>
+          <p:nvPr/>
+        </p:nvSpPr>
+        <p:spPr>
+          <a:xfrm>
+            <a:off x="4114800" y="4297680"/>
+            <a:ext cx="2743200" cy="365760"/>
+          </a:xfrm>
+          <a:prstGeom prst="rect">
+            <a:avLst/>
+          </a:prstGeom>
+          <a:noFill/>
+          <a:ln/>
+        </p:spPr>
+        <p:txBody>
+          <a:bodyPr wrap="square" lIns="0" tIns="0" rIns="0" bIns="0" rtlCol="0" anchor="ctr"/>
+          <a:lstStyle/>
+          <a:p>
+            <a:pPr algn="r" indent="0" marL="0">
+              <a:buNone/>
+            </a:pPr>
+            <a:r>
+              <a:rPr lang="en-US" sz="1600" b="1" dirty="0">
+                <a:solidFill>
+                  <a:srgbClr val="9A8CFF"/>
+                </a:solidFill>
+                <a:latin typeface="Calibri" pitchFamily="34" charset="0"/>
+                <a:ea typeface="Calibri" pitchFamily="34" charset="-122"/>
+                <a:cs typeface="Calibri" pitchFamily="34" charset="-120"/>
+              </a:rPr>
+              <a:t>−10.293606 Ha</a:t>
+            </a:r>
+            <a:endParaRPr lang="en-US" sz="1600" dirty="0"/>
+          </a:p>
+        </p:txBody>
+      </p:sp>
+      <p:sp>
+        <p:nvSpPr>
+          <p:cNvPr id="14" name="Text 12"/>
+          <p:cNvSpPr/>
+          <p:nvPr/>
+        </p:nvSpPr>
+        <p:spPr>
+          <a:xfrm>
+            <a:off x="960120" y="4736592"/>
+            <a:ext cx="5669280" cy="640080"/>
           </a:xfrm>
           <a:prstGeom prst="rect">
             <a:avLst/>
@@ -6867,7 +8685,7 @@
                 <a:ea typeface="Calibri" pitchFamily="34" charset="-122"/>
                 <a:cs typeface="Calibri" pitchFamily="34" charset="-120"/>
               </a:rPr>
-              <a:t>Independent DMRG extrapolation to the near-exact limit; robust to ±0.05 mHa under a leave-one-out jackknife.</a:t>
+              <a:t>selected-CI/QSCI on 750,257 dets, extrapolated on PT2 → 0</a:t>
             </a:r>
             <a:endParaRPr lang="en-US" sz="1150" dirty="0"/>
           </a:p>
@@ -6875,24 +8693,29 @@
       </p:sp>
       <p:sp>
         <p:nvSpPr>
-          <p:cNvPr id="12" name="Shape 10"/>
-          <p:cNvSpPr/>
-          <p:nvPr/>
-        </p:nvSpPr>
-        <p:spPr>
-          <a:xfrm>
-            <a:off x="8001000" y="1783080"/>
-            <a:ext cx="3502152" cy="2011680"/>
+          <p:cNvPr id="15" name="Shape 13"/>
+          <p:cNvSpPr/>
+          <p:nvPr/>
+        </p:nvSpPr>
+        <p:spPr>
+          <a:xfrm>
+            <a:off x="685800" y="5623560"/>
+            <a:ext cx="6217920" cy="960120"/>
           </a:xfrm>
           <a:prstGeom prst="roundRect">
             <a:avLst>
-              <a:gd name="adj" fmla="val 3636"/>
+              <a:gd name="adj" fmla="val 7619"/>
             </a:avLst>
           </a:prstGeom>
           <a:solidFill>
-            <a:srgbClr val="151E33"/>
+            <a:srgbClr val="1B2540"/>
           </a:solidFill>
-          <a:ln/>
+          <a:ln w="12700">
+            <a:solidFill>
+              <a:srgbClr val="2A3654"/>
+            </a:solidFill>
+            <a:prstDash val="solid"/>
+          </a:ln>
           <a:effectLst>
             <a:outerShdw sx="100000" sy="100000" kx="0" ky="0" algn="bl" rotWithShape="0" blurRad="127000" dist="38100" dir="5400000">
               <a:srgbClr val="000000">
@@ -6904,92 +8727,14 @@
       </p:sp>
       <p:sp>
         <p:nvSpPr>
-          <p:cNvPr id="13" name="Text 11"/>
-          <p:cNvSpPr/>
-          <p:nvPr/>
-        </p:nvSpPr>
-        <p:spPr>
-          <a:xfrm>
-            <a:off x="8238744" y="1929384"/>
-            <a:ext cx="3063240" cy="411480"/>
-          </a:xfrm>
-          <a:prstGeom prst="rect">
-            <a:avLst/>
-          </a:prstGeom>
-          <a:noFill/>
-          <a:ln/>
-        </p:spPr>
-        <p:txBody>
-          <a:bodyPr wrap="square" lIns="0" tIns="0" rIns="0" bIns="0" rtlCol="0" anchor="ctr"/>
-          <a:lstStyle/>
-          <a:p>
-            <a:pPr indent="0" marL="0">
-              <a:buNone/>
-            </a:pPr>
-            <a:r>
-              <a:rPr lang="en-US" sz="2000" b="1" dirty="0">
-                <a:solidFill>
-                  <a:srgbClr val="9A8CFF"/>
-                </a:solidFill>
-                <a:latin typeface="Calibri" pitchFamily="34" charset="0"/>
-                <a:ea typeface="Calibri" pitchFamily="34" charset="-122"/>
-                <a:cs typeface="Calibri" pitchFamily="34" charset="-120"/>
-              </a:rPr>
-              <a:t>−3.784 / −0.399</a:t>
-            </a:r>
-            <a:endParaRPr lang="en-US" sz="2000" dirty="0"/>
-          </a:p>
-        </p:txBody>
-      </p:sp>
-      <p:sp>
-        <p:nvSpPr>
-          <p:cNvPr id="14" name="Text 12"/>
-          <p:cNvSpPr/>
-          <p:nvPr/>
-        </p:nvSpPr>
-        <p:spPr>
-          <a:xfrm>
-            <a:off x="8238744" y="2350008"/>
-            <a:ext cx="3063240" cy="274320"/>
-          </a:xfrm>
-          <a:prstGeom prst="rect">
-            <a:avLst/>
-          </a:prstGeom>
-          <a:noFill/>
-          <a:ln/>
-        </p:spPr>
-        <p:txBody>
-          <a:bodyPr wrap="square" lIns="0" tIns="0" rIns="0" bIns="0" rtlCol="0" anchor="ctr"/>
-          <a:lstStyle/>
-          <a:p>
-            <a:pPr indent="0" marL="0">
-              <a:buNone/>
-            </a:pPr>
-            <a:r>
-              <a:rPr lang="en-US" sz="1300" b="1" dirty="0">
-                <a:solidFill>
-                  <a:srgbClr val="FFFFFF"/>
-                </a:solidFill>
-                <a:latin typeface="Calibri" pitchFamily="34" charset="0"/>
-                <a:ea typeface="Calibri" pitchFamily="34" charset="-122"/>
-                <a:cs typeface="Calibri" pitchFamily="34" charset="-120"/>
-              </a:rPr>
-              <a:t>38q reference corrections</a:t>
-            </a:r>
-            <a:endParaRPr lang="en-US" sz="1300" dirty="0"/>
-          </a:p>
-        </p:txBody>
-      </p:sp>
-      <p:sp>
-        <p:nvSpPr>
-          <p:cNvPr id="15" name="Text 13"/>
-          <p:cNvSpPr/>
-          <p:nvPr/>
-        </p:nvSpPr>
-        <p:spPr>
-          <a:xfrm>
-            <a:off x="8238744" y="2660904"/>
-            <a:ext cx="3063240" cy="1005840"/>
+          <p:cNvPr id="16" name="Text 14"/>
+          <p:cNvSpPr/>
+          <p:nvPr/>
+        </p:nvSpPr>
+        <p:spPr>
+          <a:xfrm>
+            <a:off x="1005840" y="5623560"/>
+            <a:ext cx="5577840" cy="960120"/>
           </a:xfrm>
           <a:prstGeom prst="rect">
             <a:avLst/>
@@ -7008,75 +8753,7 @@
               <a:buNone/>
             </a:pPr>
             <a:r>
-              <a:rPr lang="en-US" sz="1150" dirty="0">
-                <a:solidFill>
-                  <a:srgbClr val="8B98B4"/>
-                </a:solidFill>
-                <a:latin typeface="Calibri" pitchFamily="34" charset="0"/>
-                <a:ea typeface="Calibri" pitchFamily="34" charset="-122"/>
-                <a:cs typeface="Calibri" pitchFamily="34" charset="-120"/>
-              </a:rPr>
-              <a:t>CrO and the real Sn₂O₂ EUV motif land below their same-CAS DMRG references — mechanism confirmed at three χ.</a:t>
-            </a:r>
-            <a:endParaRPr lang="en-US" sz="1150" dirty="0"/>
-          </a:p>
-        </p:txBody>
-      </p:sp>
-      <p:sp>
-        <p:nvSpPr>
-          <p:cNvPr id="16" name="Shape 14"/>
-          <p:cNvSpPr/>
-          <p:nvPr/>
-        </p:nvSpPr>
-        <p:spPr>
-          <a:xfrm>
-            <a:off x="685800" y="3977640"/>
-            <a:ext cx="3502152" cy="2011680"/>
-          </a:xfrm>
-          <a:prstGeom prst="roundRect">
-            <a:avLst>
-              <a:gd name="adj" fmla="val 3636"/>
-            </a:avLst>
-          </a:prstGeom>
-          <a:solidFill>
-            <a:srgbClr val="151E33"/>
-          </a:solidFill>
-          <a:ln/>
-          <a:effectLst>
-            <a:outerShdw sx="100000" sy="100000" kx="0" ky="0" algn="bl" rotWithShape="0" blurRad="127000" dist="38100" dir="5400000">
-              <a:srgbClr val="000000">
-                <a:alpha val="35000"/>
-              </a:srgbClr>
-            </a:outerShdw>
-          </a:effectLst>
-        </p:spPr>
-      </p:sp>
-      <p:sp>
-        <p:nvSpPr>
-          <p:cNvPr id="17" name="Text 15"/>
-          <p:cNvSpPr/>
-          <p:nvPr/>
-        </p:nvSpPr>
-        <p:spPr>
-          <a:xfrm>
-            <a:off x="923544" y="4123944"/>
-            <a:ext cx="3063240" cy="411480"/>
-          </a:xfrm>
-          <a:prstGeom prst="rect">
-            <a:avLst/>
-          </a:prstGeom>
-          <a:noFill/>
-          <a:ln/>
-        </p:spPr>
-        <p:txBody>
-          <a:bodyPr wrap="square" lIns="0" tIns="0" rIns="0" bIns="0" rtlCol="0" anchor="ctr"/>
-          <a:lstStyle/>
-          <a:p>
-            <a:pPr indent="0" marL="0">
-              <a:buNone/>
-            </a:pPr>
-            <a:r>
-              <a:rPr lang="en-US" sz="2000" b="1" dirty="0">
+              <a:rPr lang="en-US" sz="1500" b="1" dirty="0">
                 <a:solidFill>
                   <a:srgbClr val="3FBF7F"/>
                 </a:solidFill>
@@ -7084,72 +8761,8 @@
                 <a:ea typeface="Calibri" pitchFamily="34" charset="-122"/>
                 <a:cs typeface="Calibri" pitchFamily="34" charset="-120"/>
               </a:rPr>
-              <a:t>0.038 / 0.197 mHa</a:t>
-            </a:r>
-            <a:endParaRPr lang="en-US" sz="2000" dirty="0"/>
-          </a:p>
-        </p:txBody>
-      </p:sp>
-      <p:sp>
-        <p:nvSpPr>
-          <p:cNvPr id="18" name="Text 16"/>
-          <p:cNvSpPr/>
-          <p:nvPr/>
-        </p:nvSpPr>
-        <p:spPr>
-          <a:xfrm>
-            <a:off x="923544" y="4544568"/>
-            <a:ext cx="3063240" cy="274320"/>
-          </a:xfrm>
-          <a:prstGeom prst="rect">
-            <a:avLst/>
-          </a:prstGeom>
-          <a:noFill/>
-          <a:ln/>
-        </p:spPr>
-        <p:txBody>
-          <a:bodyPr wrap="square" lIns="0" tIns="0" rIns="0" bIns="0" rtlCol="0" anchor="ctr"/>
-          <a:lstStyle/>
-          <a:p>
-            <a:pPr indent="0" marL="0">
-              <a:buNone/>
-            </a:pPr>
-            <a:r>
-              <a:rPr lang="en-US" sz="1300" b="1" dirty="0">
-                <a:solidFill>
-                  <a:srgbClr val="FFFFFF"/>
-                </a:solidFill>
-                <a:latin typeface="Calibri" pitchFamily="34" charset="0"/>
-                <a:ea typeface="Calibri" pitchFamily="34" charset="-122"/>
-                <a:cs typeface="Calibri" pitchFamily="34" charset="-120"/>
-              </a:rPr>
-              <a:t>Open-shell oxides (20q)</a:t>
-            </a:r>
-            <a:endParaRPr lang="en-US" sz="1300" dirty="0"/>
-          </a:p>
-        </p:txBody>
-      </p:sp>
-      <p:sp>
-        <p:nvSpPr>
-          <p:cNvPr id="19" name="Text 17"/>
-          <p:cNvSpPr/>
-          <p:nvPr/>
-        </p:nvSpPr>
-        <p:spPr>
-          <a:xfrm>
-            <a:off x="923544" y="4855464"/>
-            <a:ext cx="3063240" cy="1005840"/>
-          </a:xfrm>
-          <a:prstGeom prst="rect">
-            <a:avLst/>
-          </a:prstGeom>
-          <a:noFill/>
-          <a:ln/>
-        </p:spPr>
-        <p:txBody>
-          <a:bodyPr wrap="square" lIns="0" tIns="0" rIns="0" bIns="0" rtlCol="0" anchor="ctr"/>
-          <a:lstStyle/>
-          <a:p>
+              <a:t>They agree to 0.007 mHa</a:t>
+            </a:r>
             <a:pPr indent="0" marL="0">
               <a:lnSpc>
                 <a:spcPts val="1600"/>
@@ -7157,6 +8770,69 @@
               <a:buNone/>
             </a:pPr>
             <a:r>
+              <a:rPr lang="en-US" sz="1200" dirty="0">
+                <a:solidFill>
+                  <a:srgbClr val="E8EDF7"/>
+                </a:solidFill>
+                <a:latin typeface="Calibri" pitchFamily="34" charset="0"/>
+                <a:ea typeface="Calibri" pitchFamily="34" charset="-122"/>
+                <a:cs typeface="Calibri" pitchFamily="34" charset="-120"/>
+              </a:rPr>
+              <a:t>  (0.064 mHa across all fit windows) — ~25× inside chemical accuracy, sharing no solver, no extrapolation variable and no code path.</a:t>
+            </a:r>
+            <a:endParaRPr lang="en-US" sz="1500" dirty="0"/>
+          </a:p>
+        </p:txBody>
+      </p:sp>
+      <p:pic>
+        <p:nvPicPr>
+          <p:cNvPr id="17" name="Image 0" descr="/home/user/potomac_advancedmaterials/results/crossvalidation_40q.png">    </p:cNvPr>
+          <p:cNvPicPr>
+            <a:picLocks noChangeAspect="1"/>
+          </p:cNvPicPr>
+          <p:nvPr/>
+        </p:nvPicPr>
+        <p:blipFill>
+          <a:blip r:embed="rId1"/>
+          <a:stretch>
+            <a:fillRect/>
+          </a:stretch>
+        </p:blipFill>
+        <p:spPr>
+          <a:xfrm>
+            <a:off x="7086600" y="1828800"/>
+            <a:ext cx="4389120" cy="2542032"/>
+          </a:xfrm>
+          <a:prstGeom prst="rect">
+            <a:avLst/>
+          </a:prstGeom>
+        </p:spPr>
+      </p:pic>
+      <p:sp>
+        <p:nvSpPr>
+          <p:cNvPr id="18" name="Text 15"/>
+          <p:cNvSpPr/>
+          <p:nvPr/>
+        </p:nvSpPr>
+        <p:spPr>
+          <a:xfrm>
+            <a:off x="7086600" y="4572000"/>
+            <a:ext cx="4389120" cy="274320"/>
+          </a:xfrm>
+          <a:prstGeom prst="rect">
+            <a:avLst/>
+          </a:prstGeom>
+          <a:noFill/>
+          <a:ln/>
+        </p:spPr>
+        <p:txBody>
+          <a:bodyPr wrap="square" lIns="0" tIns="0" rIns="0" bIns="0" rtlCol="0" anchor="ctr"/>
+          <a:lstStyle/>
+          <a:p>
+            <a:pPr indent="0" marL="0">
+              <a:buNone/>
+            </a:pPr>
+            <a:r>
               <a:rPr lang="en-US" sz="1150" dirty="0">
                 <a:solidFill>
                   <a:srgbClr val="8B98B4"/>
@@ -7165,7 +8841,7 @@
                 <a:ea typeface="Calibri" pitchFamily="34" charset="-122"/>
                 <a:cs typeface="Calibri" pitchFamily="34" charset="-120"/>
               </a:rPr>
-              <a:t>CrO ⁵Π and NiO ³Σ⁻ to chemical accuracy against exact diagonalization.</a:t>
+              <a:t>A cross-validated benchmark other groups can cite:</a:t>
             </a:r>
             <a:endParaRPr lang="en-US" sz="1150" dirty="0"/>
           </a:p>
@@ -7173,121 +8849,53 @@
       </p:sp>
       <p:sp>
         <p:nvSpPr>
-          <p:cNvPr id="20" name="Shape 18"/>
-          <p:cNvSpPr/>
-          <p:nvPr/>
-        </p:nvSpPr>
-        <p:spPr>
-          <a:xfrm>
-            <a:off x="4343400" y="3977640"/>
-            <a:ext cx="3502152" cy="2011680"/>
-          </a:xfrm>
-          <a:prstGeom prst="roundRect">
-            <a:avLst>
-              <a:gd name="adj" fmla="val 3636"/>
-            </a:avLst>
-          </a:prstGeom>
-          <a:solidFill>
-            <a:srgbClr val="151E33"/>
-          </a:solidFill>
-          <a:ln/>
-          <a:effectLst>
-            <a:outerShdw sx="100000" sy="100000" kx="0" ky="0" algn="bl" rotWithShape="0" blurRad="127000" dist="38100" dir="5400000">
-              <a:srgbClr val="000000">
-                <a:alpha val="35000"/>
-              </a:srgbClr>
-            </a:outerShdw>
-          </a:effectLst>
-        </p:spPr>
-      </p:sp>
-      <p:sp>
-        <p:nvSpPr>
-          <p:cNvPr id="21" name="Text 19"/>
-          <p:cNvSpPr/>
-          <p:nvPr/>
-        </p:nvSpPr>
-        <p:spPr>
-          <a:xfrm>
-            <a:off x="4581144" y="4123944"/>
-            <a:ext cx="3063240" cy="411480"/>
-          </a:xfrm>
-          <a:prstGeom prst="rect">
-            <a:avLst/>
-          </a:prstGeom>
-          <a:noFill/>
-          <a:ln/>
-        </p:spPr>
-        <p:txBody>
-          <a:bodyPr wrap="square" lIns="0" tIns="0" rIns="0" bIns="0" rtlCol="0" anchor="ctr"/>
-          <a:lstStyle/>
-          <a:p>
-            <a:pPr indent="0" marL="0">
-              <a:buNone/>
-            </a:pPr>
-            <a:r>
-              <a:rPr lang="en-US" sz="2000" b="1" dirty="0">
-                <a:solidFill>
-                  <a:srgbClr val="4FD1E0"/>
-                </a:solidFill>
-                <a:latin typeface="Calibri" pitchFamily="34" charset="0"/>
-                <a:ea typeface="Calibri" pitchFamily="34" charset="-122"/>
-                <a:cs typeface="Calibri" pitchFamily="34" charset="-120"/>
-              </a:rPr>
-              <a:t>real QPU</a:t>
-            </a:r>
-            <a:endParaRPr lang="en-US" sz="2000" dirty="0"/>
-          </a:p>
-        </p:txBody>
-      </p:sp>
-      <p:sp>
-        <p:nvSpPr>
-          <p:cNvPr id="22" name="Text 20"/>
-          <p:cNvSpPr/>
-          <p:nvPr/>
-        </p:nvSpPr>
-        <p:spPr>
-          <a:xfrm>
-            <a:off x="4581144" y="4544568"/>
-            <a:ext cx="3063240" cy="274320"/>
-          </a:xfrm>
-          <a:prstGeom prst="rect">
-            <a:avLst/>
-          </a:prstGeom>
-          <a:noFill/>
-          <a:ln/>
-        </p:spPr>
-        <p:txBody>
-          <a:bodyPr wrap="square" lIns="0" tIns="0" rIns="0" bIns="0" rtlCol="0" anchor="ctr"/>
-          <a:lstStyle/>
-          <a:p>
-            <a:pPr indent="0" marL="0">
-              <a:buNone/>
-            </a:pPr>
-            <a:r>
-              <a:rPr lang="en-US" sz="1300" b="1" dirty="0">
-                <a:solidFill>
-                  <a:srgbClr val="FFFFFF"/>
-                </a:solidFill>
-                <a:latin typeface="Calibri" pitchFamily="34" charset="0"/>
-                <a:ea typeface="Calibri" pitchFamily="34" charset="-122"/>
-                <a:cs typeface="Calibri" pitchFamily="34" charset="-120"/>
-              </a:rPr>
-              <a:t>Trapped-ion silicon</a:t>
-            </a:r>
-            <a:endParaRPr lang="en-US" sz="1300" dirty="0"/>
-          </a:p>
-        </p:txBody>
-      </p:sp>
-      <p:sp>
-        <p:nvSpPr>
-          <p:cNvPr id="23" name="Text 21"/>
-          <p:cNvSpPr/>
-          <p:nvPr/>
-        </p:nvSpPr>
-        <p:spPr>
-          <a:xfrm>
-            <a:off x="4581144" y="4855464"/>
-            <a:ext cx="3063240" cy="1005840"/>
+          <p:cNvPr id="19" name="Text 16"/>
+          <p:cNvSpPr/>
+          <p:nvPr/>
+        </p:nvSpPr>
+        <p:spPr>
+          <a:xfrm>
+            <a:off x="7086600" y="4864608"/>
+            <a:ext cx="4389120" cy="384048"/>
+          </a:xfrm>
+          <a:prstGeom prst="rect">
+            <a:avLst/>
+          </a:prstGeom>
+          <a:noFill/>
+          <a:ln/>
+        </p:spPr>
+        <p:txBody>
+          <a:bodyPr wrap="square" lIns="0" tIns="0" rIns="0" bIns="0" rtlCol="0" anchor="ctr"/>
+          <a:lstStyle/>
+          <a:p>
+            <a:pPr indent="0" marL="0">
+              <a:buNone/>
+            </a:pPr>
+            <a:r>
+              <a:rPr lang="en-US" sz="1500" b="1" dirty="0">
+                <a:solidFill>
+                  <a:srgbClr val="3FBF7F"/>
+                </a:solidFill>
+                <a:latin typeface="Calibri" pitchFamily="34" charset="0"/>
+                <a:ea typeface="Calibri" pitchFamily="34" charset="-122"/>
+                <a:cs typeface="Calibri" pitchFamily="34" charset="-120"/>
+              </a:rPr>
+              <a:t>FCI(H₂₀, 40q, STO-6G) ≈ −10.29360 Ha</a:t>
+            </a:r>
+            <a:endParaRPr lang="en-US" sz="1500" dirty="0"/>
+          </a:p>
+        </p:txBody>
+      </p:sp>
+      <p:sp>
+        <p:nvSpPr>
+          <p:cNvPr id="20" name="Text 17"/>
+          <p:cNvSpPr/>
+          <p:nvPr/>
+        </p:nvSpPr>
+        <p:spPr>
+          <a:xfrm>
+            <a:off x="7086600" y="5349240"/>
+            <a:ext cx="4389120" cy="1188720"/>
           </a:xfrm>
           <a:prstGeom prst="rect">
             <a:avLst/>
@@ -7301,200 +8909,12 @@
           <a:p>
             <a:pPr indent="0" marL="0">
               <a:lnSpc>
-                <a:spcPts val="1600"/>
+                <a:spcPts val="1400"/>
               </a:lnSpc>
               <a:buNone/>
             </a:pPr>
             <a:r>
-              <a:rPr lang="en-US" sz="1150" dirty="0">
-                <a:solidFill>
-                  <a:srgbClr val="8B98B4"/>
-                </a:solidFill>
-                <a:latin typeface="Calibri" pitchFamily="34" charset="0"/>
-                <a:ea typeface="Calibri" pitchFamily="34" charset="-122"/>
-                <a:cs typeface="Calibri" pitchFamily="34" charset="-120"/>
-              </a:rPr>
-              <a:t>AQT ibex-q1 decoded; device-sampled determinants seed a QSCI growth that recovers exact FCI.</a:t>
-            </a:r>
-            <a:endParaRPr lang="en-US" sz="1150" dirty="0"/>
-          </a:p>
-        </p:txBody>
-      </p:sp>
-      <p:sp>
-        <p:nvSpPr>
-          <p:cNvPr id="24" name="Shape 22"/>
-          <p:cNvSpPr/>
-          <p:nvPr/>
-        </p:nvSpPr>
-        <p:spPr>
-          <a:xfrm>
-            <a:off x="8001000" y="3977640"/>
-            <a:ext cx="3502152" cy="2011680"/>
-          </a:xfrm>
-          <a:prstGeom prst="roundRect">
-            <a:avLst>
-              <a:gd name="adj" fmla="val 3636"/>
-            </a:avLst>
-          </a:prstGeom>
-          <a:solidFill>
-            <a:srgbClr val="151E33"/>
-          </a:solidFill>
-          <a:ln/>
-          <a:effectLst>
-            <a:outerShdw sx="100000" sy="100000" kx="0" ky="0" algn="bl" rotWithShape="0" blurRad="127000" dist="38100" dir="5400000">
-              <a:srgbClr val="000000">
-                <a:alpha val="35000"/>
-              </a:srgbClr>
-            </a:outerShdw>
-          </a:effectLst>
-        </p:spPr>
-      </p:sp>
-      <p:sp>
-        <p:nvSpPr>
-          <p:cNvPr id="25" name="Text 23"/>
-          <p:cNvSpPr/>
-          <p:nvPr/>
-        </p:nvSpPr>
-        <p:spPr>
-          <a:xfrm>
-            <a:off x="8238744" y="4123944"/>
-            <a:ext cx="3063240" cy="411480"/>
-          </a:xfrm>
-          <a:prstGeom prst="rect">
-            <a:avLst/>
-          </a:prstGeom>
-          <a:noFill/>
-          <a:ln/>
-        </p:spPr>
-        <p:txBody>
-          <a:bodyPr wrap="square" lIns="0" tIns="0" rIns="0" bIns="0" rtlCol="0" anchor="ctr"/>
-          <a:lstStyle/>
-          <a:p>
-            <a:pPr indent="0" marL="0">
-              <a:buNone/>
-            </a:pPr>
-            <a:r>
-              <a:rPr lang="en-US" sz="2000" b="1" dirty="0">
-                <a:solidFill>
-                  <a:srgbClr val="E9B84A"/>
-                </a:solidFill>
-                <a:latin typeface="Calibri" pitchFamily="34" charset="0"/>
-                <a:ea typeface="Calibri" pitchFamily="34" charset="-122"/>
-                <a:cs typeface="Calibri" pitchFamily="34" charset="-120"/>
-              </a:rPr>
-              <a:t>16 TB → 195 MB</a:t>
-            </a:r>
-            <a:endParaRPr lang="en-US" sz="2000" dirty="0"/>
-          </a:p>
-        </p:txBody>
-      </p:sp>
-      <p:sp>
-        <p:nvSpPr>
-          <p:cNvPr id="26" name="Text 24"/>
-          <p:cNvSpPr/>
-          <p:nvPr/>
-        </p:nvSpPr>
-        <p:spPr>
-          <a:xfrm>
-            <a:off x="8238744" y="4544568"/>
-            <a:ext cx="3063240" cy="274320"/>
-          </a:xfrm>
-          <a:prstGeom prst="rect">
-            <a:avLst/>
-          </a:prstGeom>
-          <a:noFill/>
-          <a:ln/>
-        </p:spPr>
-        <p:txBody>
-          <a:bodyPr wrap="square" lIns="0" tIns="0" rIns="0" bIns="0" rtlCol="0" anchor="ctr"/>
-          <a:lstStyle/>
-          <a:p>
-            <a:pPr indent="0" marL="0">
-              <a:buNone/>
-            </a:pPr>
-            <a:r>
-              <a:rPr lang="en-US" sz="1300" b="1" dirty="0">
-                <a:solidFill>
-                  <a:srgbClr val="FFFFFF"/>
-                </a:solidFill>
-                <a:latin typeface="Calibri" pitchFamily="34" charset="0"/>
-                <a:ea typeface="Calibri" pitchFamily="34" charset="-122"/>
-                <a:cs typeface="Calibri" pitchFamily="34" charset="-120"/>
-              </a:rPr>
-              <a:t>The memory wall removed</a:t>
-            </a:r>
-            <a:endParaRPr lang="en-US" sz="1300" dirty="0"/>
-          </a:p>
-        </p:txBody>
-      </p:sp>
-      <p:sp>
-        <p:nvSpPr>
-          <p:cNvPr id="27" name="Text 25"/>
-          <p:cNvSpPr/>
-          <p:nvPr/>
-        </p:nvSpPr>
-        <p:spPr>
-          <a:xfrm>
-            <a:off x="8238744" y="4855464"/>
-            <a:ext cx="3063240" cy="1005840"/>
-          </a:xfrm>
-          <a:prstGeom prst="rect">
-            <a:avLst/>
-          </a:prstGeom>
-          <a:noFill/>
-          <a:ln/>
-        </p:spPr>
-        <p:txBody>
-          <a:bodyPr wrap="square" lIns="0" tIns="0" rIns="0" bIns="0" rtlCol="0" anchor="ctr"/>
-          <a:lstStyle/>
-          <a:p>
-            <a:pPr indent="0" marL="0">
-              <a:lnSpc>
-                <a:spcPts val="1600"/>
-              </a:lnSpc>
-              <a:buNone/>
-            </a:pPr>
-            <a:r>
-              <a:rPr lang="en-US" sz="1150" dirty="0">
-                <a:solidFill>
-                  <a:srgbClr val="8B98B4"/>
-                </a:solidFill>
-                <a:latin typeface="Calibri" pitchFamily="34" charset="0"/>
-                <a:ea typeface="Calibri" pitchFamily="34" charset="-122"/>
-                <a:cs typeface="Calibri" pitchFamily="34" charset="-120"/>
-              </a:rPr>
-              <a:t>Tensor-network representation at the measured bond dimension — what makes 40 qubits fit on one GPU.</a:t>
-            </a:r>
-            <a:endParaRPr lang="en-US" sz="1150" dirty="0"/>
-          </a:p>
-        </p:txBody>
-      </p:sp>
-      <p:sp>
-        <p:nvSpPr>
-          <p:cNvPr id="28" name="Text 26"/>
-          <p:cNvSpPr/>
-          <p:nvPr/>
-        </p:nvSpPr>
-        <p:spPr>
-          <a:xfrm>
-            <a:off x="685800" y="6327648"/>
-            <a:ext cx="10789920" cy="320040"/>
-          </a:xfrm>
-          <a:prstGeom prst="rect">
-            <a:avLst/>
-          </a:prstGeom>
-          <a:noFill/>
-          <a:ln/>
-        </p:spPr>
-        <p:txBody>
-          <a:bodyPr wrap="square" lIns="0" tIns="0" rIns="0" bIns="0" rtlCol="0" anchor="ctr"/>
-          <a:lstStyle/>
-          <a:p>
-            <a:pPr indent="0" marL="0">
-              <a:buNone/>
-            </a:pPr>
-            <a:r>
-              <a:rPr lang="en-US" sz="1050" dirty="0">
+              <a:rPr lang="en-US" sz="1000" dirty="0">
                 <a:solidFill>
                   <a:srgbClr val="5D6B8A"/>
                 </a:solidFill>
@@ -7502,9 +8922,9 @@
                 <a:ea typeface="Calibri" pitchFamily="34" charset="-122"/>
                 <a:cs typeface="Calibri" pitchFamily="34" charset="-120"/>
               </a:rPr>
-              <a:t>Full traceability: docs/claims_ledger.md maps every number → script → evidence file → status.</a:t>
-            </a:r>
-            <a:endParaRPr lang="en-US" sz="1050" dirty="0"/>
+              <a:t>Both routes are extrapolations, not exact FCI; Route B is fit-window dependent (full spread reported). No new computation — analysis of already-committed evidence.</a:t>
+            </a:r>
+            <a:endParaRPr lang="en-US" sz="1000" dirty="0"/>
           </a:p>
         </p:txBody>
       </p:sp>
@@ -7567,13 +8987,13 @@
             <a:r>
               <a:rPr lang="en-US" sz="1200" b="1" spc="300" kern="0" dirty="0">
                 <a:solidFill>
-                  <a:srgbClr val="E9B84A"/>
-                </a:solidFill>
-                <a:latin typeface="Calibri" pitchFamily="34" charset="0"/>
-                <a:ea typeface="Calibri" pitchFamily="34" charset="-122"/>
-                <a:cs typeface="Calibri" pitchFamily="34" charset="-120"/>
-              </a:rPr>
-              <a:t>HONEST LIMITS — NON-NEGOTIABLE</a:t>
+                  <a:srgbClr val="3FBF7F"/>
+                </a:solidFill>
+                <a:latin typeface="Calibri" pitchFamily="34" charset="0"/>
+                <a:ea typeface="Calibri" pitchFamily="34" charset="-122"/>
+                <a:cs typeface="Calibri" pitchFamily="34" charset="-120"/>
+              </a:rPr>
+              <a:t>THE SCIENTIFIC VALUE</a:t>
             </a:r>
             <a:endParaRPr lang="en-US" sz="1200" dirty="0"/>
           </a:p>
@@ -7612,7 +9032,7 @@
                 <a:ea typeface="Cambria" pitchFamily="34" charset="-122"/>
                 <a:cs typeface="Cambria" pitchFamily="34" charset="-120"/>
               </a:rPr>
-              <a:t>What we do not claim</a:t>
+              <a:t>Built so a skeptic can check every number</a:t>
             </a:r>
             <a:endParaRPr lang="en-US" sz="3300" dirty="0"/>
           </a:p>
@@ -7627,22 +9047,17 @@
         <p:spPr>
           <a:xfrm>
             <a:off x="685800" y="1783080"/>
-            <a:ext cx="10789920" cy="841248"/>
+            <a:ext cx="10789920" cy="1005840"/>
           </a:xfrm>
           <a:prstGeom prst="roundRect">
             <a:avLst>
-              <a:gd name="adj" fmla="val 8696"/>
+              <a:gd name="adj" fmla="val 7273"/>
             </a:avLst>
           </a:prstGeom>
           <a:solidFill>
-            <a:srgbClr val="1B2540"/>
+            <a:srgbClr val="151E33"/>
           </a:solidFill>
-          <a:ln w="12700">
-            <a:solidFill>
-              <a:srgbClr val="2A3654"/>
-            </a:solidFill>
-            <a:prstDash val="solid"/>
-          </a:ln>
+          <a:ln/>
           <a:effectLst>
             <a:outerShdw sx="100000" sy="100000" kx="0" ky="0" algn="bl" rotWithShape="0" blurRad="127000" dist="38100" dir="5400000">
               <a:srgbClr val="000000">
@@ -7660,34 +9075,34 @@
         </p:nvSpPr>
         <p:spPr>
           <a:xfrm>
-            <a:off x="960120" y="1892808"/>
-            <a:ext cx="365760" cy="548640"/>
-          </a:xfrm>
-          <a:prstGeom prst="rect">
-            <a:avLst/>
-          </a:prstGeom>
-          <a:noFill/>
-          <a:ln/>
-        </p:spPr>
-        <p:txBody>
-          <a:bodyPr wrap="square" lIns="0" tIns="0" rIns="0" bIns="0" rtlCol="0" anchor="ctr"/>
-          <a:lstStyle/>
-          <a:p>
-            <a:pPr indent="0" marL="0">
-              <a:buNone/>
-            </a:pPr>
-            <a:r>
-              <a:rPr lang="en-US" sz="1600" dirty="0">
-                <a:solidFill>
-                  <a:srgbClr val="E9B84A"/>
-                </a:solidFill>
-                <a:latin typeface="Calibri" pitchFamily="34" charset="0"/>
-                <a:ea typeface="Calibri" pitchFamily="34" charset="-122"/>
-                <a:cs typeface="Calibri" pitchFamily="34" charset="-120"/>
-              </a:rPr>
-              <a:t>⚑</a:t>
-            </a:r>
-            <a:endParaRPr lang="en-US" sz="1600" dirty="0"/>
+            <a:off x="1005840" y="1929384"/>
+            <a:ext cx="2651760" cy="365760"/>
+          </a:xfrm>
+          <a:prstGeom prst="rect">
+            <a:avLst/>
+          </a:prstGeom>
+          <a:noFill/>
+          <a:ln/>
+        </p:spPr>
+        <p:txBody>
+          <a:bodyPr wrap="square" lIns="0" tIns="0" rIns="0" bIns="0" rtlCol="0" anchor="ctr"/>
+          <a:lstStyle/>
+          <a:p>
+            <a:pPr indent="0" marL="0">
+              <a:buNone/>
+            </a:pPr>
+            <a:r>
+              <a:rPr lang="en-US" sz="1700" b="1" dirty="0">
+                <a:solidFill>
+                  <a:srgbClr val="3FBF7F"/>
+                </a:solidFill>
+                <a:latin typeface="Cambria" pitchFamily="34" charset="0"/>
+                <a:ea typeface="Cambria" pitchFamily="34" charset="-122"/>
+                <a:cs typeface="Cambria" pitchFamily="34" charset="-120"/>
+              </a:rPr>
+              <a:t>Pre-registered</a:t>
+            </a:r>
+            <a:endParaRPr lang="en-US" sz="1700" dirty="0"/>
           </a:p>
         </p:txBody>
       </p:sp>
@@ -7699,8 +9114,8 @@
         </p:nvSpPr>
         <p:spPr>
           <a:xfrm>
-            <a:off x="1417320" y="1856232"/>
-            <a:ext cx="9784080" cy="713232"/>
+            <a:off x="3749040" y="1911096"/>
+            <a:ext cx="7452360" cy="777240"/>
           </a:xfrm>
           <a:prstGeom prst="rect">
             <a:avLst/>
@@ -7721,13 +9136,13 @@
             <a:r>
               <a:rPr lang="en-US" sz="1300" dirty="0">
                 <a:solidFill>
-                  <a:srgbClr val="E8EDF7"/>
-                </a:solidFill>
-                <a:latin typeface="Calibri" pitchFamily="34" charset="0"/>
-                <a:ea typeface="Calibri" pitchFamily="34" charset="-122"/>
-                <a:cs typeface="Calibri" pitchFamily="34" charset="-120"/>
-              </a:rPr>
-              <a:t>No quantum ADVANTAGE at these sizes. At ≤40 qubits classical methods still solve these instances. The value is trust and correctness, not speed — the advantage regime is beyond, which the 40q run targets.</a:t>
+                  <a:srgbClr val="8B98B4"/>
+                </a:solidFill>
+                <a:latin typeface="Calibri" pitchFamily="34" charset="0"/>
+                <a:ea typeface="Calibri" pitchFamily="34" charset="-122"/>
+                <a:cs typeface="Calibri" pitchFamily="34" charset="-120"/>
+              </a:rPr>
+              <a:t>Every judged claim's threshold was git-timestamped BEFORE the run. Outcomes reported as measured — passes, a resource-DNF, a non-convergence.</a:t>
             </a:r>
             <a:endParaRPr lang="en-US" sz="1300" dirty="0"/>
           </a:p>
@@ -7741,23 +9156,18 @@
         </p:nvSpPr>
         <p:spPr>
           <a:xfrm>
-            <a:off x="685800" y="2697480"/>
-            <a:ext cx="10789920" cy="841248"/>
+            <a:off x="685800" y="2898648"/>
+            <a:ext cx="10789920" cy="1005840"/>
           </a:xfrm>
           <a:prstGeom prst="roundRect">
             <a:avLst>
-              <a:gd name="adj" fmla="val 8696"/>
+              <a:gd name="adj" fmla="val 7273"/>
             </a:avLst>
           </a:prstGeom>
           <a:solidFill>
-            <a:srgbClr val="1B2540"/>
+            <a:srgbClr val="151E33"/>
           </a:solidFill>
-          <a:ln w="12700">
-            <a:solidFill>
-              <a:srgbClr val="2A3654"/>
-            </a:solidFill>
-            <a:prstDash val="solid"/>
-          </a:ln>
+          <a:ln/>
           <a:effectLst>
             <a:outerShdw sx="100000" sy="100000" kx="0" ky="0" algn="bl" rotWithShape="0" blurRad="127000" dist="38100" dir="5400000">
               <a:srgbClr val="000000">
@@ -7775,34 +9185,34 @@
         </p:nvSpPr>
         <p:spPr>
           <a:xfrm>
-            <a:off x="960120" y="2807208"/>
-            <a:ext cx="365760" cy="548640"/>
-          </a:xfrm>
-          <a:prstGeom prst="rect">
-            <a:avLst/>
-          </a:prstGeom>
-          <a:noFill/>
-          <a:ln/>
-        </p:spPr>
-        <p:txBody>
-          <a:bodyPr wrap="square" lIns="0" tIns="0" rIns="0" bIns="0" rtlCol="0" anchor="ctr"/>
-          <a:lstStyle/>
-          <a:p>
-            <a:pPr indent="0" marL="0">
-              <a:buNone/>
-            </a:pPr>
-            <a:r>
-              <a:rPr lang="en-US" sz="1600" dirty="0">
-                <a:solidFill>
-                  <a:srgbClr val="E9B84A"/>
-                </a:solidFill>
-                <a:latin typeface="Calibri" pitchFamily="34" charset="0"/>
-                <a:ea typeface="Calibri" pitchFamily="34" charset="-122"/>
-                <a:cs typeface="Calibri" pitchFamily="34" charset="-120"/>
-              </a:rPr>
-              <a:t>⚑</a:t>
-            </a:r>
-            <a:endParaRPr lang="en-US" sz="1600" dirty="0"/>
+            <a:off x="1005840" y="3044952"/>
+            <a:ext cx="2651760" cy="365760"/>
+          </a:xfrm>
+          <a:prstGeom prst="rect">
+            <a:avLst/>
+          </a:prstGeom>
+          <a:noFill/>
+          <a:ln/>
+        </p:spPr>
+        <p:txBody>
+          <a:bodyPr wrap="square" lIns="0" tIns="0" rIns="0" bIns="0" rtlCol="0" anchor="ctr"/>
+          <a:lstStyle/>
+          <a:p>
+            <a:pPr indent="0" marL="0">
+              <a:buNone/>
+            </a:pPr>
+            <a:r>
+              <a:rPr lang="en-US" sz="1700" b="1" dirty="0">
+                <a:solidFill>
+                  <a:srgbClr val="4FD1E0"/>
+                </a:solidFill>
+                <a:latin typeface="Cambria" pitchFamily="34" charset="0"/>
+                <a:ea typeface="Cambria" pitchFamily="34" charset="-122"/>
+                <a:cs typeface="Cambria" pitchFamily="34" charset="-120"/>
+              </a:rPr>
+              <a:t>Re-runnable</a:t>
+            </a:r>
+            <a:endParaRPr lang="en-US" sz="1700" dirty="0"/>
           </a:p>
         </p:txBody>
       </p:sp>
@@ -7814,8 +9224,8 @@
         </p:nvSpPr>
         <p:spPr>
           <a:xfrm>
-            <a:off x="1417320" y="2770632"/>
-            <a:ext cx="9784080" cy="713232"/>
+            <a:off x="3749040" y="3026664"/>
+            <a:ext cx="7452360" cy="777240"/>
           </a:xfrm>
           <a:prstGeom prst="rect">
             <a:avLst/>
@@ -7836,13 +9246,13 @@
             <a:r>
               <a:rPr lang="en-US" sz="1300" dirty="0">
                 <a:solidFill>
-                  <a:srgbClr val="E8EDF7"/>
-                </a:solidFill>
-                <a:latin typeface="Calibri" pitchFamily="34" charset="0"/>
-                <a:ea typeface="Calibri" pitchFamily="34" charset="-122"/>
-                <a:cs typeface="Calibri" pitchFamily="34" charset="-120"/>
-              </a:rPr>
-              <a:t>The value case is a framework, not a Mitsubishi ROI. The mechanism is measured here; the dollar inputs are placeholders for your pipeline's own numbers.</a:t>
+                  <a:srgbClr val="8B98B4"/>
+                </a:solidFill>
+                <a:latin typeface="Calibri" pitchFamily="34" charset="0"/>
+                <a:ea typeface="Calibri" pitchFamily="34" charset="-122"/>
+                <a:cs typeface="Calibri" pitchFamily="34" charset="-120"/>
+              </a:rPr>
+              <a:t>One command re-executes 17 headline scripts and audits 9 GPU/QPU artifacts: 26/26 PASS, no modification needed.</a:t>
             </a:r>
             <a:endParaRPr lang="en-US" sz="1300" dirty="0"/>
           </a:p>
@@ -7856,23 +9266,18 @@
         </p:nvSpPr>
         <p:spPr>
           <a:xfrm>
-            <a:off x="685800" y="3611880"/>
-            <a:ext cx="10789920" cy="841248"/>
+            <a:off x="685800" y="4014216"/>
+            <a:ext cx="10789920" cy="1005840"/>
           </a:xfrm>
           <a:prstGeom prst="roundRect">
             <a:avLst>
-              <a:gd name="adj" fmla="val 8696"/>
+              <a:gd name="adj" fmla="val 7273"/>
             </a:avLst>
           </a:prstGeom>
           <a:solidFill>
-            <a:srgbClr val="1B2540"/>
+            <a:srgbClr val="151E33"/>
           </a:solidFill>
-          <a:ln w="12700">
-            <a:solidFill>
-              <a:srgbClr val="2A3654"/>
-            </a:solidFill>
-            <a:prstDash val="solid"/>
-          </a:ln>
+          <a:ln/>
           <a:effectLst>
             <a:outerShdw sx="100000" sy="100000" kx="0" ky="0" algn="bl" rotWithShape="0" blurRad="127000" dist="38100" dir="5400000">
               <a:srgbClr val="000000">
@@ -7890,34 +9295,34 @@
         </p:nvSpPr>
         <p:spPr>
           <a:xfrm>
-            <a:off x="960120" y="3721608"/>
-            <a:ext cx="365760" cy="548640"/>
-          </a:xfrm>
-          <a:prstGeom prst="rect">
-            <a:avLst/>
-          </a:prstGeom>
-          <a:noFill/>
-          <a:ln/>
-        </p:spPr>
-        <p:txBody>
-          <a:bodyPr wrap="square" lIns="0" tIns="0" rIns="0" bIns="0" rtlCol="0" anchor="ctr"/>
-          <a:lstStyle/>
-          <a:p>
-            <a:pPr indent="0" marL="0">
-              <a:buNone/>
-            </a:pPr>
-            <a:r>
-              <a:rPr lang="en-US" sz="1600" dirty="0">
+            <a:off x="1005840" y="4160520"/>
+            <a:ext cx="2651760" cy="365760"/>
+          </a:xfrm>
+          <a:prstGeom prst="rect">
+            <a:avLst/>
+          </a:prstGeom>
+          <a:noFill/>
+          <a:ln/>
+        </p:spPr>
+        <p:txBody>
+          <a:bodyPr wrap="square" lIns="0" tIns="0" rIns="0" bIns="0" rtlCol="0" anchor="ctr"/>
+          <a:lstStyle/>
+          <a:p>
+            <a:pPr indent="0" marL="0">
+              <a:buNone/>
+            </a:pPr>
+            <a:r>
+              <a:rPr lang="en-US" sz="1700" b="1" dirty="0">
                 <a:solidFill>
                   <a:srgbClr val="E9B84A"/>
                 </a:solidFill>
-                <a:latin typeface="Calibri" pitchFamily="34" charset="0"/>
-                <a:ea typeface="Calibri" pitchFamily="34" charset="-122"/>
-                <a:cs typeface="Calibri" pitchFamily="34" charset="-120"/>
-              </a:rPr>
-              <a:t>⚑</a:t>
-            </a:r>
-            <a:endParaRPr lang="en-US" sz="1600" dirty="0"/>
+                <a:latin typeface="Cambria" pitchFamily="34" charset="0"/>
+                <a:ea typeface="Cambria" pitchFamily="34" charset="-122"/>
+                <a:cs typeface="Cambria" pitchFamily="34" charset="-120"/>
+              </a:rPr>
+              <a:t>Self-corrected</a:t>
+            </a:r>
+            <a:endParaRPr lang="en-US" sz="1700" dirty="0"/>
           </a:p>
         </p:txBody>
       </p:sp>
@@ -7929,8 +9334,8 @@
         </p:nvSpPr>
         <p:spPr>
           <a:xfrm>
-            <a:off x="1417320" y="3685032"/>
-            <a:ext cx="9784080" cy="713232"/>
+            <a:off x="3749040" y="4142232"/>
+            <a:ext cx="7452360" cy="777240"/>
           </a:xfrm>
           <a:prstGeom prst="rect">
             <a:avLst/>
@@ -7951,13 +9356,13 @@
             <a:r>
               <a:rPr lang="en-US" sz="1300" dirty="0">
                 <a:solidFill>
-                  <a:srgbClr val="E8EDF7"/>
-                </a:solidFill>
-                <a:latin typeface="Calibri" pitchFamily="34" charset="0"/>
-                <a:ea typeface="Calibri" pitchFamily="34" charset="-122"/>
-                <a:cs typeface="Calibri" pitchFamily="34" charset="-120"/>
-              </a:rPr>
-              <a:t>Large-ladder results beyond 20q use a determinant-space proxy for the measurement step — validated against real circuit-sampled shots at 12 / 16 / 20 qubits.</a:t>
+                  <a:srgbClr val="8B98B4"/>
+                </a:solidFill>
+                <a:latin typeface="Calibri" pitchFamily="34" charset="0"/>
+                <a:ea typeface="Calibri" pitchFamily="34" charset="-122"/>
+                <a:cs typeface="Calibri" pitchFamily="34" charset="-120"/>
+              </a:rPr>
+              <a:t>Two claims we tested and WITHDREW: an active-space-fragile ranking, and a DFT sign-flip that proved an SCF artifact. In E9, two of four pre-registered predictions FAILED — published as refuted.</a:t>
             </a:r>
             <a:endParaRPr lang="en-US" sz="1300" dirty="0"/>
           </a:p>
@@ -7971,23 +9376,18 @@
         </p:nvSpPr>
         <p:spPr>
           <a:xfrm>
-            <a:off x="685800" y="4526280"/>
-            <a:ext cx="10789920" cy="841248"/>
+            <a:off x="685800" y="5129784"/>
+            <a:ext cx="10789920" cy="1005840"/>
           </a:xfrm>
           <a:prstGeom prst="roundRect">
             <a:avLst>
-              <a:gd name="adj" fmla="val 8696"/>
+              <a:gd name="adj" fmla="val 7273"/>
             </a:avLst>
           </a:prstGeom>
           <a:solidFill>
-            <a:srgbClr val="1B2540"/>
+            <a:srgbClr val="151E33"/>
           </a:solidFill>
-          <a:ln w="12700">
-            <a:solidFill>
-              <a:srgbClr val="2A3654"/>
-            </a:solidFill>
-            <a:prstDash val="solid"/>
-          </a:ln>
+          <a:ln/>
           <a:effectLst>
             <a:outerShdw sx="100000" sy="100000" kx="0" ky="0" algn="bl" rotWithShape="0" blurRad="127000" dist="38100" dir="5400000">
               <a:srgbClr val="000000">
@@ -8005,34 +9405,34 @@
         </p:nvSpPr>
         <p:spPr>
           <a:xfrm>
-            <a:off x="960120" y="4636008"/>
-            <a:ext cx="365760" cy="548640"/>
-          </a:xfrm>
-          <a:prstGeom prst="rect">
-            <a:avLst/>
-          </a:prstGeom>
-          <a:noFill/>
-          <a:ln/>
-        </p:spPr>
-        <p:txBody>
-          <a:bodyPr wrap="square" lIns="0" tIns="0" rIns="0" bIns="0" rtlCol="0" anchor="ctr"/>
-          <a:lstStyle/>
-          <a:p>
-            <a:pPr indent="0" marL="0">
-              <a:buNone/>
-            </a:pPr>
-            <a:r>
-              <a:rPr lang="en-US" sz="1600" dirty="0">
-                <a:solidFill>
-                  <a:srgbClr val="E9B84A"/>
-                </a:solidFill>
-                <a:latin typeface="Calibri" pitchFamily="34" charset="0"/>
-                <a:ea typeface="Calibri" pitchFamily="34" charset="-122"/>
-                <a:cs typeface="Calibri" pitchFamily="34" charset="-120"/>
-              </a:rPr>
-              <a:t>⚑</a:t>
-            </a:r>
-            <a:endParaRPr lang="en-US" sz="1600" dirty="0"/>
+            <a:off x="1005840" y="5276088"/>
+            <a:ext cx="2651760" cy="365760"/>
+          </a:xfrm>
+          <a:prstGeom prst="rect">
+            <a:avLst/>
+          </a:prstGeom>
+          <a:noFill/>
+          <a:ln/>
+        </p:spPr>
+        <p:txBody>
+          <a:bodyPr wrap="square" lIns="0" tIns="0" rIns="0" bIns="0" rtlCol="0" anchor="ctr"/>
+          <a:lstStyle/>
+          <a:p>
+            <a:pPr indent="0" marL="0">
+              <a:buNone/>
+            </a:pPr>
+            <a:r>
+              <a:rPr lang="en-US" sz="1700" b="1" dirty="0">
+                <a:solidFill>
+                  <a:srgbClr val="9A8CFF"/>
+                </a:solidFill>
+                <a:latin typeface="Cambria" pitchFamily="34" charset="0"/>
+                <a:ea typeface="Cambria" pitchFamily="34" charset="-122"/>
+                <a:cs typeface="Cambria" pitchFamily="34" charset="-120"/>
+              </a:rPr>
+              <a:t>Reference-correcting</a:t>
+            </a:r>
+            <a:endParaRPr lang="en-US" sz="1700" dirty="0"/>
           </a:p>
         </p:txBody>
       </p:sp>
@@ -8044,8 +9444,8 @@
         </p:nvSpPr>
         <p:spPr>
           <a:xfrm>
-            <a:off x="1417320" y="4599432"/>
-            <a:ext cx="9784080" cy="713232"/>
+            <a:off x="3749040" y="5257800"/>
+            <a:ext cx="7452360" cy="777240"/>
           </a:xfrm>
           <a:prstGeom prst="rect">
             <a:avLst/>
@@ -8066,130 +9466,54 @@
             <a:r>
               <a:rPr lang="en-US" sz="1300" dirty="0">
                 <a:solidFill>
+                  <a:srgbClr val="8B98B4"/>
+                </a:solidFill>
+                <a:latin typeface="Calibri" pitchFamily="34" charset="0"/>
+                <a:ea typeface="Calibri" pitchFamily="34" charset="-122"/>
+                <a:cs typeface="Calibri" pitchFamily="34" charset="-120"/>
+              </a:rPr>
+              <a:t>At 38q our solver drops BELOW the classical DMRG reference — and χ=800/1200 confirm it is the reference that was truncated, not us.</a:t>
+            </a:r>
+            <a:endParaRPr lang="en-US" sz="1300" dirty="0"/>
+          </a:p>
+        </p:txBody>
+      </p:sp>
+      <p:sp>
+        <p:nvSpPr>
+          <p:cNvPr id="16" name="Text 14"/>
+          <p:cNvSpPr/>
+          <p:nvPr/>
+        </p:nvSpPr>
+        <p:spPr>
+          <a:xfrm>
+            <a:off x="685800" y="6263640"/>
+            <a:ext cx="10789920" cy="365760"/>
+          </a:xfrm>
+          <a:prstGeom prst="rect">
+            <a:avLst/>
+          </a:prstGeom>
+          <a:noFill/>
+          <a:ln/>
+        </p:spPr>
+        <p:txBody>
+          <a:bodyPr wrap="square" lIns="0" tIns="0" rIns="0" bIns="0" rtlCol="0" anchor="ctr"/>
+          <a:lstStyle/>
+          <a:p>
+            <a:pPr indent="0" marL="0">
+              <a:buNone/>
+            </a:pPr>
+            <a:r>
+              <a:rPr lang="en-US" sz="1500" i="1" dirty="0">
+                <a:solidFill>
                   <a:srgbClr val="E8EDF7"/>
                 </a:solidFill>
                 <a:latin typeface="Calibri" pitchFamily="34" charset="0"/>
                 <a:ea typeface="Calibri" pitchFamily="34" charset="-122"/>
                 <a:cs typeface="Calibri" pitchFamily="34" charset="-120"/>
               </a:rPr>
-              <a:t>The 40q absolute result sits AT the chemical-accuracy threshold, not comfortably inside it. The full 40q tensor-network growth run remains owed.</a:t>
-            </a:r>
-            <a:endParaRPr lang="en-US" sz="1300" dirty="0"/>
-          </a:p>
-        </p:txBody>
-      </p:sp>
-      <p:sp>
-        <p:nvSpPr>
-          <p:cNvPr id="16" name="Shape 14"/>
-          <p:cNvSpPr/>
-          <p:nvPr/>
-        </p:nvSpPr>
-        <p:spPr>
-          <a:xfrm>
-            <a:off x="685800" y="5440680"/>
-            <a:ext cx="10789920" cy="841248"/>
-          </a:xfrm>
-          <a:prstGeom prst="roundRect">
-            <a:avLst>
-              <a:gd name="adj" fmla="val 8696"/>
-            </a:avLst>
-          </a:prstGeom>
-          <a:solidFill>
-            <a:srgbClr val="1B2540"/>
-          </a:solidFill>
-          <a:ln w="12700">
-            <a:solidFill>
-              <a:srgbClr val="2A3654"/>
-            </a:solidFill>
-            <a:prstDash val="solid"/>
-          </a:ln>
-          <a:effectLst>
-            <a:outerShdw sx="100000" sy="100000" kx="0" ky="0" algn="bl" rotWithShape="0" blurRad="127000" dist="38100" dir="5400000">
-              <a:srgbClr val="000000">
-                <a:alpha val="35000"/>
-              </a:srgbClr>
-            </a:outerShdw>
-          </a:effectLst>
-        </p:spPr>
-      </p:sp>
-      <p:sp>
-        <p:nvSpPr>
-          <p:cNvPr id="17" name="Text 15"/>
-          <p:cNvSpPr/>
-          <p:nvPr/>
-        </p:nvSpPr>
-        <p:spPr>
-          <a:xfrm>
-            <a:off x="960120" y="5550408"/>
-            <a:ext cx="365760" cy="548640"/>
-          </a:xfrm>
-          <a:prstGeom prst="rect">
-            <a:avLst/>
-          </a:prstGeom>
-          <a:noFill/>
-          <a:ln/>
-        </p:spPr>
-        <p:txBody>
-          <a:bodyPr wrap="square" lIns="0" tIns="0" rIns="0" bIns="0" rtlCol="0" anchor="ctr"/>
-          <a:lstStyle/>
-          <a:p>
-            <a:pPr indent="0" marL="0">
-              <a:buNone/>
-            </a:pPr>
-            <a:r>
-              <a:rPr lang="en-US" sz="1600" dirty="0">
-                <a:solidFill>
-                  <a:srgbClr val="E9B84A"/>
-                </a:solidFill>
-                <a:latin typeface="Calibri" pitchFamily="34" charset="0"/>
-                <a:ea typeface="Calibri" pitchFamily="34" charset="-122"/>
-                <a:cs typeface="Calibri" pitchFamily="34" charset="-120"/>
-              </a:rPr>
-              <a:t>⚑</a:t>
-            </a:r>
-            <a:endParaRPr lang="en-US" sz="1600" dirty="0"/>
-          </a:p>
-        </p:txBody>
-      </p:sp>
-      <p:sp>
-        <p:nvSpPr>
-          <p:cNvPr id="18" name="Text 16"/>
-          <p:cNvSpPr/>
-          <p:nvPr/>
-        </p:nvSpPr>
-        <p:spPr>
-          <a:xfrm>
-            <a:off x="1417320" y="5513832"/>
-            <a:ext cx="9784080" cy="713232"/>
-          </a:xfrm>
-          <a:prstGeom prst="rect">
-            <a:avLst/>
-          </a:prstGeom>
-          <a:noFill/>
-          <a:ln/>
-        </p:spPr>
-        <p:txBody>
-          <a:bodyPr wrap="square" lIns="0" tIns="0" rIns="0" bIns="0" rtlCol="0" anchor="ctr"/>
-          <a:lstStyle/>
-          <a:p>
-            <a:pPr indent="0" marL="0">
-              <a:lnSpc>
-                <a:spcPts val="1800"/>
-              </a:lnSpc>
-              <a:buNone/>
-            </a:pPr>
-            <a:r>
-              <a:rPr lang="en-US" sz="1300" dirty="0">
-                <a:solidFill>
-                  <a:srgbClr val="E8EDF7"/>
-                </a:solidFill>
-                <a:latin typeface="Calibri" pitchFamily="34" charset="0"/>
-                <a:ea typeface="Calibri" pitchFamily="34" charset="-122"/>
-                <a:cs typeface="Calibri" pitchFamily="34" charset="-120"/>
-              </a:rPr>
-              <a:t>Two decision claims were tested and withdrawn rather than defended. The value story above depends on neither.</a:t>
-            </a:r>
-            <a:endParaRPr lang="en-US" sz="1300" dirty="0"/>
+              <a:t>We publish the negatives. That is why the positives should be believed.</a:t>
+            </a:r>
+            <a:endParaRPr lang="en-US" sz="1500" dirty="0"/>
           </a:p>
         </p:txBody>
       </p:sp>

--- a/paper/EIGENNEXUS_MATGENQ_Value_Story.pptx
+++ b/paper/EIGENNEXUS_MATGENQ_Value_Story.pptx
@@ -2114,7 +2114,7 @@
                 <a:ea typeface="Calibri" pitchFamily="34" charset="-122"/>
                 <a:cs typeface="Calibri" pitchFamily="34" charset="-120"/>
               </a:rPr>
-              <a:t>executed on GPU</a:t>
+              <a:t>executed, pre-reg PASS</a:t>
             </a:r>
             <a:endParaRPr lang="en-US" sz="1250" dirty="0"/>
           </a:p>
@@ -2545,7 +2545,7 @@
                 <a:ea typeface="Calibri" pitchFamily="34" charset="-122"/>
                 <a:cs typeface="Calibri" pitchFamily="34" charset="-120"/>
               </a:rPr>
-              <a:t>40q flagship on GPU</a:t>
+              <a:t>40q flagship, executed</a:t>
             </a:r>
             <a:endParaRPr lang="en-US" sz="1300" dirty="0"/>
           </a:p>
@@ -2587,7 +2587,7 @@
                 <a:ea typeface="Calibri" pitchFamily="34" charset="-122"/>
                 <a:cs typeface="Calibri" pitchFamily="34" charset="-120"/>
               </a:rPr>
-              <a:t>Chemically accurate vs its frozen DMRG(χ=400) reference at 450,257 determinants — pre-registered criterion met.</a:t>
+              <a:t>Chemically accurate vs its frozen DMRG(χ=400) reference at 450,257 determinants — pre-registered criterion met. Determinant-space QSCI on the qBraid H100 host; device circuit sampling is the 20q/28q result.</a:t>
             </a:r>
             <a:endParaRPr lang="en-US" sz="1150" dirty="0"/>
           </a:p>
@@ -3596,7 +3596,7 @@
                 <a:ea typeface="Calibri" pitchFamily="34" charset="-122"/>
                 <a:cs typeface="Calibri" pitchFamily="34" charset="-120"/>
               </a:rPr>
-              <a:t>No quantum ADVANTAGE at these sizes. At ≤40 qubits classical methods still solve these instances. The value is trust and correctness, not speed — the advantage regime is beyond, which the 40q run targets.</a:t>
+              <a:t>No quantum ADVANTAGE anywhere in this work. Classical FCI/DMRG solve every instance here, including the 40q flagship — our own DMRG anchor pins it independently. The value is trust and correctness, not speed. Where an advantage regime begins is a question we do not answer.</a:t>
             </a:r>
             <a:endParaRPr lang="en-US" sz="1150" dirty="0"/>
           </a:p>
@@ -4056,7 +4056,7 @@
                 <a:ea typeface="Calibri" pitchFamily="34" charset="-122"/>
                 <a:cs typeface="Calibri" pitchFamily="34" charset="-120"/>
               </a:rPr>
-              <a:t>The 40q tensor-network backend RAN (2.65 h, 12.06 GB) but yielded only 108 determinants where ~450,000 were needed. E9 measured why — seed yield grows only linearly in depth, leaving it 798× short — so the MP2-seeded classical growth was a NECESSARY architecture, not a workaround. What is owed is a sampling strategy, not GPU hours.</a:t>
+              <a:t>The 40q tensor-network backend RAN (2.65 h, 12.06 GB) but yielded only 108 determinants where ~450,000 were needed. E9 measured why: like-for-like at 20q, 400k shots at 3× depth give 564 determinants against a 2,401 requirement — 4.3× short — and yield is flat in system size. The MP2-seeded classical growth was a NECESSARY architecture. What is owed is a sampling strategy, not GPU hours.</a:t>
             </a:r>
             <a:endParaRPr lang="en-US" sz="1150" dirty="0"/>
           </a:p>
@@ -8643,7 +8643,7 @@
                 <a:ea typeface="Calibri" pitchFamily="34" charset="-122"/>
                 <a:cs typeface="Calibri" pitchFamily="34" charset="-120"/>
               </a:rPr>
-              <a:t>−10.293606 Ha</a:t>
+              <a:t>−10.293621 Ha</a:t>
             </a:r>
             <a:endParaRPr lang="en-US" sz="1600" dirty="0"/>
           </a:p>
@@ -8761,7 +8761,7 @@
                 <a:ea typeface="Calibri" pitchFamily="34" charset="-122"/>
                 <a:cs typeface="Calibri" pitchFamily="34" charset="-120"/>
               </a:rPr>
-              <a:t>They agree to 0.007 mHa</a:t>
+              <a:t>They agree to 0.064 mHa</a:t>
             </a:r>
             <a:pPr indent="0" marL="0">
               <a:lnSpc>
@@ -8778,7 +8778,7 @@
                 <a:ea typeface="Calibri" pitchFamily="34" charset="-122"/>
                 <a:cs typeface="Calibri" pitchFamily="34" charset="-120"/>
               </a:rPr>
-              <a:t>  (0.064 mHa across all fit windows) — ~25× inside chemical accuracy, sharing no solver, no extrapolation variable and no code path.</a:t>
+              <a:t>  in the WORST fit window (0.004 best). With Route A’s own jackknife spread folded in: ~0.10 mHa, ~15× inside chemical accuracy — sharing no solver, no extrapolation variable, no code path.</a:t>
             </a:r>
             <a:endParaRPr lang="en-US" sz="1500" dirty="0"/>
           </a:p>
@@ -8800,8 +8800,8 @@
         </p:blipFill>
         <p:spPr>
           <a:xfrm>
-            <a:off x="7086600" y="1828800"/>
-            <a:ext cx="4389120" cy="2542032"/>
+            <a:off x="7086600" y="2103120"/>
+            <a:ext cx="4389120" cy="2011680"/>
           </a:xfrm>
           <a:prstGeom prst="rect">
             <a:avLst/>
@@ -8880,7 +8880,7 @@
                 <a:ea typeface="Calibri" pitchFamily="34" charset="-122"/>
                 <a:cs typeface="Calibri" pitchFamily="34" charset="-120"/>
               </a:rPr>
-              <a:t>FCI(H₂₀, 40q, STO-6G) ≈ −10.29360 Ha</a:t>
+              <a:t>FCI(H₂₀, 40q, STO-6G) ≈ −10.29361 Ha</a:t>
             </a:r>
             <a:endParaRPr lang="en-US" sz="1500" dirty="0"/>
           </a:p>

--- a/paper/EIGENNEXUS_MATGENQ_Value_Story.pptx
+++ b/paper/EIGENNEXUS_MATGENQ_Value_Story.pptx
@@ -5657,7 +5657,7 @@
                 <a:ea typeface="Calibri" pitchFamily="34" charset="-122"/>
                 <a:cs typeface="Calibri" pitchFamily="34" charset="-120"/>
               </a:rPr>
-              <a:t>~140 mHa</a:t>
+              <a:t>~162 mHa</a:t>
             </a:r>
             <a:endParaRPr lang="en-US" sz="2400" dirty="0"/>
           </a:p>
@@ -6530,7 +6530,7 @@
                 <a:ea typeface="Calibri" pitchFamily="34" charset="-122"/>
                 <a:cs typeface="Calibri" pitchFamily="34" charset="-120"/>
               </a:rPr>
-              <a:t>EN-PT2 certificate: encoder/selci_pt2.py — equilibrium extrapolation reproduces FCI to ~4 mHa, R² = 0.999.</a:t>
+              <a:t>EN-PT2 certificate: encoder/selci_pt2.py — extrapolation hits FCI to ~4 mHa at equilibrium, ~54 mHa stretched (disclosed); the bracket is rigorous either way.</a:t>
             </a:r>
             <a:endParaRPr lang="en-US" sz="1050" dirty="0"/>
           </a:p>
@@ -6948,7 +6948,7 @@
                 <a:ea typeface="Cambria" pitchFamily="34" charset="-122"/>
                 <a:cs typeface="Cambria" pitchFamily="34" charset="-120"/>
               </a:rPr>
-              <a:t>Executed at scale, on real hardware</a:t>
+              <a:t>Executed at scale — and on real devices</a:t>
             </a:r>
             <a:endParaRPr lang="en-US" sz="1700" dirty="0"/>
           </a:p>
@@ -8922,7 +8922,7 @@
                 <a:ea typeface="Calibri" pitchFamily="34" charset="-122"/>
                 <a:cs typeface="Calibri" pitchFamily="34" charset="-120"/>
               </a:rPr>
-              <a:t>Both routes are extrapolations, not exact FCI; Route B is fit-window dependent (full spread reported). No new computation — analysis of already-committed evidence.</a:t>
+              <a:t>Both routes are extrapolations, not exact FCI; we quote the WORST fit window, not the best. No new computation — analysis of already-committed evidence.</a:t>
             </a:r>
             <a:endParaRPr lang="en-US" sz="1000" dirty="0"/>
           </a:p>

--- a/paper/EIGENNEXUS_MATGENQ_Value_Story.pptx
+++ b/paper/EIGENNEXUS_MATGENQ_Value_Story.pptx
@@ -5657,7 +5657,7 @@
                 <a:ea typeface="Calibri" pitchFamily="34" charset="-122"/>
                 <a:cs typeface="Calibri" pitchFamily="34" charset="-120"/>
               </a:rPr>
-              <a:t>~162 mHa</a:t>
+              <a:t>144–162 mHa</a:t>
             </a:r>
             <a:endParaRPr lang="en-US" sz="2400" dirty="0"/>
           </a:p>
@@ -5738,7 +5738,7 @@
                 <a:ea typeface="Calibri" pitchFamily="34" charset="-122"/>
                 <a:cs typeface="Calibri" pitchFamily="34" charset="-120"/>
               </a:rPr>
-              <a:t>A real Cr–O bond stretch, in the identical active space as the exact reference.</a:t>
+              <a:t>A real Cr–O bond stretch, identical active space as the exact reference. The spread across runs IS the non-convergence.</a:t>
             </a:r>
             <a:endParaRPr lang="en-US" sz="1250" dirty="0"/>
           </a:p>

--- a/paper/EIGENNEXUS_MATGENQ_Value_Story.pptx
+++ b/paper/EIGENNEXUS_MATGENQ_Value_Story.pptx
@@ -5657,7 +5657,7 @@
                 <a:ea typeface="Calibri" pitchFamily="34" charset="-122"/>
                 <a:cs typeface="Calibri" pitchFamily="34" charset="-120"/>
               </a:rPr>
-              <a:t>144–162 mHa</a:t>
+              <a:t>~144 mHa</a:t>
             </a:r>
             <a:endParaRPr lang="en-US" sz="2400" dirty="0"/>
           </a:p>
@@ -5738,7 +5738,7 @@
                 <a:ea typeface="Calibri" pitchFamily="34" charset="-122"/>
                 <a:cs typeface="Calibri" pitchFamily="34" charset="-120"/>
               </a:rPr>
-              <a:t>A real Cr–O bond stretch, identical active space as the exact reference. The spread across runs IS the non-convergence.</a:t>
+              <a:t>A real Cr–O bond stretch, identical active space as the exact reference. Non-convergent points scatter on re-runs (to ~162) — that scatter IS the failure.</a:t>
             </a:r>
             <a:endParaRPr lang="en-US" sz="1250" dirty="0"/>
           </a:p>
